--- a/ch_00_setup/1. Introduction to Python Programming.pptx
+++ b/ch_00_setup/1. Introduction to Python Programming.pptx
@@ -2,15 +2,14 @@
 <file path=ppt/presentation.xml><?xml version="1.0" encoding="utf-8"?>
 <p:presentation xmlns:a="http://schemas.openxmlformats.org/drawingml/2006/main" xmlns:r="http://schemas.openxmlformats.org/officeDocument/2006/relationships" xmlns:p="http://schemas.openxmlformats.org/presentationml/2006/main" autoCompressPictures="0">
   <p:sldMasterIdLst>
-    <p:sldMasterId id="2147483905" r:id="rId1"/>
+    <p:sldMasterId id="2147484684" r:id="rId1"/>
   </p:sldMasterIdLst>
   <p:sldIdLst>
     <p:sldId id="256" r:id="rId2"/>
     <p:sldId id="257" r:id="rId3"/>
     <p:sldId id="258" r:id="rId4"/>
     <p:sldId id="259" r:id="rId5"/>
-    <p:sldId id="261" r:id="rId6"/>
-    <p:sldId id="262" r:id="rId7"/>
+    <p:sldId id="262" r:id="rId6"/>
   </p:sldIdLst>
   <p:sldSz cx="12192000" cy="6858000"/>
   <p:notesSz cx="6858000" cy="9144000"/>
@@ -18,7 +17,7 @@
     <a:defPPr>
       <a:defRPr lang="en-US"/>
     </a:defPPr>
-    <a:lvl1pPr marL="0" algn="l" defTabSz="914400" rtl="0" eaLnBrk="1" latinLnBrk="0" hangingPunct="1">
+    <a:lvl1pPr marL="0" algn="l" defTabSz="457200" rtl="0" eaLnBrk="1" latinLnBrk="0" hangingPunct="1">
       <a:defRPr sz="1800" kern="1200">
         <a:solidFill>
           <a:schemeClr val="tx1"/>
@@ -28,7 +27,7 @@
         <a:cs typeface="+mn-cs"/>
       </a:defRPr>
     </a:lvl1pPr>
-    <a:lvl2pPr marL="457200" algn="l" defTabSz="914400" rtl="0" eaLnBrk="1" latinLnBrk="0" hangingPunct="1">
+    <a:lvl2pPr marL="457200" algn="l" defTabSz="457200" rtl="0" eaLnBrk="1" latinLnBrk="0" hangingPunct="1">
       <a:defRPr sz="1800" kern="1200">
         <a:solidFill>
           <a:schemeClr val="tx1"/>
@@ -38,7 +37,7 @@
         <a:cs typeface="+mn-cs"/>
       </a:defRPr>
     </a:lvl2pPr>
-    <a:lvl3pPr marL="914400" algn="l" defTabSz="914400" rtl="0" eaLnBrk="1" latinLnBrk="0" hangingPunct="1">
+    <a:lvl3pPr marL="914400" algn="l" defTabSz="457200" rtl="0" eaLnBrk="1" latinLnBrk="0" hangingPunct="1">
       <a:defRPr sz="1800" kern="1200">
         <a:solidFill>
           <a:schemeClr val="tx1"/>
@@ -48,7 +47,7 @@
         <a:cs typeface="+mn-cs"/>
       </a:defRPr>
     </a:lvl3pPr>
-    <a:lvl4pPr marL="1371600" algn="l" defTabSz="914400" rtl="0" eaLnBrk="1" latinLnBrk="0" hangingPunct="1">
+    <a:lvl4pPr marL="1371600" algn="l" defTabSz="457200" rtl="0" eaLnBrk="1" latinLnBrk="0" hangingPunct="1">
       <a:defRPr sz="1800" kern="1200">
         <a:solidFill>
           <a:schemeClr val="tx1"/>
@@ -58,7 +57,7 @@
         <a:cs typeface="+mn-cs"/>
       </a:defRPr>
     </a:lvl4pPr>
-    <a:lvl5pPr marL="1828800" algn="l" defTabSz="914400" rtl="0" eaLnBrk="1" latinLnBrk="0" hangingPunct="1">
+    <a:lvl5pPr marL="1828800" algn="l" defTabSz="457200" rtl="0" eaLnBrk="1" latinLnBrk="0" hangingPunct="1">
       <a:defRPr sz="1800" kern="1200">
         <a:solidFill>
           <a:schemeClr val="tx1"/>
@@ -68,7 +67,7 @@
         <a:cs typeface="+mn-cs"/>
       </a:defRPr>
     </a:lvl5pPr>
-    <a:lvl6pPr marL="2286000" algn="l" defTabSz="914400" rtl="0" eaLnBrk="1" latinLnBrk="0" hangingPunct="1">
+    <a:lvl6pPr marL="2286000" algn="l" defTabSz="457200" rtl="0" eaLnBrk="1" latinLnBrk="0" hangingPunct="1">
       <a:defRPr sz="1800" kern="1200">
         <a:solidFill>
           <a:schemeClr val="tx1"/>
@@ -78,7 +77,7 @@
         <a:cs typeface="+mn-cs"/>
       </a:defRPr>
     </a:lvl6pPr>
-    <a:lvl7pPr marL="2743200" algn="l" defTabSz="914400" rtl="0" eaLnBrk="1" latinLnBrk="0" hangingPunct="1">
+    <a:lvl7pPr marL="2743200" algn="l" defTabSz="457200" rtl="0" eaLnBrk="1" latinLnBrk="0" hangingPunct="1">
       <a:defRPr sz="1800" kern="1200">
         <a:solidFill>
           <a:schemeClr val="tx1"/>
@@ -88,7 +87,7 @@
         <a:cs typeface="+mn-cs"/>
       </a:defRPr>
     </a:lvl7pPr>
-    <a:lvl8pPr marL="3200400" algn="l" defTabSz="914400" rtl="0" eaLnBrk="1" latinLnBrk="0" hangingPunct="1">
+    <a:lvl8pPr marL="3200400" algn="l" defTabSz="457200" rtl="0" eaLnBrk="1" latinLnBrk="0" hangingPunct="1">
       <a:defRPr sz="1800" kern="1200">
         <a:solidFill>
           <a:schemeClr val="tx1"/>
@@ -98,7 +97,7 @@
         <a:cs typeface="+mn-cs"/>
       </a:defRPr>
     </a:lvl8pPr>
-    <a:lvl9pPr marL="3657600" algn="l" defTabSz="914400" rtl="0" eaLnBrk="1" latinLnBrk="0" hangingPunct="1">
+    <a:lvl9pPr marL="3657600" algn="l" defTabSz="457200" rtl="0" eaLnBrk="1" latinLnBrk="0" hangingPunct="1">
       <a:defRPr sz="1800" kern="1200">
         <a:solidFill>
           <a:schemeClr val="tx1"/>
@@ -120,6 +119,11 @@
 <file path=ppt/slideLayouts/slideLayout1.xml><?xml version="1.0" encoding="utf-8"?>
 <p:sldLayout xmlns:a="http://schemas.openxmlformats.org/drawingml/2006/main" xmlns:r="http://schemas.openxmlformats.org/officeDocument/2006/relationships" xmlns:p="http://schemas.openxmlformats.org/presentationml/2006/main" type="title" preserve="1">
   <p:cSld name="Title Slide">
+    <p:bg>
+      <p:bgRef idx="1003">
+        <a:schemeClr val="bg2"/>
+      </p:bgRef>
+    </p:bg>
     <p:spTree>
       <p:nvGrpSpPr>
         <p:cNvPr id="1" name=""/>
@@ -134,15 +138,39 @@
           <a:chExt cx="0" cy="0"/>
         </a:xfrm>
       </p:grpSpPr>
-      <p:sp>
-        <p:nvSpPr>
-          <p:cNvPr id="2" name="Title 1">
+      <p:pic>
+        <p:nvPicPr>
+          <p:cNvPr id="7" name="Picture 6" descr="Celestia-R1---OverlayTitleHD.png"/>
+          <p:cNvPicPr>
+            <a:picLocks noChangeAspect="1"/>
+          </p:cNvPicPr>
+          <p:nvPr/>
+        </p:nvPicPr>
+        <p:blipFill>
+          <a:blip r:embed="rId2">
             <a:extLst>
-              <a:ext uri="{FF2B5EF4-FFF2-40B4-BE49-F238E27FC236}">
-                <a16:creationId xmlns:a16="http://schemas.microsoft.com/office/drawing/2014/main" id="{40A9BE34-09D2-9990-BDED-21D5BE05C171}"/>
+              <a:ext uri="{28A0092B-C50C-407E-A947-70E740481C1C}">
+                <a14:useLocalDpi xmlns:a14="http://schemas.microsoft.com/office/drawing/2010/main" val="0"/>
               </a:ext>
             </a:extLst>
-          </p:cNvPr>
+          </a:blip>
+          <a:stretch>
+            <a:fillRect/>
+          </a:stretch>
+        </p:blipFill>
+        <p:spPr>
+          <a:xfrm>
+            <a:off x="0" y="0"/>
+            <a:ext cx="12188825" cy="6856214"/>
+          </a:xfrm>
+          <a:prstGeom prst="rect">
+            <a:avLst/>
+          </a:prstGeom>
+        </p:spPr>
+      </p:pic>
+      <p:sp>
+        <p:nvSpPr>
+          <p:cNvPr id="2" name="Title 1"/>
           <p:cNvSpPr>
             <a:spLocks noGrp="1"/>
           </p:cNvSpPr>
@@ -152,15 +180,19 @@
         </p:nvSpPr>
         <p:spPr>
           <a:xfrm>
-            <a:off x="1524000" y="1122363"/>
-            <a:ext cx="9144000" cy="2387600"/>
-          </a:xfrm>
-        </p:spPr>
-        <p:txBody>
-          <a:bodyPr anchor="b"/>
+            <a:off x="3962399" y="1964267"/>
+            <a:ext cx="7197726" cy="2421464"/>
+          </a:xfrm>
+        </p:spPr>
+        <p:txBody>
+          <a:bodyPr anchor="b">
+            <a:normAutofit/>
+          </a:bodyPr>
           <a:lstStyle>
-            <a:lvl1pPr algn="ctr">
-              <a:defRPr sz="6000"/>
+            <a:lvl1pPr algn="r">
+              <a:defRPr sz="4800">
+                <a:effectLst/>
+              </a:defRPr>
             </a:lvl1pPr>
           </a:lstStyle>
           <a:p>
@@ -168,18 +200,13 @@
               <a:rPr lang="en-US"/>
               <a:t>Click to edit Master title style</a:t>
             </a:r>
-          </a:p>
-        </p:txBody>
-      </p:sp>
-      <p:sp>
-        <p:nvSpPr>
-          <p:cNvPr id="3" name="Subtitle 2">
-            <a:extLst>
-              <a:ext uri="{FF2B5EF4-FFF2-40B4-BE49-F238E27FC236}">
-                <a16:creationId xmlns:a16="http://schemas.microsoft.com/office/drawing/2014/main" id="{FAD96FE8-B5C2-69B6-AEB0-261CEC9C1B7E}"/>
-              </a:ext>
-            </a:extLst>
-          </p:cNvPr>
+            <a:endParaRPr lang="en-US" dirty="0"/>
+          </a:p>
+        </p:txBody>
+      </p:sp>
+      <p:sp>
+        <p:nvSpPr>
+          <p:cNvPr id="3" name="Subtitle 2"/>
           <p:cNvSpPr>
             <a:spLocks noGrp="1"/>
           </p:cNvSpPr>
@@ -189,48 +216,102 @@
         </p:nvSpPr>
         <p:spPr>
           <a:xfrm>
-            <a:off x="1524000" y="3602038"/>
-            <a:ext cx="9144000" cy="1655762"/>
-          </a:xfrm>
-        </p:spPr>
-        <p:txBody>
-          <a:bodyPr/>
+            <a:off x="3962399" y="4385732"/>
+            <a:ext cx="7197726" cy="1405467"/>
+          </a:xfrm>
+        </p:spPr>
+        <p:txBody>
+          <a:bodyPr anchor="t">
+            <a:normAutofit/>
+          </a:bodyPr>
           <a:lstStyle>
-            <a:lvl1pPr marL="0" indent="0" algn="ctr">
-              <a:buNone/>
-              <a:defRPr sz="2400"/>
+            <a:lvl1pPr marL="0" indent="0" algn="r">
+              <a:buNone/>
+              <a:defRPr sz="1800" cap="all">
+                <a:solidFill>
+                  <a:schemeClr val="tx1"/>
+                </a:solidFill>
+              </a:defRPr>
             </a:lvl1pPr>
             <a:lvl2pPr marL="457200" indent="0" algn="ctr">
               <a:buNone/>
-              <a:defRPr sz="2000"/>
+              <a:defRPr>
+                <a:solidFill>
+                  <a:schemeClr val="tx1">
+                    <a:tint val="75000"/>
+                  </a:schemeClr>
+                </a:solidFill>
+              </a:defRPr>
             </a:lvl2pPr>
             <a:lvl3pPr marL="914400" indent="0" algn="ctr">
               <a:buNone/>
-              <a:defRPr sz="1800"/>
+              <a:defRPr>
+                <a:solidFill>
+                  <a:schemeClr val="tx1">
+                    <a:tint val="75000"/>
+                  </a:schemeClr>
+                </a:solidFill>
+              </a:defRPr>
             </a:lvl3pPr>
             <a:lvl4pPr marL="1371600" indent="0" algn="ctr">
               <a:buNone/>
-              <a:defRPr sz="1600"/>
+              <a:defRPr>
+                <a:solidFill>
+                  <a:schemeClr val="tx1">
+                    <a:tint val="75000"/>
+                  </a:schemeClr>
+                </a:solidFill>
+              </a:defRPr>
             </a:lvl4pPr>
             <a:lvl5pPr marL="1828800" indent="0" algn="ctr">
               <a:buNone/>
-              <a:defRPr sz="1600"/>
+              <a:defRPr>
+                <a:solidFill>
+                  <a:schemeClr val="tx1">
+                    <a:tint val="75000"/>
+                  </a:schemeClr>
+                </a:solidFill>
+              </a:defRPr>
             </a:lvl5pPr>
             <a:lvl6pPr marL="2286000" indent="0" algn="ctr">
               <a:buNone/>
-              <a:defRPr sz="1600"/>
+              <a:defRPr>
+                <a:solidFill>
+                  <a:schemeClr val="tx1">
+                    <a:tint val="75000"/>
+                  </a:schemeClr>
+                </a:solidFill>
+              </a:defRPr>
             </a:lvl6pPr>
             <a:lvl7pPr marL="2743200" indent="0" algn="ctr">
               <a:buNone/>
-              <a:defRPr sz="1600"/>
+              <a:defRPr>
+                <a:solidFill>
+                  <a:schemeClr val="tx1">
+                    <a:tint val="75000"/>
+                  </a:schemeClr>
+                </a:solidFill>
+              </a:defRPr>
             </a:lvl7pPr>
             <a:lvl8pPr marL="3200400" indent="0" algn="ctr">
               <a:buNone/>
-              <a:defRPr sz="1600"/>
+              <a:defRPr>
+                <a:solidFill>
+                  <a:schemeClr val="tx1">
+                    <a:tint val="75000"/>
+                  </a:schemeClr>
+                </a:solidFill>
+              </a:defRPr>
             </a:lvl8pPr>
             <a:lvl9pPr marL="3657600" indent="0" algn="ctr">
               <a:buNone/>
-              <a:defRPr sz="1600"/>
+              <a:defRPr>
+                <a:solidFill>
+                  <a:schemeClr val="tx1">
+                    <a:tint val="75000"/>
+                  </a:schemeClr>
+                </a:solidFill>
+              </a:defRPr>
             </a:lvl9pPr>
           </a:lstStyle>
           <a:p>
@@ -238,18 +319,13 @@
               <a:rPr lang="en-US"/>
               <a:t>Click to edit Master subtitle style</a:t>
             </a:r>
-          </a:p>
-        </p:txBody>
-      </p:sp>
-      <p:sp>
-        <p:nvSpPr>
-          <p:cNvPr id="4" name="Date Placeholder 3">
-            <a:extLst>
-              <a:ext uri="{FF2B5EF4-FFF2-40B4-BE49-F238E27FC236}">
-                <a16:creationId xmlns:a16="http://schemas.microsoft.com/office/drawing/2014/main" id="{26D45D57-0497-6D26-F096-976DCF399F2F}"/>
-              </a:ext>
-            </a:extLst>
-          </p:cNvPr>
+            <a:endParaRPr lang="en-US" dirty="0"/>
+          </a:p>
+        </p:txBody>
+      </p:sp>
+      <p:sp>
+        <p:nvSpPr>
+          <p:cNvPr id="4" name="Date Placeholder 3"/>
           <p:cNvSpPr>
             <a:spLocks noGrp="1"/>
           </p:cNvSpPr>
@@ -257,7 +333,12 @@
             <p:ph type="dt" sz="half" idx="10"/>
           </p:nvPr>
         </p:nvSpPr>
-        <p:spPr/>
+        <p:spPr>
+          <a:xfrm>
+            <a:off x="8932558" y="5870575"/>
+            <a:ext cx="1600200" cy="377825"/>
+          </a:xfrm>
+        </p:spPr>
         <p:txBody>
           <a:bodyPr/>
           <a:lstStyle/>
@@ -265,7 +346,7 @@
             <a:fld id="{B61BEF0D-F0BB-DE4B-95CE-6DB70DBA9567}" type="datetimeFigureOut">
               <a:rPr lang="en-US" smtClean="0"/>
               <a:pPr/>
-              <a:t>3/14/2024</a:t>
+              <a:t>3/16/2024</a:t>
             </a:fld>
             <a:endParaRPr lang="en-US" dirty="0"/>
           </a:p>
@@ -273,13 +354,7 @@
       </p:sp>
       <p:sp>
         <p:nvSpPr>
-          <p:cNvPr id="5" name="Footer Placeholder 4">
-            <a:extLst>
-              <a:ext uri="{FF2B5EF4-FFF2-40B4-BE49-F238E27FC236}">
-                <a16:creationId xmlns:a16="http://schemas.microsoft.com/office/drawing/2014/main" id="{86549E3E-EFF9-777B-C938-946A4826C13E}"/>
-              </a:ext>
-            </a:extLst>
-          </p:cNvPr>
+          <p:cNvPr id="5" name="Footer Placeholder 4"/>
           <p:cNvSpPr>
             <a:spLocks noGrp="1"/>
           </p:cNvSpPr>
@@ -287,7 +362,12 @@
             <p:ph type="ftr" sz="quarter" idx="11"/>
           </p:nvPr>
         </p:nvSpPr>
-        <p:spPr/>
+        <p:spPr>
+          <a:xfrm>
+            <a:off x="3962399" y="5870575"/>
+            <a:ext cx="4893958" cy="377825"/>
+          </a:xfrm>
+        </p:spPr>
         <p:txBody>
           <a:bodyPr/>
           <a:lstStyle/>
@@ -298,13 +378,7 @@
       </p:sp>
       <p:sp>
         <p:nvSpPr>
-          <p:cNvPr id="6" name="Slide Number Placeholder 5">
-            <a:extLst>
-              <a:ext uri="{FF2B5EF4-FFF2-40B4-BE49-F238E27FC236}">
-                <a16:creationId xmlns:a16="http://schemas.microsoft.com/office/drawing/2014/main" id="{C26F4DBC-1E2E-EFE3-2CFB-05CD800ED1D0}"/>
-              </a:ext>
-            </a:extLst>
-          </p:cNvPr>
+          <p:cNvPr id="6" name="Slide Number Placeholder 5"/>
           <p:cNvSpPr>
             <a:spLocks noGrp="1"/>
           </p:cNvSpPr>
@@ -312,7 +386,12 @@
             <p:ph type="sldNum" sz="quarter" idx="12"/>
           </p:nvPr>
         </p:nvSpPr>
-        <p:spPr/>
+        <p:spPr>
+          <a:xfrm>
+            <a:off x="10608958" y="5870575"/>
+            <a:ext cx="551167" cy="377825"/>
+          </a:xfrm>
+        </p:spPr>
         <p:txBody>
           <a:bodyPr/>
           <a:lstStyle/>
@@ -329,7 +408,333 @@
     </p:spTree>
     <p:extLst>
       <p:ext uri="{BB962C8B-B14F-4D97-AF65-F5344CB8AC3E}">
-        <p14:creationId xmlns:p14="http://schemas.microsoft.com/office/powerpoint/2010/main" val="3776273191"/>
+        <p14:creationId xmlns:p14="http://schemas.microsoft.com/office/powerpoint/2010/main" val="1282828487"/>
+      </p:ext>
+    </p:extLst>
+  </p:cSld>
+  <p:clrMapOvr>
+    <a:overrideClrMapping bg1="dk1" tx1="lt1" bg2="dk2" tx2="lt2" accent1="accent1" accent2="accent2" accent3="accent3" accent4="accent4" accent5="accent5" accent6="accent6" hlink="hlink" folHlink="folHlink"/>
+  </p:clrMapOvr>
+</p:sldLayout>
+</file>
+
+<file path=ppt/slideLayouts/slideLayout10.xml><?xml version="1.0" encoding="utf-8"?>
+<p:sldLayout xmlns:a="http://schemas.openxmlformats.org/drawingml/2006/main" xmlns:r="http://schemas.openxmlformats.org/officeDocument/2006/relationships" xmlns:p="http://schemas.openxmlformats.org/presentationml/2006/main" preserve="1">
+  <p:cSld name="Panoramic Picture with Caption">
+    <p:spTree>
+      <p:nvGrpSpPr>
+        <p:cNvPr id="1" name=""/>
+        <p:cNvGrpSpPr/>
+        <p:nvPr/>
+      </p:nvGrpSpPr>
+      <p:grpSpPr>
+        <a:xfrm>
+          <a:off x="0" y="0"/>
+          <a:ext cx="0" cy="0"/>
+          <a:chOff x="0" y="0"/>
+          <a:chExt cx="0" cy="0"/>
+        </a:xfrm>
+      </p:grpSpPr>
+      <p:pic>
+        <p:nvPicPr>
+          <p:cNvPr id="8" name="Picture 7" descr="Celestia-R1---OverlayContentHD.png"/>
+          <p:cNvPicPr>
+            <a:picLocks noChangeAspect="1"/>
+          </p:cNvPicPr>
+          <p:nvPr/>
+        </p:nvPicPr>
+        <p:blipFill>
+          <a:blip r:embed="rId2">
+            <a:extLst>
+              <a:ext uri="{28A0092B-C50C-407E-A947-70E740481C1C}">
+                <a14:useLocalDpi xmlns:a14="http://schemas.microsoft.com/office/drawing/2010/main" val="0"/>
+              </a:ext>
+            </a:extLst>
+          </a:blip>
+          <a:stretch>
+            <a:fillRect/>
+          </a:stretch>
+        </p:blipFill>
+        <p:spPr>
+          <a:xfrm>
+            <a:off x="0" y="0"/>
+            <a:ext cx="12188825" cy="6856214"/>
+          </a:xfrm>
+          <a:prstGeom prst="rect">
+            <a:avLst/>
+          </a:prstGeom>
+        </p:spPr>
+      </p:pic>
+      <p:sp>
+        <p:nvSpPr>
+          <p:cNvPr id="2" name="Title 1"/>
+          <p:cNvSpPr>
+            <a:spLocks noGrp="1"/>
+          </p:cNvSpPr>
+          <p:nvPr>
+            <p:ph type="title"/>
+          </p:nvPr>
+        </p:nvSpPr>
+        <p:spPr>
+          <a:xfrm>
+            <a:off x="685800" y="4732865"/>
+            <a:ext cx="10131427" cy="566738"/>
+          </a:xfrm>
+        </p:spPr>
+        <p:txBody>
+          <a:bodyPr anchor="b">
+            <a:normAutofit/>
+          </a:bodyPr>
+          <a:lstStyle>
+            <a:lvl1pPr algn="l">
+              <a:defRPr sz="2400" b="0"/>
+            </a:lvl1pPr>
+          </a:lstStyle>
+          <a:p>
+            <a:r>
+              <a:rPr lang="en-US"/>
+              <a:t>Click to edit Master title style</a:t>
+            </a:r>
+            <a:endParaRPr lang="en-US" dirty="0"/>
+          </a:p>
+        </p:txBody>
+      </p:sp>
+      <p:sp>
+        <p:nvSpPr>
+          <p:cNvPr id="3" name="Picture Placeholder 2"/>
+          <p:cNvSpPr>
+            <a:spLocks noGrp="1" noChangeAspect="1"/>
+          </p:cNvSpPr>
+          <p:nvPr>
+            <p:ph type="pic" idx="1"/>
+          </p:nvPr>
+        </p:nvSpPr>
+        <p:spPr>
+          <a:xfrm>
+            <a:off x="1371600" y="932112"/>
+            <a:ext cx="8759827" cy="3164976"/>
+          </a:xfrm>
+          <a:prstGeom prst="roundRect">
+            <a:avLst>
+              <a:gd name="adj" fmla="val 4380"/>
+            </a:avLst>
+          </a:prstGeom>
+          <a:ln w="50800" cap="sq" cmpd="dbl">
+            <a:gradFill flip="none" rotWithShape="1">
+              <a:gsLst>
+                <a:gs pos="0">
+                  <a:srgbClr val="FFFFFF"/>
+                </a:gs>
+                <a:gs pos="100000">
+                  <a:schemeClr val="tx1">
+                    <a:alpha val="0"/>
+                  </a:schemeClr>
+                </a:gs>
+              </a:gsLst>
+              <a:path path="circle">
+                <a:fillToRect l="50000" t="50000" r="50000" b="50000"/>
+              </a:path>
+              <a:tileRect/>
+            </a:gradFill>
+            <a:miter lim="800000"/>
+          </a:ln>
+          <a:effectLst>
+            <a:outerShdw blurRad="254000" algn="tl" rotWithShape="0">
+              <a:srgbClr val="000000">
+                <a:alpha val="43000"/>
+              </a:srgbClr>
+            </a:outerShdw>
+          </a:effectLst>
+        </p:spPr>
+        <p:txBody>
+          <a:bodyPr anchor="t">
+            <a:normAutofit/>
+          </a:bodyPr>
+          <a:lstStyle>
+            <a:lvl1pPr marL="0" indent="0" algn="ctr">
+              <a:buNone/>
+              <a:defRPr sz="1600"/>
+            </a:lvl1pPr>
+            <a:lvl2pPr marL="457200" indent="0">
+              <a:buNone/>
+              <a:defRPr sz="1600"/>
+            </a:lvl2pPr>
+            <a:lvl3pPr marL="914400" indent="0">
+              <a:buNone/>
+              <a:defRPr sz="1600"/>
+            </a:lvl3pPr>
+            <a:lvl4pPr marL="1371600" indent="0">
+              <a:buNone/>
+              <a:defRPr sz="1600"/>
+            </a:lvl4pPr>
+            <a:lvl5pPr marL="1828800" indent="0">
+              <a:buNone/>
+              <a:defRPr sz="1600"/>
+            </a:lvl5pPr>
+            <a:lvl6pPr marL="2286000" indent="0">
+              <a:buNone/>
+              <a:defRPr sz="1600"/>
+            </a:lvl6pPr>
+            <a:lvl7pPr marL="2743200" indent="0">
+              <a:buNone/>
+              <a:defRPr sz="1600"/>
+            </a:lvl7pPr>
+            <a:lvl8pPr marL="3200400" indent="0">
+              <a:buNone/>
+              <a:defRPr sz="1600"/>
+            </a:lvl8pPr>
+            <a:lvl9pPr marL="3657600" indent="0">
+              <a:buNone/>
+              <a:defRPr sz="1600"/>
+            </a:lvl9pPr>
+          </a:lstStyle>
+          <a:p>
+            <a:r>
+              <a:rPr lang="en-US"/>
+              <a:t>Click icon to add picture</a:t>
+            </a:r>
+            <a:endParaRPr lang="en-US" dirty="0"/>
+          </a:p>
+        </p:txBody>
+      </p:sp>
+      <p:sp>
+        <p:nvSpPr>
+          <p:cNvPr id="4" name="Text Placeholder 3"/>
+          <p:cNvSpPr>
+            <a:spLocks noGrp="1"/>
+          </p:cNvSpPr>
+          <p:nvPr>
+            <p:ph type="body" sz="half" idx="2"/>
+          </p:nvPr>
+        </p:nvSpPr>
+        <p:spPr>
+          <a:xfrm>
+            <a:off x="685800" y="5299603"/>
+            <a:ext cx="10131427" cy="493712"/>
+          </a:xfrm>
+        </p:spPr>
+        <p:txBody>
+          <a:bodyPr anchor="t">
+            <a:normAutofit/>
+          </a:bodyPr>
+          <a:lstStyle>
+            <a:lvl1pPr marL="0" indent="0">
+              <a:buNone/>
+              <a:defRPr sz="1400"/>
+            </a:lvl1pPr>
+            <a:lvl2pPr marL="457200" indent="0">
+              <a:buNone/>
+              <a:defRPr sz="1200"/>
+            </a:lvl2pPr>
+            <a:lvl3pPr marL="914400" indent="0">
+              <a:buNone/>
+              <a:defRPr sz="1000"/>
+            </a:lvl3pPr>
+            <a:lvl4pPr marL="1371600" indent="0">
+              <a:buNone/>
+              <a:defRPr sz="900"/>
+            </a:lvl4pPr>
+            <a:lvl5pPr marL="1828800" indent="0">
+              <a:buNone/>
+              <a:defRPr sz="900"/>
+            </a:lvl5pPr>
+            <a:lvl6pPr marL="2286000" indent="0">
+              <a:buNone/>
+              <a:defRPr sz="900"/>
+            </a:lvl6pPr>
+            <a:lvl7pPr marL="2743200" indent="0">
+              <a:buNone/>
+              <a:defRPr sz="900"/>
+            </a:lvl7pPr>
+            <a:lvl8pPr marL="3200400" indent="0">
+              <a:buNone/>
+              <a:defRPr sz="900"/>
+            </a:lvl8pPr>
+            <a:lvl9pPr marL="3657600" indent="0">
+              <a:buNone/>
+              <a:defRPr sz="900"/>
+            </a:lvl9pPr>
+          </a:lstStyle>
+          <a:p>
+            <a:pPr lvl="0"/>
+            <a:r>
+              <a:rPr lang="en-US"/>
+              <a:t>Click to edit Master text styles</a:t>
+            </a:r>
+          </a:p>
+        </p:txBody>
+      </p:sp>
+      <p:sp>
+        <p:nvSpPr>
+          <p:cNvPr id="5" name="Date Placeholder 4"/>
+          <p:cNvSpPr>
+            <a:spLocks noGrp="1"/>
+          </p:cNvSpPr>
+          <p:nvPr>
+            <p:ph type="dt" sz="half" idx="10"/>
+          </p:nvPr>
+        </p:nvSpPr>
+        <p:spPr/>
+        <p:txBody>
+          <a:bodyPr/>
+          <a:lstStyle/>
+          <a:p>
+            <a:fld id="{B61BEF0D-F0BB-DE4B-95CE-6DB70DBA9567}" type="datetimeFigureOut">
+              <a:rPr lang="en-US" smtClean="0"/>
+              <a:pPr/>
+              <a:t>3/16/2024</a:t>
+            </a:fld>
+            <a:endParaRPr lang="en-US" dirty="0"/>
+          </a:p>
+        </p:txBody>
+      </p:sp>
+      <p:sp>
+        <p:nvSpPr>
+          <p:cNvPr id="6" name="Footer Placeholder 5"/>
+          <p:cNvSpPr>
+            <a:spLocks noGrp="1"/>
+          </p:cNvSpPr>
+          <p:nvPr>
+            <p:ph type="ftr" sz="quarter" idx="11"/>
+          </p:nvPr>
+        </p:nvSpPr>
+        <p:spPr/>
+        <p:txBody>
+          <a:bodyPr/>
+          <a:lstStyle/>
+          <a:p>
+            <a:endParaRPr lang="en-US" dirty="0"/>
+          </a:p>
+        </p:txBody>
+      </p:sp>
+      <p:sp>
+        <p:nvSpPr>
+          <p:cNvPr id="7" name="Slide Number Placeholder 6"/>
+          <p:cNvSpPr>
+            <a:spLocks noGrp="1"/>
+          </p:cNvSpPr>
+          <p:nvPr>
+            <p:ph type="sldNum" sz="quarter" idx="12"/>
+          </p:nvPr>
+        </p:nvSpPr>
+        <p:spPr/>
+        <p:txBody>
+          <a:bodyPr/>
+          <a:lstStyle/>
+          <a:p>
+            <a:fld id="{D57F1E4F-1CFF-5643-939E-217C01CDF565}" type="slidenum">
+              <a:rPr lang="en-US" smtClean="0"/>
+              <a:pPr/>
+              <a:t>‹#›</a:t>
+            </a:fld>
+            <a:endParaRPr lang="en-US" dirty="0"/>
+          </a:p>
+        </p:txBody>
+      </p:sp>
+    </p:spTree>
+    <p:extLst>
+      <p:ext uri="{BB962C8B-B14F-4D97-AF65-F5344CB8AC3E}">
+        <p14:creationId xmlns:p14="http://schemas.microsoft.com/office/powerpoint/2010/main" val="4289733957"/>
       </p:ext>
     </p:extLst>
   </p:cSld>
@@ -339,7 +744,2030 @@
 </p:sldLayout>
 </file>
 
-<file path=ppt/slideLayouts/slideLayout10.xml><?xml version="1.0" encoding="utf-8"?>
+<file path=ppt/slideLayouts/slideLayout11.xml><?xml version="1.0" encoding="utf-8"?>
+<p:sldLayout xmlns:a="http://schemas.openxmlformats.org/drawingml/2006/main" xmlns:r="http://schemas.openxmlformats.org/officeDocument/2006/relationships" xmlns:p="http://schemas.openxmlformats.org/presentationml/2006/main" preserve="1">
+  <p:cSld name="Title and Caption">
+    <p:spTree>
+      <p:nvGrpSpPr>
+        <p:cNvPr id="1" name=""/>
+        <p:cNvGrpSpPr/>
+        <p:nvPr/>
+      </p:nvGrpSpPr>
+      <p:grpSpPr>
+        <a:xfrm>
+          <a:off x="0" y="0"/>
+          <a:ext cx="0" cy="0"/>
+          <a:chOff x="0" y="0"/>
+          <a:chExt cx="0" cy="0"/>
+        </a:xfrm>
+      </p:grpSpPr>
+      <p:pic>
+        <p:nvPicPr>
+          <p:cNvPr id="7" name="Picture 6" descr="Celestia-R1---OverlayContentHD.png"/>
+          <p:cNvPicPr>
+            <a:picLocks noChangeAspect="1"/>
+          </p:cNvPicPr>
+          <p:nvPr/>
+        </p:nvPicPr>
+        <p:blipFill>
+          <a:blip r:embed="rId2">
+            <a:extLst>
+              <a:ext uri="{28A0092B-C50C-407E-A947-70E740481C1C}">
+                <a14:useLocalDpi xmlns:a14="http://schemas.microsoft.com/office/drawing/2010/main" val="0"/>
+              </a:ext>
+            </a:extLst>
+          </a:blip>
+          <a:stretch>
+            <a:fillRect/>
+          </a:stretch>
+        </p:blipFill>
+        <p:spPr>
+          <a:xfrm>
+            <a:off x="0" y="0"/>
+            <a:ext cx="12188825" cy="6856214"/>
+          </a:xfrm>
+          <a:prstGeom prst="rect">
+            <a:avLst/>
+          </a:prstGeom>
+        </p:spPr>
+      </p:pic>
+      <p:sp>
+        <p:nvSpPr>
+          <p:cNvPr id="2" name="Title 1"/>
+          <p:cNvSpPr>
+            <a:spLocks noGrp="1"/>
+          </p:cNvSpPr>
+          <p:nvPr>
+            <p:ph type="title"/>
+          </p:nvPr>
+        </p:nvSpPr>
+        <p:spPr>
+          <a:xfrm>
+            <a:off x="685801" y="609601"/>
+            <a:ext cx="10131427" cy="3124199"/>
+          </a:xfrm>
+        </p:spPr>
+        <p:txBody>
+          <a:bodyPr anchor="ctr">
+            <a:normAutofit/>
+          </a:bodyPr>
+          <a:lstStyle>
+            <a:lvl1pPr algn="l">
+              <a:defRPr sz="3200" b="0" cap="none"/>
+            </a:lvl1pPr>
+          </a:lstStyle>
+          <a:p>
+            <a:r>
+              <a:rPr lang="en-US"/>
+              <a:t>Click to edit Master title style</a:t>
+            </a:r>
+            <a:endParaRPr lang="en-US" dirty="0"/>
+          </a:p>
+        </p:txBody>
+      </p:sp>
+      <p:sp>
+        <p:nvSpPr>
+          <p:cNvPr id="3" name="Text Placeholder 2"/>
+          <p:cNvSpPr>
+            <a:spLocks noGrp="1"/>
+          </p:cNvSpPr>
+          <p:nvPr>
+            <p:ph type="body" idx="1"/>
+          </p:nvPr>
+        </p:nvSpPr>
+        <p:spPr>
+          <a:xfrm>
+            <a:off x="685800" y="4343400"/>
+            <a:ext cx="10131428" cy="1447800"/>
+          </a:xfrm>
+        </p:spPr>
+        <p:txBody>
+          <a:bodyPr anchor="ctr">
+            <a:normAutofit/>
+          </a:bodyPr>
+          <a:lstStyle>
+            <a:lvl1pPr marL="0" indent="0" algn="l">
+              <a:buNone/>
+              <a:defRPr sz="2000">
+                <a:solidFill>
+                  <a:schemeClr val="tx1"/>
+                </a:solidFill>
+              </a:defRPr>
+            </a:lvl1pPr>
+            <a:lvl2pPr marL="457200" indent="0">
+              <a:buNone/>
+              <a:defRPr sz="1800">
+                <a:solidFill>
+                  <a:schemeClr val="tx1">
+                    <a:tint val="75000"/>
+                  </a:schemeClr>
+                </a:solidFill>
+              </a:defRPr>
+            </a:lvl2pPr>
+            <a:lvl3pPr marL="914400" indent="0">
+              <a:buNone/>
+              <a:defRPr sz="1600">
+                <a:solidFill>
+                  <a:schemeClr val="tx1">
+                    <a:tint val="75000"/>
+                  </a:schemeClr>
+                </a:solidFill>
+              </a:defRPr>
+            </a:lvl3pPr>
+            <a:lvl4pPr marL="1371600" indent="0">
+              <a:buNone/>
+              <a:defRPr sz="1400">
+                <a:solidFill>
+                  <a:schemeClr val="tx1">
+                    <a:tint val="75000"/>
+                  </a:schemeClr>
+                </a:solidFill>
+              </a:defRPr>
+            </a:lvl4pPr>
+            <a:lvl5pPr marL="1828800" indent="0">
+              <a:buNone/>
+              <a:defRPr sz="1400">
+                <a:solidFill>
+                  <a:schemeClr val="tx1">
+                    <a:tint val="75000"/>
+                  </a:schemeClr>
+                </a:solidFill>
+              </a:defRPr>
+            </a:lvl5pPr>
+            <a:lvl6pPr marL="2286000" indent="0">
+              <a:buNone/>
+              <a:defRPr sz="1400">
+                <a:solidFill>
+                  <a:schemeClr val="tx1">
+                    <a:tint val="75000"/>
+                  </a:schemeClr>
+                </a:solidFill>
+              </a:defRPr>
+            </a:lvl6pPr>
+            <a:lvl7pPr marL="2743200" indent="0">
+              <a:buNone/>
+              <a:defRPr sz="1400">
+                <a:solidFill>
+                  <a:schemeClr val="tx1">
+                    <a:tint val="75000"/>
+                  </a:schemeClr>
+                </a:solidFill>
+              </a:defRPr>
+            </a:lvl7pPr>
+            <a:lvl8pPr marL="3200400" indent="0">
+              <a:buNone/>
+              <a:defRPr sz="1400">
+                <a:solidFill>
+                  <a:schemeClr val="tx1">
+                    <a:tint val="75000"/>
+                  </a:schemeClr>
+                </a:solidFill>
+              </a:defRPr>
+            </a:lvl8pPr>
+            <a:lvl9pPr marL="3657600" indent="0">
+              <a:buNone/>
+              <a:defRPr sz="1400">
+                <a:solidFill>
+                  <a:schemeClr val="tx1">
+                    <a:tint val="75000"/>
+                  </a:schemeClr>
+                </a:solidFill>
+              </a:defRPr>
+            </a:lvl9pPr>
+          </a:lstStyle>
+          <a:p>
+            <a:pPr lvl="0"/>
+            <a:r>
+              <a:rPr lang="en-US"/>
+              <a:t>Click to edit Master text styles</a:t>
+            </a:r>
+          </a:p>
+        </p:txBody>
+      </p:sp>
+      <p:sp>
+        <p:nvSpPr>
+          <p:cNvPr id="4" name="Date Placeholder 3"/>
+          <p:cNvSpPr>
+            <a:spLocks noGrp="1"/>
+          </p:cNvSpPr>
+          <p:nvPr>
+            <p:ph type="dt" sz="half" idx="10"/>
+          </p:nvPr>
+        </p:nvSpPr>
+        <p:spPr/>
+        <p:txBody>
+          <a:bodyPr/>
+          <a:lstStyle/>
+          <a:p>
+            <a:fld id="{B61BEF0D-F0BB-DE4B-95CE-6DB70DBA9567}" type="datetimeFigureOut">
+              <a:rPr lang="en-US" smtClean="0"/>
+              <a:pPr/>
+              <a:t>3/16/2024</a:t>
+            </a:fld>
+            <a:endParaRPr lang="en-US" dirty="0"/>
+          </a:p>
+        </p:txBody>
+      </p:sp>
+      <p:sp>
+        <p:nvSpPr>
+          <p:cNvPr id="5" name="Footer Placeholder 4"/>
+          <p:cNvSpPr>
+            <a:spLocks noGrp="1"/>
+          </p:cNvSpPr>
+          <p:nvPr>
+            <p:ph type="ftr" sz="quarter" idx="11"/>
+          </p:nvPr>
+        </p:nvSpPr>
+        <p:spPr/>
+        <p:txBody>
+          <a:bodyPr/>
+          <a:lstStyle/>
+          <a:p>
+            <a:endParaRPr lang="en-US" dirty="0"/>
+          </a:p>
+        </p:txBody>
+      </p:sp>
+      <p:sp>
+        <p:nvSpPr>
+          <p:cNvPr id="6" name="Slide Number Placeholder 5"/>
+          <p:cNvSpPr>
+            <a:spLocks noGrp="1"/>
+          </p:cNvSpPr>
+          <p:nvPr>
+            <p:ph type="sldNum" sz="quarter" idx="12"/>
+          </p:nvPr>
+        </p:nvSpPr>
+        <p:spPr/>
+        <p:txBody>
+          <a:bodyPr/>
+          <a:lstStyle/>
+          <a:p>
+            <a:fld id="{D57F1E4F-1CFF-5643-939E-217C01CDF565}" type="slidenum">
+              <a:rPr lang="en-US" smtClean="0"/>
+              <a:pPr/>
+              <a:t>‹#›</a:t>
+            </a:fld>
+            <a:endParaRPr lang="en-US" dirty="0"/>
+          </a:p>
+        </p:txBody>
+      </p:sp>
+    </p:spTree>
+    <p:extLst>
+      <p:ext uri="{BB962C8B-B14F-4D97-AF65-F5344CB8AC3E}">
+        <p14:creationId xmlns:p14="http://schemas.microsoft.com/office/powerpoint/2010/main" val="1188053506"/>
+      </p:ext>
+    </p:extLst>
+  </p:cSld>
+  <p:clrMapOvr>
+    <a:masterClrMapping/>
+  </p:clrMapOvr>
+</p:sldLayout>
+</file>
+
+<file path=ppt/slideLayouts/slideLayout12.xml><?xml version="1.0" encoding="utf-8"?>
+<p:sldLayout xmlns:a="http://schemas.openxmlformats.org/drawingml/2006/main" xmlns:r="http://schemas.openxmlformats.org/officeDocument/2006/relationships" xmlns:p="http://schemas.openxmlformats.org/presentationml/2006/main" preserve="1">
+  <p:cSld name="Quote with Caption">
+    <p:spTree>
+      <p:nvGrpSpPr>
+        <p:cNvPr id="1" name=""/>
+        <p:cNvGrpSpPr/>
+        <p:nvPr/>
+      </p:nvGrpSpPr>
+      <p:grpSpPr>
+        <a:xfrm>
+          <a:off x="0" y="0"/>
+          <a:ext cx="0" cy="0"/>
+          <a:chOff x="0" y="0"/>
+          <a:chExt cx="0" cy="0"/>
+        </a:xfrm>
+      </p:grpSpPr>
+      <p:pic>
+        <p:nvPicPr>
+          <p:cNvPr id="11" name="Picture 10" descr="Celestia-R1---OverlayContentHD.png"/>
+          <p:cNvPicPr>
+            <a:picLocks noChangeAspect="1"/>
+          </p:cNvPicPr>
+          <p:nvPr/>
+        </p:nvPicPr>
+        <p:blipFill>
+          <a:blip r:embed="rId2">
+            <a:extLst>
+              <a:ext uri="{28A0092B-C50C-407E-A947-70E740481C1C}">
+                <a14:useLocalDpi xmlns:a14="http://schemas.microsoft.com/office/drawing/2010/main" val="0"/>
+              </a:ext>
+            </a:extLst>
+          </a:blip>
+          <a:stretch>
+            <a:fillRect/>
+          </a:stretch>
+        </p:blipFill>
+        <p:spPr>
+          <a:xfrm>
+            <a:off x="0" y="0"/>
+            <a:ext cx="12188825" cy="6856214"/>
+          </a:xfrm>
+          <a:prstGeom prst="rect">
+            <a:avLst/>
+          </a:prstGeom>
+        </p:spPr>
+      </p:pic>
+      <p:sp>
+        <p:nvSpPr>
+          <p:cNvPr id="13" name="TextBox 12"/>
+          <p:cNvSpPr txBox="1"/>
+          <p:nvPr/>
+        </p:nvSpPr>
+        <p:spPr>
+          <a:xfrm>
+            <a:off x="10237867" y="2743200"/>
+            <a:ext cx="609600" cy="584776"/>
+          </a:xfrm>
+          <a:prstGeom prst="rect">
+            <a:avLst/>
+          </a:prstGeom>
+        </p:spPr>
+        <p:txBody>
+          <a:bodyPr vert="horz" lIns="91440" tIns="45720" rIns="91440" bIns="45720" rtlCol="0" anchor="ctr">
+            <a:noAutofit/>
+          </a:bodyPr>
+          <a:lstStyle>
+            <a:lvl1pPr>
+              <a:spcBef>
+                <a:spcPct val="0"/>
+              </a:spcBef>
+              <a:buNone/>
+              <a:defRPr sz="3200" b="0" cap="all">
+                <a:ln w="3175" cmpd="sng">
+                  <a:noFill/>
+                </a:ln>
+                <a:effectLst>
+                  <a:glow rad="38100">
+                    <a:schemeClr val="bg1">
+                      <a:lumMod val="65000"/>
+                      <a:lumOff val="35000"/>
+                      <a:alpha val="40000"/>
+                    </a:schemeClr>
+                  </a:glow>
+                  <a:outerShdw blurRad="28575" dist="38100" dir="14040000" algn="tl" rotWithShape="0">
+                    <a:srgbClr val="000000">
+                      <a:alpha val="25000"/>
+                    </a:srgbClr>
+                  </a:outerShdw>
+                </a:effectLst>
+              </a:defRPr>
+            </a:lvl1pPr>
+            <a:lvl2pPr>
+              <a:defRPr>
+                <a:solidFill>
+                  <a:schemeClr val="tx2"/>
+                </a:solidFill>
+              </a:defRPr>
+            </a:lvl2pPr>
+            <a:lvl3pPr>
+              <a:defRPr>
+                <a:solidFill>
+                  <a:schemeClr val="tx2"/>
+                </a:solidFill>
+              </a:defRPr>
+            </a:lvl3pPr>
+            <a:lvl4pPr>
+              <a:defRPr>
+                <a:solidFill>
+                  <a:schemeClr val="tx2"/>
+                </a:solidFill>
+              </a:defRPr>
+            </a:lvl4pPr>
+            <a:lvl5pPr>
+              <a:defRPr>
+                <a:solidFill>
+                  <a:schemeClr val="tx2"/>
+                </a:solidFill>
+              </a:defRPr>
+            </a:lvl5pPr>
+            <a:lvl6pPr>
+              <a:defRPr>
+                <a:solidFill>
+                  <a:schemeClr val="tx2"/>
+                </a:solidFill>
+              </a:defRPr>
+            </a:lvl6pPr>
+            <a:lvl7pPr>
+              <a:defRPr>
+                <a:solidFill>
+                  <a:schemeClr val="tx2"/>
+                </a:solidFill>
+              </a:defRPr>
+            </a:lvl7pPr>
+            <a:lvl8pPr>
+              <a:defRPr>
+                <a:solidFill>
+                  <a:schemeClr val="tx2"/>
+                </a:solidFill>
+              </a:defRPr>
+            </a:lvl8pPr>
+            <a:lvl9pPr>
+              <a:defRPr>
+                <a:solidFill>
+                  <a:schemeClr val="tx2"/>
+                </a:solidFill>
+              </a:defRPr>
+            </a:lvl9pPr>
+          </a:lstStyle>
+          <a:p>
+            <a:pPr lvl="0" algn="r"/>
+            <a:r>
+              <a:rPr lang="en-US" sz="8000" dirty="0">
+                <a:solidFill>
+                  <a:schemeClr val="tx1"/>
+                </a:solidFill>
+                <a:effectLst/>
+              </a:rPr>
+              <a:t>”</a:t>
+            </a:r>
+          </a:p>
+        </p:txBody>
+      </p:sp>
+      <p:sp>
+        <p:nvSpPr>
+          <p:cNvPr id="14" name="TextBox 13"/>
+          <p:cNvSpPr txBox="1"/>
+          <p:nvPr/>
+        </p:nvSpPr>
+        <p:spPr>
+          <a:xfrm>
+            <a:off x="488275" y="823337"/>
+            <a:ext cx="609600" cy="584776"/>
+          </a:xfrm>
+          <a:prstGeom prst="rect">
+            <a:avLst/>
+          </a:prstGeom>
+        </p:spPr>
+        <p:txBody>
+          <a:bodyPr vert="horz" lIns="91440" tIns="45720" rIns="91440" bIns="45720" rtlCol="0" anchor="ctr">
+            <a:noAutofit/>
+          </a:bodyPr>
+          <a:lstStyle>
+            <a:lvl1pPr>
+              <a:spcBef>
+                <a:spcPct val="0"/>
+              </a:spcBef>
+              <a:buNone/>
+              <a:defRPr sz="3200" b="0" cap="all">
+                <a:ln w="3175" cmpd="sng">
+                  <a:noFill/>
+                </a:ln>
+                <a:effectLst>
+                  <a:glow rad="38100">
+                    <a:schemeClr val="bg1">
+                      <a:lumMod val="65000"/>
+                      <a:lumOff val="35000"/>
+                      <a:alpha val="40000"/>
+                    </a:schemeClr>
+                  </a:glow>
+                  <a:outerShdw blurRad="28575" dist="38100" dir="14040000" algn="tl" rotWithShape="0">
+                    <a:srgbClr val="000000">
+                      <a:alpha val="25000"/>
+                    </a:srgbClr>
+                  </a:outerShdw>
+                </a:effectLst>
+              </a:defRPr>
+            </a:lvl1pPr>
+            <a:lvl2pPr>
+              <a:defRPr>
+                <a:solidFill>
+                  <a:schemeClr val="tx2"/>
+                </a:solidFill>
+              </a:defRPr>
+            </a:lvl2pPr>
+            <a:lvl3pPr>
+              <a:defRPr>
+                <a:solidFill>
+                  <a:schemeClr val="tx2"/>
+                </a:solidFill>
+              </a:defRPr>
+            </a:lvl3pPr>
+            <a:lvl4pPr>
+              <a:defRPr>
+                <a:solidFill>
+                  <a:schemeClr val="tx2"/>
+                </a:solidFill>
+              </a:defRPr>
+            </a:lvl4pPr>
+            <a:lvl5pPr>
+              <a:defRPr>
+                <a:solidFill>
+                  <a:schemeClr val="tx2"/>
+                </a:solidFill>
+              </a:defRPr>
+            </a:lvl5pPr>
+            <a:lvl6pPr>
+              <a:defRPr>
+                <a:solidFill>
+                  <a:schemeClr val="tx2"/>
+                </a:solidFill>
+              </a:defRPr>
+            </a:lvl6pPr>
+            <a:lvl7pPr>
+              <a:defRPr>
+                <a:solidFill>
+                  <a:schemeClr val="tx2"/>
+                </a:solidFill>
+              </a:defRPr>
+            </a:lvl7pPr>
+            <a:lvl8pPr>
+              <a:defRPr>
+                <a:solidFill>
+                  <a:schemeClr val="tx2"/>
+                </a:solidFill>
+              </a:defRPr>
+            </a:lvl8pPr>
+            <a:lvl9pPr>
+              <a:defRPr>
+                <a:solidFill>
+                  <a:schemeClr val="tx2"/>
+                </a:solidFill>
+              </a:defRPr>
+            </a:lvl9pPr>
+          </a:lstStyle>
+          <a:p>
+            <a:pPr lvl="0" algn="r"/>
+            <a:r>
+              <a:rPr lang="en-US" sz="8000" dirty="0">
+                <a:solidFill>
+                  <a:schemeClr val="tx1"/>
+                </a:solidFill>
+                <a:effectLst/>
+              </a:rPr>
+              <a:t>“</a:t>
+            </a:r>
+          </a:p>
+        </p:txBody>
+      </p:sp>
+      <p:sp>
+        <p:nvSpPr>
+          <p:cNvPr id="16" name="Title 1"/>
+          <p:cNvSpPr>
+            <a:spLocks noGrp="1"/>
+          </p:cNvSpPr>
+          <p:nvPr>
+            <p:ph type="title"/>
+          </p:nvPr>
+        </p:nvSpPr>
+        <p:spPr>
+          <a:xfrm>
+            <a:off x="992267" y="609601"/>
+            <a:ext cx="9550399" cy="2743199"/>
+          </a:xfrm>
+        </p:spPr>
+        <p:txBody>
+          <a:bodyPr anchor="ctr">
+            <a:normAutofit/>
+          </a:bodyPr>
+          <a:lstStyle>
+            <a:lvl1pPr algn="l">
+              <a:defRPr sz="3200" b="0" cap="none">
+                <a:solidFill>
+                  <a:schemeClr val="tx1"/>
+                </a:solidFill>
+              </a:defRPr>
+            </a:lvl1pPr>
+          </a:lstStyle>
+          <a:p>
+            <a:r>
+              <a:rPr lang="en-US"/>
+              <a:t>Click to edit Master title style</a:t>
+            </a:r>
+            <a:endParaRPr lang="en-US" dirty="0"/>
+          </a:p>
+        </p:txBody>
+      </p:sp>
+      <p:sp>
+        <p:nvSpPr>
+          <p:cNvPr id="10" name="Text Placeholder 9"/>
+          <p:cNvSpPr>
+            <a:spLocks noGrp="1"/>
+          </p:cNvSpPr>
+          <p:nvPr>
+            <p:ph type="body" sz="quarter" idx="13"/>
+          </p:nvPr>
+        </p:nvSpPr>
+        <p:spPr>
+          <a:xfrm>
+            <a:off x="1097875" y="3352800"/>
+            <a:ext cx="9339184" cy="381000"/>
+          </a:xfrm>
+        </p:spPr>
+        <p:txBody>
+          <a:bodyPr anchor="ctr"/>
+          <a:lstStyle>
+            <a:lvl1pPr marL="0" indent="0">
+              <a:buFontTx/>
+              <a:buNone/>
+              <a:defRPr/>
+            </a:lvl1pPr>
+            <a:lvl2pPr marL="457200" indent="0">
+              <a:buFontTx/>
+              <a:buNone/>
+              <a:defRPr/>
+            </a:lvl2pPr>
+            <a:lvl3pPr marL="914400" indent="0">
+              <a:buFontTx/>
+              <a:buNone/>
+              <a:defRPr/>
+            </a:lvl3pPr>
+            <a:lvl4pPr marL="1371600" indent="0">
+              <a:buFontTx/>
+              <a:buNone/>
+              <a:defRPr/>
+            </a:lvl4pPr>
+            <a:lvl5pPr marL="1828800" indent="0">
+              <a:buFontTx/>
+              <a:buNone/>
+              <a:defRPr/>
+            </a:lvl5pPr>
+          </a:lstStyle>
+          <a:p>
+            <a:pPr lvl="0"/>
+            <a:r>
+              <a:rPr lang="en-US"/>
+              <a:t>Click to edit Master text styles</a:t>
+            </a:r>
+          </a:p>
+        </p:txBody>
+      </p:sp>
+      <p:sp>
+        <p:nvSpPr>
+          <p:cNvPr id="3" name="Text Placeholder 2"/>
+          <p:cNvSpPr>
+            <a:spLocks noGrp="1"/>
+          </p:cNvSpPr>
+          <p:nvPr>
+            <p:ph type="body" idx="1"/>
+          </p:nvPr>
+        </p:nvSpPr>
+        <p:spPr>
+          <a:xfrm>
+            <a:off x="687465" y="4343400"/>
+            <a:ext cx="10152367" cy="1447800"/>
+          </a:xfrm>
+        </p:spPr>
+        <p:txBody>
+          <a:bodyPr anchor="ctr">
+            <a:normAutofit/>
+          </a:bodyPr>
+          <a:lstStyle>
+            <a:lvl1pPr marL="0" indent="0" algn="l">
+              <a:buNone/>
+              <a:defRPr sz="2000">
+                <a:solidFill>
+                  <a:schemeClr val="tx1"/>
+                </a:solidFill>
+              </a:defRPr>
+            </a:lvl1pPr>
+            <a:lvl2pPr marL="457200" indent="0">
+              <a:buNone/>
+              <a:defRPr sz="1800">
+                <a:solidFill>
+                  <a:schemeClr val="tx1">
+                    <a:tint val="75000"/>
+                  </a:schemeClr>
+                </a:solidFill>
+              </a:defRPr>
+            </a:lvl2pPr>
+            <a:lvl3pPr marL="914400" indent="0">
+              <a:buNone/>
+              <a:defRPr sz="1600">
+                <a:solidFill>
+                  <a:schemeClr val="tx1">
+                    <a:tint val="75000"/>
+                  </a:schemeClr>
+                </a:solidFill>
+              </a:defRPr>
+            </a:lvl3pPr>
+            <a:lvl4pPr marL="1371600" indent="0">
+              <a:buNone/>
+              <a:defRPr sz="1400">
+                <a:solidFill>
+                  <a:schemeClr val="tx1">
+                    <a:tint val="75000"/>
+                  </a:schemeClr>
+                </a:solidFill>
+              </a:defRPr>
+            </a:lvl4pPr>
+            <a:lvl5pPr marL="1828800" indent="0">
+              <a:buNone/>
+              <a:defRPr sz="1400">
+                <a:solidFill>
+                  <a:schemeClr val="tx1">
+                    <a:tint val="75000"/>
+                  </a:schemeClr>
+                </a:solidFill>
+              </a:defRPr>
+            </a:lvl5pPr>
+            <a:lvl6pPr marL="2286000" indent="0">
+              <a:buNone/>
+              <a:defRPr sz="1400">
+                <a:solidFill>
+                  <a:schemeClr val="tx1">
+                    <a:tint val="75000"/>
+                  </a:schemeClr>
+                </a:solidFill>
+              </a:defRPr>
+            </a:lvl6pPr>
+            <a:lvl7pPr marL="2743200" indent="0">
+              <a:buNone/>
+              <a:defRPr sz="1400">
+                <a:solidFill>
+                  <a:schemeClr val="tx1">
+                    <a:tint val="75000"/>
+                  </a:schemeClr>
+                </a:solidFill>
+              </a:defRPr>
+            </a:lvl7pPr>
+            <a:lvl8pPr marL="3200400" indent="0">
+              <a:buNone/>
+              <a:defRPr sz="1400">
+                <a:solidFill>
+                  <a:schemeClr val="tx1">
+                    <a:tint val="75000"/>
+                  </a:schemeClr>
+                </a:solidFill>
+              </a:defRPr>
+            </a:lvl8pPr>
+            <a:lvl9pPr marL="3657600" indent="0">
+              <a:buNone/>
+              <a:defRPr sz="1400">
+                <a:solidFill>
+                  <a:schemeClr val="tx1">
+                    <a:tint val="75000"/>
+                  </a:schemeClr>
+                </a:solidFill>
+              </a:defRPr>
+            </a:lvl9pPr>
+          </a:lstStyle>
+          <a:p>
+            <a:pPr lvl="0"/>
+            <a:r>
+              <a:rPr lang="en-US"/>
+              <a:t>Click to edit Master text styles</a:t>
+            </a:r>
+          </a:p>
+        </p:txBody>
+      </p:sp>
+      <p:sp>
+        <p:nvSpPr>
+          <p:cNvPr id="4" name="Date Placeholder 3"/>
+          <p:cNvSpPr>
+            <a:spLocks noGrp="1"/>
+          </p:cNvSpPr>
+          <p:nvPr>
+            <p:ph type="dt" sz="half" idx="10"/>
+          </p:nvPr>
+        </p:nvSpPr>
+        <p:spPr/>
+        <p:txBody>
+          <a:bodyPr/>
+          <a:lstStyle/>
+          <a:p>
+            <a:fld id="{B61BEF0D-F0BB-DE4B-95CE-6DB70DBA9567}" type="datetimeFigureOut">
+              <a:rPr lang="en-US" smtClean="0"/>
+              <a:pPr/>
+              <a:t>3/16/2024</a:t>
+            </a:fld>
+            <a:endParaRPr lang="en-US" dirty="0"/>
+          </a:p>
+        </p:txBody>
+      </p:sp>
+      <p:sp>
+        <p:nvSpPr>
+          <p:cNvPr id="5" name="Footer Placeholder 4"/>
+          <p:cNvSpPr>
+            <a:spLocks noGrp="1"/>
+          </p:cNvSpPr>
+          <p:nvPr>
+            <p:ph type="ftr" sz="quarter" idx="11"/>
+          </p:nvPr>
+        </p:nvSpPr>
+        <p:spPr/>
+        <p:txBody>
+          <a:bodyPr/>
+          <a:lstStyle/>
+          <a:p>
+            <a:endParaRPr lang="en-US" dirty="0"/>
+          </a:p>
+        </p:txBody>
+      </p:sp>
+      <p:sp>
+        <p:nvSpPr>
+          <p:cNvPr id="6" name="Slide Number Placeholder 5"/>
+          <p:cNvSpPr>
+            <a:spLocks noGrp="1"/>
+          </p:cNvSpPr>
+          <p:nvPr>
+            <p:ph type="sldNum" sz="quarter" idx="12"/>
+          </p:nvPr>
+        </p:nvSpPr>
+        <p:spPr/>
+        <p:txBody>
+          <a:bodyPr/>
+          <a:lstStyle/>
+          <a:p>
+            <a:fld id="{D57F1E4F-1CFF-5643-939E-217C01CDF565}" type="slidenum">
+              <a:rPr lang="en-US" smtClean="0"/>
+              <a:pPr/>
+              <a:t>‹#›</a:t>
+            </a:fld>
+            <a:endParaRPr lang="en-US" dirty="0"/>
+          </a:p>
+        </p:txBody>
+      </p:sp>
+    </p:spTree>
+    <p:extLst>
+      <p:ext uri="{BB962C8B-B14F-4D97-AF65-F5344CB8AC3E}">
+        <p14:creationId xmlns:p14="http://schemas.microsoft.com/office/powerpoint/2010/main" val="2518093896"/>
+      </p:ext>
+    </p:extLst>
+  </p:cSld>
+  <p:clrMapOvr>
+    <a:masterClrMapping/>
+  </p:clrMapOvr>
+</p:sldLayout>
+</file>
+
+<file path=ppt/slideLayouts/slideLayout13.xml><?xml version="1.0" encoding="utf-8"?>
+<p:sldLayout xmlns:a="http://schemas.openxmlformats.org/drawingml/2006/main" xmlns:r="http://schemas.openxmlformats.org/officeDocument/2006/relationships" xmlns:p="http://schemas.openxmlformats.org/presentationml/2006/main" preserve="1">
+  <p:cSld name="Name Card">
+    <p:spTree>
+      <p:nvGrpSpPr>
+        <p:cNvPr id="1" name=""/>
+        <p:cNvGrpSpPr/>
+        <p:nvPr/>
+      </p:nvGrpSpPr>
+      <p:grpSpPr>
+        <a:xfrm>
+          <a:off x="0" y="0"/>
+          <a:ext cx="0" cy="0"/>
+          <a:chOff x="0" y="0"/>
+          <a:chExt cx="0" cy="0"/>
+        </a:xfrm>
+      </p:grpSpPr>
+      <p:pic>
+        <p:nvPicPr>
+          <p:cNvPr id="7" name="Picture 6" descr="Celestia-R1---OverlayContentHD.png"/>
+          <p:cNvPicPr>
+            <a:picLocks noChangeAspect="1"/>
+          </p:cNvPicPr>
+          <p:nvPr/>
+        </p:nvPicPr>
+        <p:blipFill>
+          <a:blip r:embed="rId2">
+            <a:extLst>
+              <a:ext uri="{28A0092B-C50C-407E-A947-70E740481C1C}">
+                <a14:useLocalDpi xmlns:a14="http://schemas.microsoft.com/office/drawing/2010/main" val="0"/>
+              </a:ext>
+            </a:extLst>
+          </a:blip>
+          <a:stretch>
+            <a:fillRect/>
+          </a:stretch>
+        </p:blipFill>
+        <p:spPr>
+          <a:xfrm>
+            <a:off x="0" y="0"/>
+            <a:ext cx="12188825" cy="6856214"/>
+          </a:xfrm>
+          <a:prstGeom prst="rect">
+            <a:avLst/>
+          </a:prstGeom>
+        </p:spPr>
+      </p:pic>
+      <p:sp>
+        <p:nvSpPr>
+          <p:cNvPr id="2" name="Title 1"/>
+          <p:cNvSpPr>
+            <a:spLocks noGrp="1"/>
+          </p:cNvSpPr>
+          <p:nvPr>
+            <p:ph type="title"/>
+          </p:nvPr>
+        </p:nvSpPr>
+        <p:spPr>
+          <a:xfrm>
+            <a:off x="685802" y="3308581"/>
+            <a:ext cx="10131425" cy="1468800"/>
+          </a:xfrm>
+        </p:spPr>
+        <p:txBody>
+          <a:bodyPr anchor="b">
+            <a:normAutofit/>
+          </a:bodyPr>
+          <a:lstStyle>
+            <a:lvl1pPr algn="l">
+              <a:defRPr sz="3200" b="0" cap="none"/>
+            </a:lvl1pPr>
+          </a:lstStyle>
+          <a:p>
+            <a:r>
+              <a:rPr lang="en-US"/>
+              <a:t>Click to edit Master title style</a:t>
+            </a:r>
+            <a:endParaRPr lang="en-US" dirty="0"/>
+          </a:p>
+        </p:txBody>
+      </p:sp>
+      <p:sp>
+        <p:nvSpPr>
+          <p:cNvPr id="3" name="Text Placeholder 2"/>
+          <p:cNvSpPr>
+            <a:spLocks noGrp="1"/>
+          </p:cNvSpPr>
+          <p:nvPr>
+            <p:ph type="body" idx="1"/>
+          </p:nvPr>
+        </p:nvSpPr>
+        <p:spPr>
+          <a:xfrm>
+            <a:off x="685801" y="4777381"/>
+            <a:ext cx="10131426" cy="860400"/>
+          </a:xfrm>
+        </p:spPr>
+        <p:txBody>
+          <a:bodyPr anchor="t">
+            <a:normAutofit/>
+          </a:bodyPr>
+          <a:lstStyle>
+            <a:lvl1pPr marL="0" indent="0" algn="l">
+              <a:buNone/>
+              <a:defRPr sz="2000">
+                <a:solidFill>
+                  <a:schemeClr val="tx1"/>
+                </a:solidFill>
+              </a:defRPr>
+            </a:lvl1pPr>
+            <a:lvl2pPr marL="457200" indent="0">
+              <a:buNone/>
+              <a:defRPr sz="1800">
+                <a:solidFill>
+                  <a:schemeClr val="tx1">
+                    <a:tint val="75000"/>
+                  </a:schemeClr>
+                </a:solidFill>
+              </a:defRPr>
+            </a:lvl2pPr>
+            <a:lvl3pPr marL="914400" indent="0">
+              <a:buNone/>
+              <a:defRPr sz="1600">
+                <a:solidFill>
+                  <a:schemeClr val="tx1">
+                    <a:tint val="75000"/>
+                  </a:schemeClr>
+                </a:solidFill>
+              </a:defRPr>
+            </a:lvl3pPr>
+            <a:lvl4pPr marL="1371600" indent="0">
+              <a:buNone/>
+              <a:defRPr sz="1400">
+                <a:solidFill>
+                  <a:schemeClr val="tx1">
+                    <a:tint val="75000"/>
+                  </a:schemeClr>
+                </a:solidFill>
+              </a:defRPr>
+            </a:lvl4pPr>
+            <a:lvl5pPr marL="1828800" indent="0">
+              <a:buNone/>
+              <a:defRPr sz="1400">
+                <a:solidFill>
+                  <a:schemeClr val="tx1">
+                    <a:tint val="75000"/>
+                  </a:schemeClr>
+                </a:solidFill>
+              </a:defRPr>
+            </a:lvl5pPr>
+            <a:lvl6pPr marL="2286000" indent="0">
+              <a:buNone/>
+              <a:defRPr sz="1400">
+                <a:solidFill>
+                  <a:schemeClr val="tx1">
+                    <a:tint val="75000"/>
+                  </a:schemeClr>
+                </a:solidFill>
+              </a:defRPr>
+            </a:lvl6pPr>
+            <a:lvl7pPr marL="2743200" indent="0">
+              <a:buNone/>
+              <a:defRPr sz="1400">
+                <a:solidFill>
+                  <a:schemeClr val="tx1">
+                    <a:tint val="75000"/>
+                  </a:schemeClr>
+                </a:solidFill>
+              </a:defRPr>
+            </a:lvl7pPr>
+            <a:lvl8pPr marL="3200400" indent="0">
+              <a:buNone/>
+              <a:defRPr sz="1400">
+                <a:solidFill>
+                  <a:schemeClr val="tx1">
+                    <a:tint val="75000"/>
+                  </a:schemeClr>
+                </a:solidFill>
+              </a:defRPr>
+            </a:lvl8pPr>
+            <a:lvl9pPr marL="3657600" indent="0">
+              <a:buNone/>
+              <a:defRPr sz="1400">
+                <a:solidFill>
+                  <a:schemeClr val="tx1">
+                    <a:tint val="75000"/>
+                  </a:schemeClr>
+                </a:solidFill>
+              </a:defRPr>
+            </a:lvl9pPr>
+          </a:lstStyle>
+          <a:p>
+            <a:pPr lvl="0"/>
+            <a:r>
+              <a:rPr lang="en-US"/>
+              <a:t>Click to edit Master text styles</a:t>
+            </a:r>
+          </a:p>
+        </p:txBody>
+      </p:sp>
+      <p:sp>
+        <p:nvSpPr>
+          <p:cNvPr id="4" name="Date Placeholder 3"/>
+          <p:cNvSpPr>
+            <a:spLocks noGrp="1"/>
+          </p:cNvSpPr>
+          <p:nvPr>
+            <p:ph type="dt" sz="half" idx="10"/>
+          </p:nvPr>
+        </p:nvSpPr>
+        <p:spPr/>
+        <p:txBody>
+          <a:bodyPr/>
+          <a:lstStyle/>
+          <a:p>
+            <a:fld id="{B61BEF0D-F0BB-DE4B-95CE-6DB70DBA9567}" type="datetimeFigureOut">
+              <a:rPr lang="en-US" smtClean="0"/>
+              <a:pPr/>
+              <a:t>3/16/2024</a:t>
+            </a:fld>
+            <a:endParaRPr lang="en-US" dirty="0"/>
+          </a:p>
+        </p:txBody>
+      </p:sp>
+      <p:sp>
+        <p:nvSpPr>
+          <p:cNvPr id="5" name="Footer Placeholder 4"/>
+          <p:cNvSpPr>
+            <a:spLocks noGrp="1"/>
+          </p:cNvSpPr>
+          <p:nvPr>
+            <p:ph type="ftr" sz="quarter" idx="11"/>
+          </p:nvPr>
+        </p:nvSpPr>
+        <p:spPr/>
+        <p:txBody>
+          <a:bodyPr/>
+          <a:lstStyle/>
+          <a:p>
+            <a:endParaRPr lang="en-US" dirty="0"/>
+          </a:p>
+        </p:txBody>
+      </p:sp>
+      <p:sp>
+        <p:nvSpPr>
+          <p:cNvPr id="6" name="Slide Number Placeholder 5"/>
+          <p:cNvSpPr>
+            <a:spLocks noGrp="1"/>
+          </p:cNvSpPr>
+          <p:nvPr>
+            <p:ph type="sldNum" sz="quarter" idx="12"/>
+          </p:nvPr>
+        </p:nvSpPr>
+        <p:spPr/>
+        <p:txBody>
+          <a:bodyPr/>
+          <a:lstStyle/>
+          <a:p>
+            <a:fld id="{D57F1E4F-1CFF-5643-939E-217C01CDF565}" type="slidenum">
+              <a:rPr lang="en-US" smtClean="0"/>
+              <a:pPr/>
+              <a:t>‹#›</a:t>
+            </a:fld>
+            <a:endParaRPr lang="en-US" dirty="0"/>
+          </a:p>
+        </p:txBody>
+      </p:sp>
+    </p:spTree>
+    <p:extLst>
+      <p:ext uri="{BB962C8B-B14F-4D97-AF65-F5344CB8AC3E}">
+        <p14:creationId xmlns:p14="http://schemas.microsoft.com/office/powerpoint/2010/main" val="2269760585"/>
+      </p:ext>
+    </p:extLst>
+  </p:cSld>
+  <p:clrMapOvr>
+    <a:masterClrMapping/>
+  </p:clrMapOvr>
+</p:sldLayout>
+</file>
+
+<file path=ppt/slideLayouts/slideLayout14.xml><?xml version="1.0" encoding="utf-8"?>
+<p:sldLayout xmlns:a="http://schemas.openxmlformats.org/drawingml/2006/main" xmlns:r="http://schemas.openxmlformats.org/officeDocument/2006/relationships" xmlns:p="http://schemas.openxmlformats.org/presentationml/2006/main" preserve="1">
+  <p:cSld name="Quote Name Card">
+    <p:spTree>
+      <p:nvGrpSpPr>
+        <p:cNvPr id="1" name=""/>
+        <p:cNvGrpSpPr/>
+        <p:nvPr/>
+      </p:nvGrpSpPr>
+      <p:grpSpPr>
+        <a:xfrm>
+          <a:off x="0" y="0"/>
+          <a:ext cx="0" cy="0"/>
+          <a:chOff x="0" y="0"/>
+          <a:chExt cx="0" cy="0"/>
+        </a:xfrm>
+      </p:grpSpPr>
+      <p:pic>
+        <p:nvPicPr>
+          <p:cNvPr id="11" name="Picture 10" descr="Celestia-R1---OverlayContentHD.png"/>
+          <p:cNvPicPr>
+            <a:picLocks noChangeAspect="1"/>
+          </p:cNvPicPr>
+          <p:nvPr/>
+        </p:nvPicPr>
+        <p:blipFill>
+          <a:blip r:embed="rId2">
+            <a:extLst>
+              <a:ext uri="{28A0092B-C50C-407E-A947-70E740481C1C}">
+                <a14:useLocalDpi xmlns:a14="http://schemas.microsoft.com/office/drawing/2010/main" val="0"/>
+              </a:ext>
+            </a:extLst>
+          </a:blip>
+          <a:stretch>
+            <a:fillRect/>
+          </a:stretch>
+        </p:blipFill>
+        <p:spPr>
+          <a:xfrm>
+            <a:off x="0" y="0"/>
+            <a:ext cx="12188825" cy="6856214"/>
+          </a:xfrm>
+          <a:prstGeom prst="rect">
+            <a:avLst/>
+          </a:prstGeom>
+        </p:spPr>
+      </p:pic>
+      <p:sp>
+        <p:nvSpPr>
+          <p:cNvPr id="13" name="TextBox 12"/>
+          <p:cNvSpPr txBox="1"/>
+          <p:nvPr/>
+        </p:nvSpPr>
+        <p:spPr>
+          <a:xfrm>
+            <a:off x="10237867" y="2743200"/>
+            <a:ext cx="609600" cy="584776"/>
+          </a:xfrm>
+          <a:prstGeom prst="rect">
+            <a:avLst/>
+          </a:prstGeom>
+        </p:spPr>
+        <p:txBody>
+          <a:bodyPr vert="horz" lIns="91440" tIns="45720" rIns="91440" bIns="45720" rtlCol="0" anchor="ctr">
+            <a:noAutofit/>
+          </a:bodyPr>
+          <a:lstStyle>
+            <a:lvl1pPr>
+              <a:spcBef>
+                <a:spcPct val="0"/>
+              </a:spcBef>
+              <a:buNone/>
+              <a:defRPr sz="3200" b="0" cap="all">
+                <a:ln w="3175" cmpd="sng">
+                  <a:noFill/>
+                </a:ln>
+                <a:effectLst>
+                  <a:glow rad="38100">
+                    <a:schemeClr val="bg1">
+                      <a:lumMod val="65000"/>
+                      <a:lumOff val="35000"/>
+                      <a:alpha val="40000"/>
+                    </a:schemeClr>
+                  </a:glow>
+                  <a:outerShdw blurRad="28575" dist="38100" dir="14040000" algn="tl" rotWithShape="0">
+                    <a:srgbClr val="000000">
+                      <a:alpha val="25000"/>
+                    </a:srgbClr>
+                  </a:outerShdw>
+                </a:effectLst>
+              </a:defRPr>
+            </a:lvl1pPr>
+            <a:lvl2pPr>
+              <a:defRPr>
+                <a:solidFill>
+                  <a:schemeClr val="tx2"/>
+                </a:solidFill>
+              </a:defRPr>
+            </a:lvl2pPr>
+            <a:lvl3pPr>
+              <a:defRPr>
+                <a:solidFill>
+                  <a:schemeClr val="tx2"/>
+                </a:solidFill>
+              </a:defRPr>
+            </a:lvl3pPr>
+            <a:lvl4pPr>
+              <a:defRPr>
+                <a:solidFill>
+                  <a:schemeClr val="tx2"/>
+                </a:solidFill>
+              </a:defRPr>
+            </a:lvl4pPr>
+            <a:lvl5pPr>
+              <a:defRPr>
+                <a:solidFill>
+                  <a:schemeClr val="tx2"/>
+                </a:solidFill>
+              </a:defRPr>
+            </a:lvl5pPr>
+            <a:lvl6pPr>
+              <a:defRPr>
+                <a:solidFill>
+                  <a:schemeClr val="tx2"/>
+                </a:solidFill>
+              </a:defRPr>
+            </a:lvl6pPr>
+            <a:lvl7pPr>
+              <a:defRPr>
+                <a:solidFill>
+                  <a:schemeClr val="tx2"/>
+                </a:solidFill>
+              </a:defRPr>
+            </a:lvl7pPr>
+            <a:lvl8pPr>
+              <a:defRPr>
+                <a:solidFill>
+                  <a:schemeClr val="tx2"/>
+                </a:solidFill>
+              </a:defRPr>
+            </a:lvl8pPr>
+            <a:lvl9pPr>
+              <a:defRPr>
+                <a:solidFill>
+                  <a:schemeClr val="tx2"/>
+                </a:solidFill>
+              </a:defRPr>
+            </a:lvl9pPr>
+          </a:lstStyle>
+          <a:p>
+            <a:pPr lvl="0" algn="r"/>
+            <a:r>
+              <a:rPr lang="en-US" sz="8000" dirty="0">
+                <a:solidFill>
+                  <a:schemeClr val="tx1"/>
+                </a:solidFill>
+                <a:effectLst/>
+              </a:rPr>
+              <a:t>”</a:t>
+            </a:r>
+          </a:p>
+        </p:txBody>
+      </p:sp>
+      <p:sp>
+        <p:nvSpPr>
+          <p:cNvPr id="14" name="TextBox 13"/>
+          <p:cNvSpPr txBox="1"/>
+          <p:nvPr/>
+        </p:nvSpPr>
+        <p:spPr>
+          <a:xfrm>
+            <a:off x="488275" y="823337"/>
+            <a:ext cx="609600" cy="584776"/>
+          </a:xfrm>
+          <a:prstGeom prst="rect">
+            <a:avLst/>
+          </a:prstGeom>
+        </p:spPr>
+        <p:txBody>
+          <a:bodyPr vert="horz" lIns="91440" tIns="45720" rIns="91440" bIns="45720" rtlCol="0" anchor="ctr">
+            <a:noAutofit/>
+          </a:bodyPr>
+          <a:lstStyle>
+            <a:lvl1pPr>
+              <a:spcBef>
+                <a:spcPct val="0"/>
+              </a:spcBef>
+              <a:buNone/>
+              <a:defRPr sz="3200" b="0" cap="all">
+                <a:ln w="3175" cmpd="sng">
+                  <a:noFill/>
+                </a:ln>
+                <a:effectLst>
+                  <a:glow rad="38100">
+                    <a:schemeClr val="bg1">
+                      <a:lumMod val="65000"/>
+                      <a:lumOff val="35000"/>
+                      <a:alpha val="40000"/>
+                    </a:schemeClr>
+                  </a:glow>
+                  <a:outerShdw blurRad="28575" dist="38100" dir="14040000" algn="tl" rotWithShape="0">
+                    <a:srgbClr val="000000">
+                      <a:alpha val="25000"/>
+                    </a:srgbClr>
+                  </a:outerShdw>
+                </a:effectLst>
+              </a:defRPr>
+            </a:lvl1pPr>
+            <a:lvl2pPr>
+              <a:defRPr>
+                <a:solidFill>
+                  <a:schemeClr val="tx2"/>
+                </a:solidFill>
+              </a:defRPr>
+            </a:lvl2pPr>
+            <a:lvl3pPr>
+              <a:defRPr>
+                <a:solidFill>
+                  <a:schemeClr val="tx2"/>
+                </a:solidFill>
+              </a:defRPr>
+            </a:lvl3pPr>
+            <a:lvl4pPr>
+              <a:defRPr>
+                <a:solidFill>
+                  <a:schemeClr val="tx2"/>
+                </a:solidFill>
+              </a:defRPr>
+            </a:lvl4pPr>
+            <a:lvl5pPr>
+              <a:defRPr>
+                <a:solidFill>
+                  <a:schemeClr val="tx2"/>
+                </a:solidFill>
+              </a:defRPr>
+            </a:lvl5pPr>
+            <a:lvl6pPr>
+              <a:defRPr>
+                <a:solidFill>
+                  <a:schemeClr val="tx2"/>
+                </a:solidFill>
+              </a:defRPr>
+            </a:lvl6pPr>
+            <a:lvl7pPr>
+              <a:defRPr>
+                <a:solidFill>
+                  <a:schemeClr val="tx2"/>
+                </a:solidFill>
+              </a:defRPr>
+            </a:lvl7pPr>
+            <a:lvl8pPr>
+              <a:defRPr>
+                <a:solidFill>
+                  <a:schemeClr val="tx2"/>
+                </a:solidFill>
+              </a:defRPr>
+            </a:lvl8pPr>
+            <a:lvl9pPr>
+              <a:defRPr>
+                <a:solidFill>
+                  <a:schemeClr val="tx2"/>
+                </a:solidFill>
+              </a:defRPr>
+            </a:lvl9pPr>
+          </a:lstStyle>
+          <a:p>
+            <a:pPr lvl="0" algn="r"/>
+            <a:r>
+              <a:rPr lang="en-US" sz="8000" dirty="0">
+                <a:solidFill>
+                  <a:schemeClr val="tx1"/>
+                </a:solidFill>
+                <a:effectLst/>
+              </a:rPr>
+              <a:t>“</a:t>
+            </a:r>
+          </a:p>
+        </p:txBody>
+      </p:sp>
+      <p:sp>
+        <p:nvSpPr>
+          <p:cNvPr id="16" name="Title 1"/>
+          <p:cNvSpPr>
+            <a:spLocks noGrp="1"/>
+          </p:cNvSpPr>
+          <p:nvPr>
+            <p:ph type="title"/>
+          </p:nvPr>
+        </p:nvSpPr>
+        <p:spPr>
+          <a:xfrm>
+            <a:off x="992267" y="609601"/>
+            <a:ext cx="9550399" cy="2743199"/>
+          </a:xfrm>
+        </p:spPr>
+        <p:txBody>
+          <a:bodyPr anchor="ctr">
+            <a:normAutofit/>
+          </a:bodyPr>
+          <a:lstStyle>
+            <a:lvl1pPr algn="l">
+              <a:defRPr sz="3200" b="0" cap="none">
+                <a:solidFill>
+                  <a:schemeClr val="tx1"/>
+                </a:solidFill>
+              </a:defRPr>
+            </a:lvl1pPr>
+          </a:lstStyle>
+          <a:p>
+            <a:r>
+              <a:rPr lang="en-US"/>
+              <a:t>Click to edit Master title style</a:t>
+            </a:r>
+            <a:endParaRPr lang="en-US" dirty="0"/>
+          </a:p>
+        </p:txBody>
+      </p:sp>
+      <p:sp>
+        <p:nvSpPr>
+          <p:cNvPr id="10" name="Text Placeholder 9"/>
+          <p:cNvSpPr>
+            <a:spLocks noGrp="1"/>
+          </p:cNvSpPr>
+          <p:nvPr>
+            <p:ph type="body" sz="quarter" idx="13"/>
+          </p:nvPr>
+        </p:nvSpPr>
+        <p:spPr>
+          <a:xfrm>
+            <a:off x="685800" y="3886200"/>
+            <a:ext cx="10135436" cy="889000"/>
+          </a:xfrm>
+        </p:spPr>
+        <p:txBody>
+          <a:bodyPr vert="horz" lIns="91440" tIns="45720" rIns="91440" bIns="45720" rtlCol="0" anchor="b">
+            <a:normAutofit/>
+          </a:bodyPr>
+          <a:lstStyle>
+            <a:lvl1pPr>
+              <a:buNone/>
+              <a:defRPr lang="en-US" sz="2400" b="0" cap="none" dirty="0">
+                <a:ln w="3175" cmpd="sng">
+                  <a:noFill/>
+                </a:ln>
+                <a:solidFill>
+                  <a:schemeClr val="tx1"/>
+                </a:solidFill>
+                <a:effectLst/>
+              </a:defRPr>
+            </a:lvl1pPr>
+          </a:lstStyle>
+          <a:p>
+            <a:pPr marL="0" lvl="0">
+              <a:spcBef>
+                <a:spcPct val="0"/>
+              </a:spcBef>
+              <a:buNone/>
+            </a:pPr>
+            <a:r>
+              <a:rPr lang="en-US"/>
+              <a:t>Click to edit Master text styles</a:t>
+            </a:r>
+          </a:p>
+        </p:txBody>
+      </p:sp>
+      <p:sp>
+        <p:nvSpPr>
+          <p:cNvPr id="3" name="Text Placeholder 2"/>
+          <p:cNvSpPr>
+            <a:spLocks noGrp="1"/>
+          </p:cNvSpPr>
+          <p:nvPr>
+            <p:ph type="body" idx="1"/>
+          </p:nvPr>
+        </p:nvSpPr>
+        <p:spPr>
+          <a:xfrm>
+            <a:off x="685799" y="4775200"/>
+            <a:ext cx="10135436" cy="1016000"/>
+          </a:xfrm>
+        </p:spPr>
+        <p:txBody>
+          <a:bodyPr anchor="t">
+            <a:normAutofit/>
+          </a:bodyPr>
+          <a:lstStyle>
+            <a:lvl1pPr marL="0" indent="0" algn="l">
+              <a:buNone/>
+              <a:defRPr sz="1800">
+                <a:solidFill>
+                  <a:schemeClr val="tx1"/>
+                </a:solidFill>
+              </a:defRPr>
+            </a:lvl1pPr>
+            <a:lvl2pPr marL="457200" indent="0">
+              <a:buNone/>
+              <a:defRPr sz="1800">
+                <a:solidFill>
+                  <a:schemeClr val="tx1">
+                    <a:tint val="75000"/>
+                  </a:schemeClr>
+                </a:solidFill>
+              </a:defRPr>
+            </a:lvl2pPr>
+            <a:lvl3pPr marL="914400" indent="0">
+              <a:buNone/>
+              <a:defRPr sz="1600">
+                <a:solidFill>
+                  <a:schemeClr val="tx1">
+                    <a:tint val="75000"/>
+                  </a:schemeClr>
+                </a:solidFill>
+              </a:defRPr>
+            </a:lvl3pPr>
+            <a:lvl4pPr marL="1371600" indent="0">
+              <a:buNone/>
+              <a:defRPr sz="1400">
+                <a:solidFill>
+                  <a:schemeClr val="tx1">
+                    <a:tint val="75000"/>
+                  </a:schemeClr>
+                </a:solidFill>
+              </a:defRPr>
+            </a:lvl4pPr>
+            <a:lvl5pPr marL="1828800" indent="0">
+              <a:buNone/>
+              <a:defRPr sz="1400">
+                <a:solidFill>
+                  <a:schemeClr val="tx1">
+                    <a:tint val="75000"/>
+                  </a:schemeClr>
+                </a:solidFill>
+              </a:defRPr>
+            </a:lvl5pPr>
+            <a:lvl6pPr marL="2286000" indent="0">
+              <a:buNone/>
+              <a:defRPr sz="1400">
+                <a:solidFill>
+                  <a:schemeClr val="tx1">
+                    <a:tint val="75000"/>
+                  </a:schemeClr>
+                </a:solidFill>
+              </a:defRPr>
+            </a:lvl6pPr>
+            <a:lvl7pPr marL="2743200" indent="0">
+              <a:buNone/>
+              <a:defRPr sz="1400">
+                <a:solidFill>
+                  <a:schemeClr val="tx1">
+                    <a:tint val="75000"/>
+                  </a:schemeClr>
+                </a:solidFill>
+              </a:defRPr>
+            </a:lvl7pPr>
+            <a:lvl8pPr marL="3200400" indent="0">
+              <a:buNone/>
+              <a:defRPr sz="1400">
+                <a:solidFill>
+                  <a:schemeClr val="tx1">
+                    <a:tint val="75000"/>
+                  </a:schemeClr>
+                </a:solidFill>
+              </a:defRPr>
+            </a:lvl8pPr>
+            <a:lvl9pPr marL="3657600" indent="0">
+              <a:buNone/>
+              <a:defRPr sz="1400">
+                <a:solidFill>
+                  <a:schemeClr val="tx1">
+                    <a:tint val="75000"/>
+                  </a:schemeClr>
+                </a:solidFill>
+              </a:defRPr>
+            </a:lvl9pPr>
+          </a:lstStyle>
+          <a:p>
+            <a:pPr lvl="0"/>
+            <a:r>
+              <a:rPr lang="en-US"/>
+              <a:t>Click to edit Master text styles</a:t>
+            </a:r>
+          </a:p>
+        </p:txBody>
+      </p:sp>
+      <p:sp>
+        <p:nvSpPr>
+          <p:cNvPr id="4" name="Date Placeholder 3"/>
+          <p:cNvSpPr>
+            <a:spLocks noGrp="1"/>
+          </p:cNvSpPr>
+          <p:nvPr>
+            <p:ph type="dt" sz="half" idx="10"/>
+          </p:nvPr>
+        </p:nvSpPr>
+        <p:spPr/>
+        <p:txBody>
+          <a:bodyPr/>
+          <a:lstStyle/>
+          <a:p>
+            <a:fld id="{B61BEF0D-F0BB-DE4B-95CE-6DB70DBA9567}" type="datetimeFigureOut">
+              <a:rPr lang="en-US" smtClean="0"/>
+              <a:pPr/>
+              <a:t>3/16/2024</a:t>
+            </a:fld>
+            <a:endParaRPr lang="en-US" dirty="0"/>
+          </a:p>
+        </p:txBody>
+      </p:sp>
+      <p:sp>
+        <p:nvSpPr>
+          <p:cNvPr id="5" name="Footer Placeholder 4"/>
+          <p:cNvSpPr>
+            <a:spLocks noGrp="1"/>
+          </p:cNvSpPr>
+          <p:nvPr>
+            <p:ph type="ftr" sz="quarter" idx="11"/>
+          </p:nvPr>
+        </p:nvSpPr>
+        <p:spPr/>
+        <p:txBody>
+          <a:bodyPr/>
+          <a:lstStyle/>
+          <a:p>
+            <a:endParaRPr lang="en-US" dirty="0"/>
+          </a:p>
+        </p:txBody>
+      </p:sp>
+      <p:sp>
+        <p:nvSpPr>
+          <p:cNvPr id="6" name="Slide Number Placeholder 5"/>
+          <p:cNvSpPr>
+            <a:spLocks noGrp="1"/>
+          </p:cNvSpPr>
+          <p:nvPr>
+            <p:ph type="sldNum" sz="quarter" idx="12"/>
+          </p:nvPr>
+        </p:nvSpPr>
+        <p:spPr/>
+        <p:txBody>
+          <a:bodyPr/>
+          <a:lstStyle/>
+          <a:p>
+            <a:fld id="{D57F1E4F-1CFF-5643-939E-217C01CDF565}" type="slidenum">
+              <a:rPr lang="en-US" smtClean="0"/>
+              <a:pPr/>
+              <a:t>‹#›</a:t>
+            </a:fld>
+            <a:endParaRPr lang="en-US" dirty="0"/>
+          </a:p>
+        </p:txBody>
+      </p:sp>
+    </p:spTree>
+    <p:extLst>
+      <p:ext uri="{BB962C8B-B14F-4D97-AF65-F5344CB8AC3E}">
+        <p14:creationId xmlns:p14="http://schemas.microsoft.com/office/powerpoint/2010/main" val="3834870654"/>
+      </p:ext>
+    </p:extLst>
+  </p:cSld>
+  <p:clrMapOvr>
+    <a:masterClrMapping/>
+  </p:clrMapOvr>
+</p:sldLayout>
+</file>
+
+<file path=ppt/slideLayouts/slideLayout15.xml><?xml version="1.0" encoding="utf-8"?>
+<p:sldLayout xmlns:a="http://schemas.openxmlformats.org/drawingml/2006/main" xmlns:r="http://schemas.openxmlformats.org/officeDocument/2006/relationships" xmlns:p="http://schemas.openxmlformats.org/presentationml/2006/main" preserve="1">
+  <p:cSld name="True or False">
+    <p:spTree>
+      <p:nvGrpSpPr>
+        <p:cNvPr id="1" name=""/>
+        <p:cNvGrpSpPr/>
+        <p:nvPr/>
+      </p:nvGrpSpPr>
+      <p:grpSpPr>
+        <a:xfrm>
+          <a:off x="0" y="0"/>
+          <a:ext cx="0" cy="0"/>
+          <a:chOff x="0" y="0"/>
+          <a:chExt cx="0" cy="0"/>
+        </a:xfrm>
+      </p:grpSpPr>
+      <p:pic>
+        <p:nvPicPr>
+          <p:cNvPr id="8" name="Picture 7" descr="Celestia-R1---OverlayContentHD.png"/>
+          <p:cNvPicPr>
+            <a:picLocks noChangeAspect="1"/>
+          </p:cNvPicPr>
+          <p:nvPr/>
+        </p:nvPicPr>
+        <p:blipFill>
+          <a:blip r:embed="rId2">
+            <a:extLst>
+              <a:ext uri="{28A0092B-C50C-407E-A947-70E740481C1C}">
+                <a14:useLocalDpi xmlns:a14="http://schemas.microsoft.com/office/drawing/2010/main" val="0"/>
+              </a:ext>
+            </a:extLst>
+          </a:blip>
+          <a:stretch>
+            <a:fillRect/>
+          </a:stretch>
+        </p:blipFill>
+        <p:spPr>
+          <a:xfrm>
+            <a:off x="0" y="0"/>
+            <a:ext cx="12188825" cy="6856214"/>
+          </a:xfrm>
+          <a:prstGeom prst="rect">
+            <a:avLst/>
+          </a:prstGeom>
+        </p:spPr>
+      </p:pic>
+      <p:sp>
+        <p:nvSpPr>
+          <p:cNvPr id="2" name="Title 1"/>
+          <p:cNvSpPr>
+            <a:spLocks noGrp="1"/>
+          </p:cNvSpPr>
+          <p:nvPr>
+            <p:ph type="title"/>
+          </p:nvPr>
+        </p:nvSpPr>
+        <p:spPr>
+          <a:xfrm>
+            <a:off x="685801" y="609601"/>
+            <a:ext cx="10131427" cy="2743199"/>
+          </a:xfrm>
+        </p:spPr>
+        <p:txBody>
+          <a:bodyPr vert="horz" lIns="91440" tIns="45720" rIns="91440" bIns="45720" rtlCol="0" anchor="ctr">
+            <a:normAutofit/>
+          </a:bodyPr>
+          <a:lstStyle>
+            <a:lvl1pPr>
+              <a:defRPr lang="en-US" b="0" dirty="0"/>
+            </a:lvl1pPr>
+          </a:lstStyle>
+          <a:p>
+            <a:pPr marL="0" lvl="0"/>
+            <a:r>
+              <a:rPr lang="en-US"/>
+              <a:t>Click to edit Master title style</a:t>
+            </a:r>
+            <a:endParaRPr lang="en-US" dirty="0"/>
+          </a:p>
+        </p:txBody>
+      </p:sp>
+      <p:sp>
+        <p:nvSpPr>
+          <p:cNvPr id="10" name="Text Placeholder 9"/>
+          <p:cNvSpPr>
+            <a:spLocks noGrp="1"/>
+          </p:cNvSpPr>
+          <p:nvPr>
+            <p:ph type="body" sz="quarter" idx="13"/>
+          </p:nvPr>
+        </p:nvSpPr>
+        <p:spPr>
+          <a:xfrm>
+            <a:off x="685801" y="3505200"/>
+            <a:ext cx="10131428" cy="838200"/>
+          </a:xfrm>
+        </p:spPr>
+        <p:txBody>
+          <a:bodyPr vert="horz" lIns="91440" tIns="45720" rIns="91440" bIns="45720" rtlCol="0" anchor="b">
+            <a:normAutofit/>
+          </a:bodyPr>
+          <a:lstStyle>
+            <a:lvl1pPr>
+              <a:buNone/>
+              <a:defRPr lang="en-US" sz="2800" b="0" cap="none" dirty="0">
+                <a:ln w="3175" cmpd="sng">
+                  <a:noFill/>
+                </a:ln>
+                <a:solidFill>
+                  <a:schemeClr val="tx1"/>
+                </a:solidFill>
+                <a:effectLst/>
+              </a:defRPr>
+            </a:lvl1pPr>
+          </a:lstStyle>
+          <a:p>
+            <a:pPr marL="0" lvl="0">
+              <a:spcBef>
+                <a:spcPct val="0"/>
+              </a:spcBef>
+              <a:buNone/>
+            </a:pPr>
+            <a:r>
+              <a:rPr lang="en-US"/>
+              <a:t>Click to edit Master text styles</a:t>
+            </a:r>
+          </a:p>
+        </p:txBody>
+      </p:sp>
+      <p:sp>
+        <p:nvSpPr>
+          <p:cNvPr id="3" name="Text Placeholder 2"/>
+          <p:cNvSpPr>
+            <a:spLocks noGrp="1"/>
+          </p:cNvSpPr>
+          <p:nvPr>
+            <p:ph type="body" idx="1"/>
+          </p:nvPr>
+        </p:nvSpPr>
+        <p:spPr>
+          <a:xfrm>
+            <a:off x="685800" y="4343400"/>
+            <a:ext cx="10131428" cy="1447800"/>
+          </a:xfrm>
+        </p:spPr>
+        <p:txBody>
+          <a:bodyPr anchor="t">
+            <a:normAutofit/>
+          </a:bodyPr>
+          <a:lstStyle>
+            <a:lvl1pPr marL="0" indent="0" algn="l">
+              <a:buNone/>
+              <a:defRPr sz="1800">
+                <a:solidFill>
+                  <a:schemeClr val="tx1"/>
+                </a:solidFill>
+              </a:defRPr>
+            </a:lvl1pPr>
+            <a:lvl2pPr marL="457200" indent="0">
+              <a:buNone/>
+              <a:defRPr sz="1800">
+                <a:solidFill>
+                  <a:schemeClr val="tx1">
+                    <a:tint val="75000"/>
+                  </a:schemeClr>
+                </a:solidFill>
+              </a:defRPr>
+            </a:lvl2pPr>
+            <a:lvl3pPr marL="914400" indent="0">
+              <a:buNone/>
+              <a:defRPr sz="1600">
+                <a:solidFill>
+                  <a:schemeClr val="tx1">
+                    <a:tint val="75000"/>
+                  </a:schemeClr>
+                </a:solidFill>
+              </a:defRPr>
+            </a:lvl3pPr>
+            <a:lvl4pPr marL="1371600" indent="0">
+              <a:buNone/>
+              <a:defRPr sz="1400">
+                <a:solidFill>
+                  <a:schemeClr val="tx1">
+                    <a:tint val="75000"/>
+                  </a:schemeClr>
+                </a:solidFill>
+              </a:defRPr>
+            </a:lvl4pPr>
+            <a:lvl5pPr marL="1828800" indent="0">
+              <a:buNone/>
+              <a:defRPr sz="1400">
+                <a:solidFill>
+                  <a:schemeClr val="tx1">
+                    <a:tint val="75000"/>
+                  </a:schemeClr>
+                </a:solidFill>
+              </a:defRPr>
+            </a:lvl5pPr>
+            <a:lvl6pPr marL="2286000" indent="0">
+              <a:buNone/>
+              <a:defRPr sz="1400">
+                <a:solidFill>
+                  <a:schemeClr val="tx1">
+                    <a:tint val="75000"/>
+                  </a:schemeClr>
+                </a:solidFill>
+              </a:defRPr>
+            </a:lvl6pPr>
+            <a:lvl7pPr marL="2743200" indent="0">
+              <a:buNone/>
+              <a:defRPr sz="1400">
+                <a:solidFill>
+                  <a:schemeClr val="tx1">
+                    <a:tint val="75000"/>
+                  </a:schemeClr>
+                </a:solidFill>
+              </a:defRPr>
+            </a:lvl7pPr>
+            <a:lvl8pPr marL="3200400" indent="0">
+              <a:buNone/>
+              <a:defRPr sz="1400">
+                <a:solidFill>
+                  <a:schemeClr val="tx1">
+                    <a:tint val="75000"/>
+                  </a:schemeClr>
+                </a:solidFill>
+              </a:defRPr>
+            </a:lvl8pPr>
+            <a:lvl9pPr marL="3657600" indent="0">
+              <a:buNone/>
+              <a:defRPr sz="1400">
+                <a:solidFill>
+                  <a:schemeClr val="tx1">
+                    <a:tint val="75000"/>
+                  </a:schemeClr>
+                </a:solidFill>
+              </a:defRPr>
+            </a:lvl9pPr>
+          </a:lstStyle>
+          <a:p>
+            <a:pPr lvl="0"/>
+            <a:r>
+              <a:rPr lang="en-US"/>
+              <a:t>Click to edit Master text styles</a:t>
+            </a:r>
+          </a:p>
+        </p:txBody>
+      </p:sp>
+      <p:sp>
+        <p:nvSpPr>
+          <p:cNvPr id="4" name="Date Placeholder 3"/>
+          <p:cNvSpPr>
+            <a:spLocks noGrp="1"/>
+          </p:cNvSpPr>
+          <p:nvPr>
+            <p:ph type="dt" sz="half" idx="10"/>
+          </p:nvPr>
+        </p:nvSpPr>
+        <p:spPr/>
+        <p:txBody>
+          <a:bodyPr/>
+          <a:lstStyle/>
+          <a:p>
+            <a:fld id="{B61BEF0D-F0BB-DE4B-95CE-6DB70DBA9567}" type="datetimeFigureOut">
+              <a:rPr lang="en-US" smtClean="0"/>
+              <a:pPr/>
+              <a:t>3/16/2024</a:t>
+            </a:fld>
+            <a:endParaRPr lang="en-US" dirty="0"/>
+          </a:p>
+        </p:txBody>
+      </p:sp>
+      <p:sp>
+        <p:nvSpPr>
+          <p:cNvPr id="5" name="Footer Placeholder 4"/>
+          <p:cNvSpPr>
+            <a:spLocks noGrp="1"/>
+          </p:cNvSpPr>
+          <p:nvPr>
+            <p:ph type="ftr" sz="quarter" idx="11"/>
+          </p:nvPr>
+        </p:nvSpPr>
+        <p:spPr/>
+        <p:txBody>
+          <a:bodyPr/>
+          <a:lstStyle/>
+          <a:p>
+            <a:endParaRPr lang="en-US" dirty="0"/>
+          </a:p>
+        </p:txBody>
+      </p:sp>
+      <p:sp>
+        <p:nvSpPr>
+          <p:cNvPr id="6" name="Slide Number Placeholder 5"/>
+          <p:cNvSpPr>
+            <a:spLocks noGrp="1"/>
+          </p:cNvSpPr>
+          <p:nvPr>
+            <p:ph type="sldNum" sz="quarter" idx="12"/>
+          </p:nvPr>
+        </p:nvSpPr>
+        <p:spPr/>
+        <p:txBody>
+          <a:bodyPr/>
+          <a:lstStyle/>
+          <a:p>
+            <a:fld id="{D57F1E4F-1CFF-5643-939E-217C01CDF565}" type="slidenum">
+              <a:rPr lang="en-US" smtClean="0"/>
+              <a:pPr/>
+              <a:t>‹#›</a:t>
+            </a:fld>
+            <a:endParaRPr lang="en-US" dirty="0"/>
+          </a:p>
+        </p:txBody>
+      </p:sp>
+    </p:spTree>
+    <p:extLst>
+      <p:ext uri="{BB962C8B-B14F-4D97-AF65-F5344CB8AC3E}">
+        <p14:creationId xmlns:p14="http://schemas.microsoft.com/office/powerpoint/2010/main" val="3509938716"/>
+      </p:ext>
+    </p:extLst>
+  </p:cSld>
+  <p:clrMapOvr>
+    <a:masterClrMapping/>
+  </p:clrMapOvr>
+</p:sldLayout>
+</file>
+
+<file path=ppt/slideLayouts/slideLayout16.xml><?xml version="1.0" encoding="utf-8"?>
 <p:sldLayout xmlns:a="http://schemas.openxmlformats.org/drawingml/2006/main" xmlns:r="http://schemas.openxmlformats.org/officeDocument/2006/relationships" xmlns:p="http://schemas.openxmlformats.org/presentationml/2006/main" type="vertTx" preserve="1">
   <p:cSld name="Title and Vertical Text">
     <p:spTree>
@@ -356,15 +2784,39 @@
           <a:chExt cx="0" cy="0"/>
         </a:xfrm>
       </p:grpSpPr>
-      <p:sp>
-        <p:nvSpPr>
-          <p:cNvPr id="2" name="Title 1">
+      <p:pic>
+        <p:nvPicPr>
+          <p:cNvPr id="7" name="Picture 6" descr="Celestia-R1---OverlayContentHD.png"/>
+          <p:cNvPicPr>
+            <a:picLocks noChangeAspect="1"/>
+          </p:cNvPicPr>
+          <p:nvPr/>
+        </p:nvPicPr>
+        <p:blipFill>
+          <a:blip r:embed="rId2">
             <a:extLst>
-              <a:ext uri="{FF2B5EF4-FFF2-40B4-BE49-F238E27FC236}">
-                <a16:creationId xmlns:a16="http://schemas.microsoft.com/office/drawing/2014/main" id="{8D76B664-0678-32E7-0762-1584C1497186}"/>
+              <a:ext uri="{28A0092B-C50C-407E-A947-70E740481C1C}">
+                <a14:useLocalDpi xmlns:a14="http://schemas.microsoft.com/office/drawing/2010/main" val="0"/>
               </a:ext>
             </a:extLst>
-          </p:cNvPr>
+          </a:blip>
+          <a:stretch>
+            <a:fillRect/>
+          </a:stretch>
+        </p:blipFill>
+        <p:spPr>
+          <a:xfrm>
+            <a:off x="0" y="0"/>
+            <a:ext cx="12188825" cy="6856214"/>
+          </a:xfrm>
+          <a:prstGeom prst="rect">
+            <a:avLst/>
+          </a:prstGeom>
+        </p:spPr>
+      </p:pic>
+      <p:sp>
+        <p:nvSpPr>
+          <p:cNvPr id="8" name="Title 1"/>
           <p:cNvSpPr>
             <a:spLocks noGrp="1"/>
           </p:cNvSpPr>
@@ -372,7 +2824,12 @@
             <p:ph type="title"/>
           </p:nvPr>
         </p:nvSpPr>
-        <p:spPr/>
+        <p:spPr>
+          <a:xfrm>
+            <a:off x="685801" y="609600"/>
+            <a:ext cx="10131425" cy="1456267"/>
+          </a:xfrm>
+        </p:spPr>
         <p:txBody>
           <a:bodyPr/>
           <a:lstStyle/>
@@ -381,18 +2838,13 @@
               <a:rPr lang="en-US"/>
               <a:t>Click to edit Master title style</a:t>
             </a:r>
-          </a:p>
-        </p:txBody>
-      </p:sp>
-      <p:sp>
-        <p:nvSpPr>
-          <p:cNvPr id="3" name="Vertical Text Placeholder 2">
-            <a:extLst>
-              <a:ext uri="{FF2B5EF4-FFF2-40B4-BE49-F238E27FC236}">
-                <a16:creationId xmlns:a16="http://schemas.microsoft.com/office/drawing/2014/main" id="{3F34333A-DAE4-C3D2-4515-D53A490369DC}"/>
-              </a:ext>
-            </a:extLst>
-          </p:cNvPr>
+            <a:endParaRPr lang="en-US" dirty="0"/>
+          </a:p>
+        </p:txBody>
+      </p:sp>
+      <p:sp>
+        <p:nvSpPr>
+          <p:cNvPr id="3" name="Vertical Text Placeholder 2"/>
           <p:cNvSpPr>
             <a:spLocks noGrp="1"/>
           </p:cNvSpPr>
@@ -402,7 +2854,7 @@
         </p:nvSpPr>
         <p:spPr/>
         <p:txBody>
-          <a:bodyPr vert="eaVert"/>
+          <a:bodyPr vert="eaVert" anchor="t"/>
           <a:lstStyle/>
           <a:p>
             <a:pPr lvl="0"/>
@@ -438,18 +2890,13 @@
               <a:rPr lang="en-US"/>
               <a:t>Fifth level</a:t>
             </a:r>
-          </a:p>
-        </p:txBody>
-      </p:sp>
-      <p:sp>
-        <p:nvSpPr>
-          <p:cNvPr id="4" name="Date Placeholder 3">
-            <a:extLst>
-              <a:ext uri="{FF2B5EF4-FFF2-40B4-BE49-F238E27FC236}">
-                <a16:creationId xmlns:a16="http://schemas.microsoft.com/office/drawing/2014/main" id="{E3EC0736-442D-18E0-7053-228DCF6288BB}"/>
-              </a:ext>
-            </a:extLst>
-          </p:cNvPr>
+            <a:endParaRPr lang="en-US" dirty="0"/>
+          </a:p>
+        </p:txBody>
+      </p:sp>
+      <p:sp>
+        <p:nvSpPr>
+          <p:cNvPr id="4" name="Date Placeholder 3"/>
           <p:cNvSpPr>
             <a:spLocks noGrp="1"/>
           </p:cNvSpPr>
@@ -465,7 +2912,7 @@
             <a:fld id="{B61BEF0D-F0BB-DE4B-95CE-6DB70DBA9567}" type="datetimeFigureOut">
               <a:rPr lang="en-US" smtClean="0"/>
               <a:pPr/>
-              <a:t>3/14/2024</a:t>
+              <a:t>3/16/2024</a:t>
             </a:fld>
             <a:endParaRPr lang="en-US" dirty="0"/>
           </a:p>
@@ -473,13 +2920,7 @@
       </p:sp>
       <p:sp>
         <p:nvSpPr>
-          <p:cNvPr id="5" name="Footer Placeholder 4">
-            <a:extLst>
-              <a:ext uri="{FF2B5EF4-FFF2-40B4-BE49-F238E27FC236}">
-                <a16:creationId xmlns:a16="http://schemas.microsoft.com/office/drawing/2014/main" id="{CF8401A0-31FD-E2F8-A264-350B834CC99E}"/>
-              </a:ext>
-            </a:extLst>
-          </p:cNvPr>
+          <p:cNvPr id="5" name="Footer Placeholder 4"/>
           <p:cNvSpPr>
             <a:spLocks noGrp="1"/>
           </p:cNvSpPr>
@@ -498,13 +2939,7 @@
       </p:sp>
       <p:sp>
         <p:nvSpPr>
-          <p:cNvPr id="6" name="Slide Number Placeholder 5">
-            <a:extLst>
-              <a:ext uri="{FF2B5EF4-FFF2-40B4-BE49-F238E27FC236}">
-                <a16:creationId xmlns:a16="http://schemas.microsoft.com/office/drawing/2014/main" id="{C672C1AB-A9AC-52C1-0FE9-0B16518DC512}"/>
-              </a:ext>
-            </a:extLst>
-          </p:cNvPr>
+          <p:cNvPr id="6" name="Slide Number Placeholder 5"/>
           <p:cNvSpPr>
             <a:spLocks noGrp="1"/>
           </p:cNvSpPr>
@@ -529,7 +2964,7 @@
     </p:spTree>
     <p:extLst>
       <p:ext uri="{BB962C8B-B14F-4D97-AF65-F5344CB8AC3E}">
-        <p14:creationId xmlns:p14="http://schemas.microsoft.com/office/powerpoint/2010/main" val="1491920802"/>
+        <p14:creationId xmlns:p14="http://schemas.microsoft.com/office/powerpoint/2010/main" val="752901467"/>
       </p:ext>
     </p:extLst>
   </p:cSld>
@@ -539,7 +2974,7 @@
 </p:sldLayout>
 </file>
 
-<file path=ppt/slideLayouts/slideLayout11.xml><?xml version="1.0" encoding="utf-8"?>
+<file path=ppt/slideLayouts/slideLayout17.xml><?xml version="1.0" encoding="utf-8"?>
 <p:sldLayout xmlns:a="http://schemas.openxmlformats.org/drawingml/2006/main" xmlns:r="http://schemas.openxmlformats.org/officeDocument/2006/relationships" xmlns:p="http://schemas.openxmlformats.org/presentationml/2006/main" type="vertTitleAndTx" preserve="1">
   <p:cSld name="Vertical Title and Text">
     <p:spTree>
@@ -556,15 +2991,39 @@
           <a:chExt cx="0" cy="0"/>
         </a:xfrm>
       </p:grpSpPr>
-      <p:sp>
-        <p:nvSpPr>
-          <p:cNvPr id="2" name="Vertical Title 1">
+      <p:pic>
+        <p:nvPicPr>
+          <p:cNvPr id="7" name="Picture 6" descr="Celestia-R1---OverlayContentHD.png"/>
+          <p:cNvPicPr>
+            <a:picLocks noChangeAspect="1"/>
+          </p:cNvPicPr>
+          <p:nvPr/>
+        </p:nvPicPr>
+        <p:blipFill>
+          <a:blip r:embed="rId2">
             <a:extLst>
-              <a:ext uri="{FF2B5EF4-FFF2-40B4-BE49-F238E27FC236}">
-                <a16:creationId xmlns:a16="http://schemas.microsoft.com/office/drawing/2014/main" id="{8BE03CBC-D278-CDF1-4926-4C73CED431CA}"/>
+              <a:ext uri="{28A0092B-C50C-407E-A947-70E740481C1C}">
+                <a14:useLocalDpi xmlns:a14="http://schemas.microsoft.com/office/drawing/2010/main" val="0"/>
               </a:ext>
             </a:extLst>
-          </p:cNvPr>
+          </a:blip>
+          <a:stretch>
+            <a:fillRect/>
+          </a:stretch>
+        </p:blipFill>
+        <p:spPr>
+          <a:xfrm>
+            <a:off x="0" y="0"/>
+            <a:ext cx="12188825" cy="6856214"/>
+          </a:xfrm>
+          <a:prstGeom prst="rect">
+            <a:avLst/>
+          </a:prstGeom>
+        </p:spPr>
+      </p:pic>
+      <p:sp>
+        <p:nvSpPr>
+          <p:cNvPr id="2" name="Vertical Title 1"/>
           <p:cNvSpPr>
             <a:spLocks noGrp="1"/>
           </p:cNvSpPr>
@@ -574,8 +3033,8 @@
         </p:nvSpPr>
         <p:spPr>
           <a:xfrm>
-            <a:off x="8724900" y="365125"/>
-            <a:ext cx="2628900" cy="5811838"/>
+            <a:off x="8658675" y="609599"/>
+            <a:ext cx="2158552" cy="5181601"/>
           </a:xfrm>
         </p:spPr>
         <p:txBody>
@@ -586,18 +3045,13 @@
               <a:rPr lang="en-US"/>
               <a:t>Click to edit Master title style</a:t>
             </a:r>
-          </a:p>
-        </p:txBody>
-      </p:sp>
-      <p:sp>
-        <p:nvSpPr>
-          <p:cNvPr id="3" name="Vertical Text Placeholder 2">
-            <a:extLst>
-              <a:ext uri="{FF2B5EF4-FFF2-40B4-BE49-F238E27FC236}">
-                <a16:creationId xmlns:a16="http://schemas.microsoft.com/office/drawing/2014/main" id="{34B8686F-EF60-0427-4FE2-47C141A3855D}"/>
-              </a:ext>
-            </a:extLst>
-          </p:cNvPr>
+            <a:endParaRPr lang="en-US" dirty="0"/>
+          </a:p>
+        </p:txBody>
+      </p:sp>
+      <p:sp>
+        <p:nvSpPr>
+          <p:cNvPr id="3" name="Vertical Text Placeholder 2"/>
           <p:cNvSpPr>
             <a:spLocks noGrp="1"/>
           </p:cNvSpPr>
@@ -607,12 +3061,12 @@
         </p:nvSpPr>
         <p:spPr>
           <a:xfrm>
-            <a:off x="838200" y="365125"/>
-            <a:ext cx="7734300" cy="5811838"/>
-          </a:xfrm>
-        </p:spPr>
-        <p:txBody>
-          <a:bodyPr vert="eaVert"/>
+            <a:off x="685800" y="609600"/>
+            <a:ext cx="7832116" cy="5181600"/>
+          </a:xfrm>
+        </p:spPr>
+        <p:txBody>
+          <a:bodyPr vert="eaVert" anchor="t"/>
           <a:lstStyle/>
           <a:p>
             <a:pPr lvl="0"/>
@@ -648,18 +3102,13 @@
               <a:rPr lang="en-US"/>
               <a:t>Fifth level</a:t>
             </a:r>
-          </a:p>
-        </p:txBody>
-      </p:sp>
-      <p:sp>
-        <p:nvSpPr>
-          <p:cNvPr id="4" name="Date Placeholder 3">
-            <a:extLst>
-              <a:ext uri="{FF2B5EF4-FFF2-40B4-BE49-F238E27FC236}">
-                <a16:creationId xmlns:a16="http://schemas.microsoft.com/office/drawing/2014/main" id="{0F73E188-6CD8-1E24-F29F-79665A1EBFE0}"/>
-              </a:ext>
-            </a:extLst>
-          </p:cNvPr>
+            <a:endParaRPr lang="en-US" dirty="0"/>
+          </a:p>
+        </p:txBody>
+      </p:sp>
+      <p:sp>
+        <p:nvSpPr>
+          <p:cNvPr id="4" name="Date Placeholder 3"/>
           <p:cNvSpPr>
             <a:spLocks noGrp="1"/>
           </p:cNvSpPr>
@@ -675,7 +3124,7 @@
             <a:fld id="{B61BEF0D-F0BB-DE4B-95CE-6DB70DBA9567}" type="datetimeFigureOut">
               <a:rPr lang="en-US" smtClean="0"/>
               <a:pPr/>
-              <a:t>3/14/2024</a:t>
+              <a:t>3/16/2024</a:t>
             </a:fld>
             <a:endParaRPr lang="en-US" dirty="0"/>
           </a:p>
@@ -683,13 +3132,7 @@
       </p:sp>
       <p:sp>
         <p:nvSpPr>
-          <p:cNvPr id="5" name="Footer Placeholder 4">
-            <a:extLst>
-              <a:ext uri="{FF2B5EF4-FFF2-40B4-BE49-F238E27FC236}">
-                <a16:creationId xmlns:a16="http://schemas.microsoft.com/office/drawing/2014/main" id="{BE3B3C38-7678-FBA4-B5E7-36E285509AD9}"/>
-              </a:ext>
-            </a:extLst>
-          </p:cNvPr>
+          <p:cNvPr id="5" name="Footer Placeholder 4"/>
           <p:cNvSpPr>
             <a:spLocks noGrp="1"/>
           </p:cNvSpPr>
@@ -708,13 +3151,7 @@
       </p:sp>
       <p:sp>
         <p:nvSpPr>
-          <p:cNvPr id="6" name="Slide Number Placeholder 5">
-            <a:extLst>
-              <a:ext uri="{FF2B5EF4-FFF2-40B4-BE49-F238E27FC236}">
-                <a16:creationId xmlns:a16="http://schemas.microsoft.com/office/drawing/2014/main" id="{5FFC243A-E079-75EE-4A00-A6305545D1E7}"/>
-              </a:ext>
-            </a:extLst>
-          </p:cNvPr>
+          <p:cNvPr id="6" name="Slide Number Placeholder 5"/>
           <p:cNvSpPr>
             <a:spLocks noGrp="1"/>
           </p:cNvSpPr>
@@ -739,7 +3176,7 @@
     </p:spTree>
     <p:extLst>
       <p:ext uri="{BB962C8B-B14F-4D97-AF65-F5344CB8AC3E}">
-        <p14:creationId xmlns:p14="http://schemas.microsoft.com/office/powerpoint/2010/main" val="1339246833"/>
+        <p14:creationId xmlns:p14="http://schemas.microsoft.com/office/powerpoint/2010/main" val="3025195216"/>
       </p:ext>
     </p:extLst>
   </p:cSld>
@@ -766,15 +3203,39 @@
           <a:chExt cx="0" cy="0"/>
         </a:xfrm>
       </p:grpSpPr>
-      <p:sp>
-        <p:nvSpPr>
-          <p:cNvPr id="2" name="Title 1">
+      <p:pic>
+        <p:nvPicPr>
+          <p:cNvPr id="7" name="Picture 6" descr="Celestia-R1---OverlayContentHD.png"/>
+          <p:cNvPicPr>
+            <a:picLocks noChangeAspect="1"/>
+          </p:cNvPicPr>
+          <p:nvPr/>
+        </p:nvPicPr>
+        <p:blipFill>
+          <a:blip r:embed="rId2">
             <a:extLst>
-              <a:ext uri="{FF2B5EF4-FFF2-40B4-BE49-F238E27FC236}">
-                <a16:creationId xmlns:a16="http://schemas.microsoft.com/office/drawing/2014/main" id="{3A556241-4B51-E454-7CDD-205ADAC5FCF8}"/>
+              <a:ext uri="{28A0092B-C50C-407E-A947-70E740481C1C}">
+                <a14:useLocalDpi xmlns:a14="http://schemas.microsoft.com/office/drawing/2010/main" val="0"/>
               </a:ext>
             </a:extLst>
-          </p:cNvPr>
+          </a:blip>
+          <a:stretch>
+            <a:fillRect/>
+          </a:stretch>
+        </p:blipFill>
+        <p:spPr>
+          <a:xfrm>
+            <a:off x="0" y="0"/>
+            <a:ext cx="12188825" cy="6856214"/>
+          </a:xfrm>
+          <a:prstGeom prst="rect">
+            <a:avLst/>
+          </a:prstGeom>
+        </p:spPr>
+      </p:pic>
+      <p:sp>
+        <p:nvSpPr>
+          <p:cNvPr id="2" name="Title 1"/>
           <p:cNvSpPr>
             <a:spLocks noGrp="1"/>
           </p:cNvSpPr>
@@ -791,18 +3252,13 @@
               <a:rPr lang="en-US"/>
               <a:t>Click to edit Master title style</a:t>
             </a:r>
-          </a:p>
-        </p:txBody>
-      </p:sp>
-      <p:sp>
-        <p:nvSpPr>
-          <p:cNvPr id="3" name="Content Placeholder 2">
-            <a:extLst>
-              <a:ext uri="{FF2B5EF4-FFF2-40B4-BE49-F238E27FC236}">
-                <a16:creationId xmlns:a16="http://schemas.microsoft.com/office/drawing/2014/main" id="{8E85CC22-8D6E-E68F-33DF-3D38158F63AE}"/>
-              </a:ext>
-            </a:extLst>
-          </p:cNvPr>
+            <a:endParaRPr lang="en-US" dirty="0"/>
+          </a:p>
+        </p:txBody>
+      </p:sp>
+      <p:sp>
+        <p:nvSpPr>
+          <p:cNvPr id="3" name="Content Placeholder 2"/>
           <p:cNvSpPr>
             <a:spLocks noGrp="1"/>
           </p:cNvSpPr>
@@ -812,7 +3268,7 @@
         </p:nvSpPr>
         <p:spPr/>
         <p:txBody>
-          <a:bodyPr/>
+          <a:bodyPr anchor="ctr"/>
           <a:lstStyle/>
           <a:p>
             <a:pPr lvl="0"/>
@@ -848,18 +3304,13 @@
               <a:rPr lang="en-US"/>
               <a:t>Fifth level</a:t>
             </a:r>
-          </a:p>
-        </p:txBody>
-      </p:sp>
-      <p:sp>
-        <p:nvSpPr>
-          <p:cNvPr id="4" name="Date Placeholder 3">
-            <a:extLst>
-              <a:ext uri="{FF2B5EF4-FFF2-40B4-BE49-F238E27FC236}">
-                <a16:creationId xmlns:a16="http://schemas.microsoft.com/office/drawing/2014/main" id="{CB5C058C-D070-4EDE-6676-6B7909C3E192}"/>
-              </a:ext>
-            </a:extLst>
-          </p:cNvPr>
+            <a:endParaRPr lang="en-US" dirty="0"/>
+          </a:p>
+        </p:txBody>
+      </p:sp>
+      <p:sp>
+        <p:nvSpPr>
+          <p:cNvPr id="4" name="Date Placeholder 3"/>
           <p:cNvSpPr>
             <a:spLocks noGrp="1"/>
           </p:cNvSpPr>
@@ -875,7 +3326,7 @@
             <a:fld id="{B61BEF0D-F0BB-DE4B-95CE-6DB70DBA9567}" type="datetimeFigureOut">
               <a:rPr lang="en-US" smtClean="0"/>
               <a:pPr/>
-              <a:t>3/14/2024</a:t>
+              <a:t>3/16/2024</a:t>
             </a:fld>
             <a:endParaRPr lang="en-US" dirty="0"/>
           </a:p>
@@ -883,13 +3334,7 @@
       </p:sp>
       <p:sp>
         <p:nvSpPr>
-          <p:cNvPr id="5" name="Footer Placeholder 4">
-            <a:extLst>
-              <a:ext uri="{FF2B5EF4-FFF2-40B4-BE49-F238E27FC236}">
-                <a16:creationId xmlns:a16="http://schemas.microsoft.com/office/drawing/2014/main" id="{87711A01-E662-D450-8CD6-8D49F85BFD36}"/>
-              </a:ext>
-            </a:extLst>
-          </p:cNvPr>
+          <p:cNvPr id="5" name="Footer Placeholder 4"/>
           <p:cNvSpPr>
             <a:spLocks noGrp="1"/>
           </p:cNvSpPr>
@@ -908,13 +3353,7 @@
       </p:sp>
       <p:sp>
         <p:nvSpPr>
-          <p:cNvPr id="6" name="Slide Number Placeholder 5">
-            <a:extLst>
-              <a:ext uri="{FF2B5EF4-FFF2-40B4-BE49-F238E27FC236}">
-                <a16:creationId xmlns:a16="http://schemas.microsoft.com/office/drawing/2014/main" id="{4AE3CE56-FD88-6A43-D6BC-2B169732E44B}"/>
-              </a:ext>
-            </a:extLst>
-          </p:cNvPr>
+          <p:cNvPr id="6" name="Slide Number Placeholder 5"/>
           <p:cNvSpPr>
             <a:spLocks noGrp="1"/>
           </p:cNvSpPr>
@@ -939,7 +3378,7 @@
     </p:spTree>
     <p:extLst>
       <p:ext uri="{BB962C8B-B14F-4D97-AF65-F5344CB8AC3E}">
-        <p14:creationId xmlns:p14="http://schemas.microsoft.com/office/powerpoint/2010/main" val="2236720018"/>
+        <p14:creationId xmlns:p14="http://schemas.microsoft.com/office/powerpoint/2010/main" val="1815968194"/>
       </p:ext>
     </p:extLst>
   </p:cSld>
@@ -966,15 +3405,39 @@
           <a:chExt cx="0" cy="0"/>
         </a:xfrm>
       </p:grpSpPr>
-      <p:sp>
-        <p:nvSpPr>
-          <p:cNvPr id="2" name="Title 1">
+      <p:pic>
+        <p:nvPicPr>
+          <p:cNvPr id="7" name="Picture 6" descr="Celestia-R1---OverlayContentHD.png"/>
+          <p:cNvPicPr>
+            <a:picLocks noChangeAspect="1"/>
+          </p:cNvPicPr>
+          <p:nvPr/>
+        </p:nvPicPr>
+        <p:blipFill>
+          <a:blip r:embed="rId2">
             <a:extLst>
-              <a:ext uri="{FF2B5EF4-FFF2-40B4-BE49-F238E27FC236}">
-                <a16:creationId xmlns:a16="http://schemas.microsoft.com/office/drawing/2014/main" id="{5DF8AB92-050F-C9B0-8CAB-E2BF15A894F2}"/>
+              <a:ext uri="{28A0092B-C50C-407E-A947-70E740481C1C}">
+                <a14:useLocalDpi xmlns:a14="http://schemas.microsoft.com/office/drawing/2010/main" val="0"/>
               </a:ext>
             </a:extLst>
-          </p:cNvPr>
+          </a:blip>
+          <a:stretch>
+            <a:fillRect/>
+          </a:stretch>
+        </p:blipFill>
+        <p:spPr>
+          <a:xfrm>
+            <a:off x="0" y="0"/>
+            <a:ext cx="12188825" cy="6856214"/>
+          </a:xfrm>
+          <a:prstGeom prst="rect">
+            <a:avLst/>
+          </a:prstGeom>
+        </p:spPr>
+      </p:pic>
+      <p:sp>
+        <p:nvSpPr>
+          <p:cNvPr id="2" name="Title 1"/>
           <p:cNvSpPr>
             <a:spLocks noGrp="1"/>
           </p:cNvSpPr>
@@ -984,15 +3447,15 @@
         </p:nvSpPr>
         <p:spPr>
           <a:xfrm>
-            <a:off x="831850" y="1709738"/>
-            <a:ext cx="10515600" cy="2852737"/>
+            <a:off x="685800" y="3308581"/>
+            <a:ext cx="10131427" cy="1468800"/>
           </a:xfrm>
         </p:spPr>
         <p:txBody>
           <a:bodyPr anchor="b"/>
           <a:lstStyle>
-            <a:lvl1pPr>
-              <a:defRPr sz="6000"/>
+            <a:lvl1pPr algn="l">
+              <a:defRPr sz="4000" b="0" cap="all"/>
             </a:lvl1pPr>
           </a:lstStyle>
           <a:p>
@@ -1000,18 +3463,13 @@
               <a:rPr lang="en-US"/>
               <a:t>Click to edit Master title style</a:t>
             </a:r>
-          </a:p>
-        </p:txBody>
-      </p:sp>
-      <p:sp>
-        <p:nvSpPr>
-          <p:cNvPr id="3" name="Text Placeholder 2">
-            <a:extLst>
-              <a:ext uri="{FF2B5EF4-FFF2-40B4-BE49-F238E27FC236}">
-                <a16:creationId xmlns:a16="http://schemas.microsoft.com/office/drawing/2014/main" id="{766BFC23-EE25-E359-CB55-A6477110FDDF}"/>
-              </a:ext>
-            </a:extLst>
-          </p:cNvPr>
+            <a:endParaRPr lang="en-US" dirty="0"/>
+          </a:p>
+        </p:txBody>
+      </p:sp>
+      <p:sp>
+        <p:nvSpPr>
+          <p:cNvPr id="3" name="Text Placeholder 2"/>
           <p:cNvSpPr>
             <a:spLocks noGrp="1"/>
           </p:cNvSpPr>
@@ -1021,102 +3479,102 @@
         </p:nvSpPr>
         <p:spPr>
           <a:xfrm>
-            <a:off x="831850" y="4589463"/>
-            <a:ext cx="10515600" cy="1500187"/>
-          </a:xfrm>
-        </p:spPr>
-        <p:txBody>
-          <a:bodyPr/>
+            <a:off x="685799" y="4777381"/>
+            <a:ext cx="10131428" cy="860400"/>
+          </a:xfrm>
+        </p:spPr>
+        <p:txBody>
+          <a:bodyPr anchor="t">
+            <a:normAutofit/>
+          </a:bodyPr>
           <a:lstStyle>
-            <a:lvl1pPr marL="0" indent="0">
-              <a:buNone/>
-              <a:defRPr sz="2400">
+            <a:lvl1pPr marL="0" indent="0" algn="l">
+              <a:buNone/>
+              <a:defRPr sz="2000" cap="all">
+                <a:solidFill>
+                  <a:schemeClr val="tx1"/>
+                </a:solidFill>
+              </a:defRPr>
+            </a:lvl1pPr>
+            <a:lvl2pPr marL="457200" indent="0">
+              <a:buNone/>
+              <a:defRPr sz="1800">
                 <a:solidFill>
                   <a:schemeClr val="tx1">
                     <a:tint val="75000"/>
                   </a:schemeClr>
                 </a:solidFill>
               </a:defRPr>
-            </a:lvl1pPr>
-            <a:lvl2pPr marL="457200" indent="0">
-              <a:buNone/>
-              <a:defRPr sz="2000">
+            </a:lvl2pPr>
+            <a:lvl3pPr marL="914400" indent="0">
+              <a:buNone/>
+              <a:defRPr sz="1600">
                 <a:solidFill>
                   <a:schemeClr val="tx1">
                     <a:tint val="75000"/>
                   </a:schemeClr>
                 </a:solidFill>
               </a:defRPr>
-            </a:lvl2pPr>
-            <a:lvl3pPr marL="914400" indent="0">
-              <a:buNone/>
-              <a:defRPr sz="1800">
+            </a:lvl3pPr>
+            <a:lvl4pPr marL="1371600" indent="0">
+              <a:buNone/>
+              <a:defRPr sz="1400">
                 <a:solidFill>
                   <a:schemeClr val="tx1">
                     <a:tint val="75000"/>
                   </a:schemeClr>
                 </a:solidFill>
               </a:defRPr>
-            </a:lvl3pPr>
-            <a:lvl4pPr marL="1371600" indent="0">
-              <a:buNone/>
-              <a:defRPr sz="1600">
+            </a:lvl4pPr>
+            <a:lvl5pPr marL="1828800" indent="0">
+              <a:buNone/>
+              <a:defRPr sz="1400">
                 <a:solidFill>
                   <a:schemeClr val="tx1">
                     <a:tint val="75000"/>
                   </a:schemeClr>
                 </a:solidFill>
               </a:defRPr>
-            </a:lvl4pPr>
-            <a:lvl5pPr marL="1828800" indent="0">
-              <a:buNone/>
-              <a:defRPr sz="1600">
+            </a:lvl5pPr>
+            <a:lvl6pPr marL="2286000" indent="0">
+              <a:buNone/>
+              <a:defRPr sz="1400">
                 <a:solidFill>
                   <a:schemeClr val="tx1">
                     <a:tint val="75000"/>
                   </a:schemeClr>
                 </a:solidFill>
               </a:defRPr>
-            </a:lvl5pPr>
-            <a:lvl6pPr marL="2286000" indent="0">
-              <a:buNone/>
-              <a:defRPr sz="1600">
+            </a:lvl6pPr>
+            <a:lvl7pPr marL="2743200" indent="0">
+              <a:buNone/>
+              <a:defRPr sz="1400">
                 <a:solidFill>
                   <a:schemeClr val="tx1">
                     <a:tint val="75000"/>
                   </a:schemeClr>
                 </a:solidFill>
               </a:defRPr>
-            </a:lvl6pPr>
-            <a:lvl7pPr marL="2743200" indent="0">
-              <a:buNone/>
-              <a:defRPr sz="1600">
+            </a:lvl7pPr>
+            <a:lvl8pPr marL="3200400" indent="0">
+              <a:buNone/>
+              <a:defRPr sz="1400">
                 <a:solidFill>
                   <a:schemeClr val="tx1">
                     <a:tint val="75000"/>
                   </a:schemeClr>
                 </a:solidFill>
               </a:defRPr>
-            </a:lvl7pPr>
-            <a:lvl8pPr marL="3200400" indent="0">
-              <a:buNone/>
-              <a:defRPr sz="1600">
+            </a:lvl8pPr>
+            <a:lvl9pPr marL="3657600" indent="0">
+              <a:buNone/>
+              <a:defRPr sz="1400">
                 <a:solidFill>
                   <a:schemeClr val="tx1">
                     <a:tint val="75000"/>
                   </a:schemeClr>
                 </a:solidFill>
               </a:defRPr>
-            </a:lvl8pPr>
-            <a:lvl9pPr marL="3657600" indent="0">
-              <a:buNone/>
-              <a:defRPr sz="1600">
-                <a:solidFill>
-                  <a:schemeClr val="tx1">
-                    <a:tint val="75000"/>
-                  </a:schemeClr>
-                </a:solidFill>
-              </a:defRPr>
             </a:lvl9pPr>
           </a:lstStyle>
           <a:p>
@@ -1130,13 +3588,7 @@
       </p:sp>
       <p:sp>
         <p:nvSpPr>
-          <p:cNvPr id="4" name="Date Placeholder 3">
-            <a:extLst>
-              <a:ext uri="{FF2B5EF4-FFF2-40B4-BE49-F238E27FC236}">
-                <a16:creationId xmlns:a16="http://schemas.microsoft.com/office/drawing/2014/main" id="{33E4CFBB-6AD7-92BB-A0ED-C5A10EE4C615}"/>
-              </a:ext>
-            </a:extLst>
-          </p:cNvPr>
+          <p:cNvPr id="4" name="Date Placeholder 3"/>
           <p:cNvSpPr>
             <a:spLocks noGrp="1"/>
           </p:cNvSpPr>
@@ -1152,7 +3604,7 @@
             <a:fld id="{B61BEF0D-F0BB-DE4B-95CE-6DB70DBA9567}" type="datetimeFigureOut">
               <a:rPr lang="en-US" smtClean="0"/>
               <a:pPr/>
-              <a:t>3/14/2024</a:t>
+              <a:t>3/16/2024</a:t>
             </a:fld>
             <a:endParaRPr lang="en-US" dirty="0"/>
           </a:p>
@@ -1160,13 +3612,7 @@
       </p:sp>
       <p:sp>
         <p:nvSpPr>
-          <p:cNvPr id="5" name="Footer Placeholder 4">
-            <a:extLst>
-              <a:ext uri="{FF2B5EF4-FFF2-40B4-BE49-F238E27FC236}">
-                <a16:creationId xmlns:a16="http://schemas.microsoft.com/office/drawing/2014/main" id="{7BEBBC33-C111-EBE2-ECB4-E9817BFADE4D}"/>
-              </a:ext>
-            </a:extLst>
-          </p:cNvPr>
+          <p:cNvPr id="5" name="Footer Placeholder 4"/>
           <p:cNvSpPr>
             <a:spLocks noGrp="1"/>
           </p:cNvSpPr>
@@ -1185,13 +3631,7 @@
       </p:sp>
       <p:sp>
         <p:nvSpPr>
-          <p:cNvPr id="6" name="Slide Number Placeholder 5">
-            <a:extLst>
-              <a:ext uri="{FF2B5EF4-FFF2-40B4-BE49-F238E27FC236}">
-                <a16:creationId xmlns:a16="http://schemas.microsoft.com/office/drawing/2014/main" id="{5BEAC78C-709F-2BD3-F6DF-184BFDCEEA1E}"/>
-              </a:ext>
-            </a:extLst>
-          </p:cNvPr>
+          <p:cNvPr id="6" name="Slide Number Placeholder 5"/>
           <p:cNvSpPr>
             <a:spLocks noGrp="1"/>
           </p:cNvSpPr>
@@ -1216,7 +3656,7 @@
     </p:spTree>
     <p:extLst>
       <p:ext uri="{BB962C8B-B14F-4D97-AF65-F5344CB8AC3E}">
-        <p14:creationId xmlns:p14="http://schemas.microsoft.com/office/powerpoint/2010/main" val="606911056"/>
+        <p14:creationId xmlns:p14="http://schemas.microsoft.com/office/powerpoint/2010/main" val="2962127812"/>
       </p:ext>
     </p:extLst>
   </p:cSld>
@@ -1243,15 +3683,39 @@
           <a:chExt cx="0" cy="0"/>
         </a:xfrm>
       </p:grpSpPr>
-      <p:sp>
-        <p:nvSpPr>
-          <p:cNvPr id="2" name="Title 1">
+      <p:pic>
+        <p:nvPicPr>
+          <p:cNvPr id="8" name="Picture 7" descr="Celestia-R1---OverlayContentHD.png"/>
+          <p:cNvPicPr>
+            <a:picLocks noChangeAspect="1"/>
+          </p:cNvPicPr>
+          <p:nvPr/>
+        </p:nvPicPr>
+        <p:blipFill>
+          <a:blip r:embed="rId2">
             <a:extLst>
-              <a:ext uri="{FF2B5EF4-FFF2-40B4-BE49-F238E27FC236}">
-                <a16:creationId xmlns:a16="http://schemas.microsoft.com/office/drawing/2014/main" id="{1838E5B9-F5DB-D78B-1DA1-4727A9C3874C}"/>
+              <a:ext uri="{28A0092B-C50C-407E-A947-70E740481C1C}">
+                <a14:useLocalDpi xmlns:a14="http://schemas.microsoft.com/office/drawing/2010/main" val="0"/>
               </a:ext>
             </a:extLst>
-          </p:cNvPr>
+          </a:blip>
+          <a:stretch>
+            <a:fillRect/>
+          </a:stretch>
+        </p:blipFill>
+        <p:spPr>
+          <a:xfrm>
+            <a:off x="0" y="0"/>
+            <a:ext cx="12188825" cy="6856214"/>
+          </a:xfrm>
+          <a:prstGeom prst="rect">
+            <a:avLst/>
+          </a:prstGeom>
+        </p:spPr>
+      </p:pic>
+      <p:sp>
+        <p:nvSpPr>
+          <p:cNvPr id="2" name="Title 1"/>
           <p:cNvSpPr>
             <a:spLocks noGrp="1"/>
           </p:cNvSpPr>
@@ -1268,18 +3732,13 @@
               <a:rPr lang="en-US"/>
               <a:t>Click to edit Master title style</a:t>
             </a:r>
-          </a:p>
-        </p:txBody>
-      </p:sp>
-      <p:sp>
-        <p:nvSpPr>
-          <p:cNvPr id="3" name="Content Placeholder 2">
-            <a:extLst>
-              <a:ext uri="{FF2B5EF4-FFF2-40B4-BE49-F238E27FC236}">
-                <a16:creationId xmlns:a16="http://schemas.microsoft.com/office/drawing/2014/main" id="{6D7D50B2-94FC-6DDE-7BA6-9623F60C4984}"/>
-              </a:ext>
-            </a:extLst>
-          </p:cNvPr>
+            <a:endParaRPr lang="en-US" dirty="0"/>
+          </a:p>
+        </p:txBody>
+      </p:sp>
+      <p:sp>
+        <p:nvSpPr>
+          <p:cNvPr id="3" name="Content Placeholder 2"/>
           <p:cNvSpPr>
             <a:spLocks noGrp="1"/>
           </p:cNvSpPr>
@@ -1289,12 +3748,14 @@
         </p:nvSpPr>
         <p:spPr>
           <a:xfrm>
-            <a:off x="838200" y="1825625"/>
-            <a:ext cx="5181600" cy="4351338"/>
-          </a:xfrm>
-        </p:spPr>
-        <p:txBody>
-          <a:bodyPr/>
+            <a:off x="685802" y="2142067"/>
+            <a:ext cx="4995334" cy="3649134"/>
+          </a:xfrm>
+        </p:spPr>
+        <p:txBody>
+          <a:bodyPr>
+            <a:normAutofit/>
+          </a:bodyPr>
           <a:lstStyle/>
           <a:p>
             <a:pPr lvl="0"/>
@@ -1330,18 +3791,13 @@
               <a:rPr lang="en-US"/>
               <a:t>Fifth level</a:t>
             </a:r>
-          </a:p>
-        </p:txBody>
-      </p:sp>
-      <p:sp>
-        <p:nvSpPr>
-          <p:cNvPr id="4" name="Content Placeholder 3">
-            <a:extLst>
-              <a:ext uri="{FF2B5EF4-FFF2-40B4-BE49-F238E27FC236}">
-                <a16:creationId xmlns:a16="http://schemas.microsoft.com/office/drawing/2014/main" id="{306C7BFF-B88C-EE92-E47B-73AECB088C6E}"/>
-              </a:ext>
-            </a:extLst>
-          </p:cNvPr>
+            <a:endParaRPr lang="en-US" dirty="0"/>
+          </a:p>
+        </p:txBody>
+      </p:sp>
+      <p:sp>
+        <p:nvSpPr>
+          <p:cNvPr id="4" name="Content Placeholder 3"/>
           <p:cNvSpPr>
             <a:spLocks noGrp="1"/>
           </p:cNvSpPr>
@@ -1351,12 +3807,14 @@
         </p:nvSpPr>
         <p:spPr>
           <a:xfrm>
-            <a:off x="6172200" y="1825625"/>
-            <a:ext cx="5181600" cy="4351338"/>
-          </a:xfrm>
-        </p:spPr>
-        <p:txBody>
-          <a:bodyPr/>
+            <a:off x="5821895" y="2142067"/>
+            <a:ext cx="4995332" cy="3649133"/>
+          </a:xfrm>
+        </p:spPr>
+        <p:txBody>
+          <a:bodyPr>
+            <a:normAutofit/>
+          </a:bodyPr>
           <a:lstStyle/>
           <a:p>
             <a:pPr lvl="0"/>
@@ -1392,18 +3850,13 @@
               <a:rPr lang="en-US"/>
               <a:t>Fifth level</a:t>
             </a:r>
-          </a:p>
-        </p:txBody>
-      </p:sp>
-      <p:sp>
-        <p:nvSpPr>
-          <p:cNvPr id="5" name="Date Placeholder 4">
-            <a:extLst>
-              <a:ext uri="{FF2B5EF4-FFF2-40B4-BE49-F238E27FC236}">
-                <a16:creationId xmlns:a16="http://schemas.microsoft.com/office/drawing/2014/main" id="{92067E17-B007-E7E4-9372-3BFE41C485C5}"/>
-              </a:ext>
-            </a:extLst>
-          </p:cNvPr>
+            <a:endParaRPr lang="en-US" dirty="0"/>
+          </a:p>
+        </p:txBody>
+      </p:sp>
+      <p:sp>
+        <p:nvSpPr>
+          <p:cNvPr id="5" name="Date Placeholder 4"/>
           <p:cNvSpPr>
             <a:spLocks noGrp="1"/>
           </p:cNvSpPr>
@@ -1419,7 +3872,7 @@
             <a:fld id="{B61BEF0D-F0BB-DE4B-95CE-6DB70DBA9567}" type="datetimeFigureOut">
               <a:rPr lang="en-US" smtClean="0"/>
               <a:pPr/>
-              <a:t>3/14/2024</a:t>
+              <a:t>3/16/2024</a:t>
             </a:fld>
             <a:endParaRPr lang="en-US" dirty="0"/>
           </a:p>
@@ -1427,13 +3880,7 @@
       </p:sp>
       <p:sp>
         <p:nvSpPr>
-          <p:cNvPr id="6" name="Footer Placeholder 5">
-            <a:extLst>
-              <a:ext uri="{FF2B5EF4-FFF2-40B4-BE49-F238E27FC236}">
-                <a16:creationId xmlns:a16="http://schemas.microsoft.com/office/drawing/2014/main" id="{93F975DE-4223-48CC-6E8C-11AD6A7660C4}"/>
-              </a:ext>
-            </a:extLst>
-          </p:cNvPr>
+          <p:cNvPr id="6" name="Footer Placeholder 5"/>
           <p:cNvSpPr>
             <a:spLocks noGrp="1"/>
           </p:cNvSpPr>
@@ -1452,13 +3899,7 @@
       </p:sp>
       <p:sp>
         <p:nvSpPr>
-          <p:cNvPr id="7" name="Slide Number Placeholder 6">
-            <a:extLst>
-              <a:ext uri="{FF2B5EF4-FFF2-40B4-BE49-F238E27FC236}">
-                <a16:creationId xmlns:a16="http://schemas.microsoft.com/office/drawing/2014/main" id="{D9556D5E-59E8-EB56-9D3F-D7D5EAA5AB6B}"/>
-              </a:ext>
-            </a:extLst>
-          </p:cNvPr>
+          <p:cNvPr id="7" name="Slide Number Placeholder 6"/>
           <p:cNvSpPr>
             <a:spLocks noGrp="1"/>
           </p:cNvSpPr>
@@ -1483,7 +3924,7 @@
     </p:spTree>
     <p:extLst>
       <p:ext uri="{BB962C8B-B14F-4D97-AF65-F5344CB8AC3E}">
-        <p14:creationId xmlns:p14="http://schemas.microsoft.com/office/powerpoint/2010/main" val="4145052262"/>
+        <p14:creationId xmlns:p14="http://schemas.microsoft.com/office/powerpoint/2010/main" val="691889620"/>
       </p:ext>
     </p:extLst>
   </p:cSld>
@@ -1512,13 +3953,7 @@
       </p:grpSpPr>
       <p:sp>
         <p:nvSpPr>
-          <p:cNvPr id="2" name="Title 1">
-            <a:extLst>
-              <a:ext uri="{FF2B5EF4-FFF2-40B4-BE49-F238E27FC236}">
-                <a16:creationId xmlns:a16="http://schemas.microsoft.com/office/drawing/2014/main" id="{965FB936-D29F-D612-42F8-277C4991CF7D}"/>
-              </a:ext>
-            </a:extLst>
-          </p:cNvPr>
+          <p:cNvPr id="2" name="Title 1"/>
           <p:cNvSpPr>
             <a:spLocks noGrp="1"/>
           </p:cNvSpPr>
@@ -1526,32 +3961,26 @@
             <p:ph type="title"/>
           </p:nvPr>
         </p:nvSpPr>
-        <p:spPr>
-          <a:xfrm>
-            <a:off x="839788" y="365125"/>
-            <a:ext cx="10515600" cy="1325563"/>
-          </a:xfrm>
-        </p:spPr>
+        <p:spPr/>
         <p:txBody>
           <a:bodyPr/>
-          <a:lstStyle/>
+          <a:lstStyle>
+            <a:lvl1pPr>
+              <a:defRPr/>
+            </a:lvl1pPr>
+          </a:lstStyle>
           <a:p>
             <a:r>
               <a:rPr lang="en-US"/>
               <a:t>Click to edit Master title style</a:t>
             </a:r>
-          </a:p>
-        </p:txBody>
-      </p:sp>
-      <p:sp>
-        <p:nvSpPr>
-          <p:cNvPr id="3" name="Text Placeholder 2">
-            <a:extLst>
-              <a:ext uri="{FF2B5EF4-FFF2-40B4-BE49-F238E27FC236}">
-                <a16:creationId xmlns:a16="http://schemas.microsoft.com/office/drawing/2014/main" id="{745D65B1-9A67-B1F2-DE63-939749C2F49B}"/>
-              </a:ext>
-            </a:extLst>
-          </p:cNvPr>
+            <a:endParaRPr lang="en-US" dirty="0"/>
+          </a:p>
+        </p:txBody>
+      </p:sp>
+      <p:sp>
+        <p:nvSpPr>
+          <p:cNvPr id="3" name="Text Placeholder 2"/>
           <p:cNvSpPr>
             <a:spLocks noGrp="1"/>
           </p:cNvSpPr>
@@ -1561,16 +3990,18 @@
         </p:nvSpPr>
         <p:spPr>
           <a:xfrm>
-            <a:off x="839788" y="1681163"/>
-            <a:ext cx="5157787" cy="823912"/>
-          </a:xfrm>
-        </p:spPr>
-        <p:txBody>
-          <a:bodyPr anchor="b"/>
+            <a:off x="973670" y="2218267"/>
+            <a:ext cx="4709054" cy="576262"/>
+          </a:xfrm>
+        </p:spPr>
+        <p:txBody>
+          <a:bodyPr anchor="b">
+            <a:noAutofit/>
+          </a:bodyPr>
           <a:lstStyle>
             <a:lvl1pPr marL="0" indent="0">
               <a:buNone/>
-              <a:defRPr sz="2400" b="1"/>
+              <a:defRPr sz="2800" b="0"/>
             </a:lvl1pPr>
             <a:lvl2pPr marL="457200" indent="0">
               <a:buNone/>
@@ -1616,13 +4047,7 @@
       </p:sp>
       <p:sp>
         <p:nvSpPr>
-          <p:cNvPr id="4" name="Content Placeholder 3">
-            <a:extLst>
-              <a:ext uri="{FF2B5EF4-FFF2-40B4-BE49-F238E27FC236}">
-                <a16:creationId xmlns:a16="http://schemas.microsoft.com/office/drawing/2014/main" id="{FD7ED3F3-932B-5443-CF90-CA62E81E460B}"/>
-              </a:ext>
-            </a:extLst>
-          </p:cNvPr>
+          <p:cNvPr id="4" name="Content Placeholder 3"/>
           <p:cNvSpPr>
             <a:spLocks noGrp="1"/>
           </p:cNvSpPr>
@@ -1632,12 +4057,14 @@
         </p:nvSpPr>
         <p:spPr>
           <a:xfrm>
-            <a:off x="839788" y="2505075"/>
-            <a:ext cx="5157787" cy="3684588"/>
-          </a:xfrm>
-        </p:spPr>
-        <p:txBody>
-          <a:bodyPr/>
+            <a:off x="685801" y="2870201"/>
+            <a:ext cx="4996923" cy="2920998"/>
+          </a:xfrm>
+        </p:spPr>
+        <p:txBody>
+          <a:bodyPr anchor="t">
+            <a:normAutofit/>
+          </a:bodyPr>
           <a:lstStyle/>
           <a:p>
             <a:pPr lvl="0"/>
@@ -1673,18 +4100,13 @@
               <a:rPr lang="en-US"/>
               <a:t>Fifth level</a:t>
             </a:r>
-          </a:p>
-        </p:txBody>
-      </p:sp>
-      <p:sp>
-        <p:nvSpPr>
-          <p:cNvPr id="5" name="Text Placeholder 4">
-            <a:extLst>
-              <a:ext uri="{FF2B5EF4-FFF2-40B4-BE49-F238E27FC236}">
-                <a16:creationId xmlns:a16="http://schemas.microsoft.com/office/drawing/2014/main" id="{99DD0641-51A3-6214-DBA0-F1F5F79C814F}"/>
-              </a:ext>
-            </a:extLst>
-          </p:cNvPr>
+            <a:endParaRPr lang="en-US" dirty="0"/>
+          </a:p>
+        </p:txBody>
+      </p:sp>
+      <p:sp>
+        <p:nvSpPr>
+          <p:cNvPr id="5" name="Text Placeholder 4"/>
           <p:cNvSpPr>
             <a:spLocks noGrp="1"/>
           </p:cNvSpPr>
@@ -1694,16 +4116,18 @@
         </p:nvSpPr>
         <p:spPr>
           <a:xfrm>
-            <a:off x="6172200" y="1681163"/>
-            <a:ext cx="5183188" cy="823912"/>
-          </a:xfrm>
-        </p:spPr>
-        <p:txBody>
-          <a:bodyPr anchor="b"/>
+            <a:off x="6096003" y="2226734"/>
+            <a:ext cx="4722813" cy="576262"/>
+          </a:xfrm>
+        </p:spPr>
+        <p:txBody>
+          <a:bodyPr anchor="b">
+            <a:noAutofit/>
+          </a:bodyPr>
           <a:lstStyle>
             <a:lvl1pPr marL="0" indent="0">
               <a:buNone/>
-              <a:defRPr sz="2400" b="1"/>
+              <a:defRPr sz="2800" b="0"/>
             </a:lvl1pPr>
             <a:lvl2pPr marL="457200" indent="0">
               <a:buNone/>
@@ -1749,13 +4173,7 @@
       </p:sp>
       <p:sp>
         <p:nvSpPr>
-          <p:cNvPr id="6" name="Content Placeholder 5">
-            <a:extLst>
-              <a:ext uri="{FF2B5EF4-FFF2-40B4-BE49-F238E27FC236}">
-                <a16:creationId xmlns:a16="http://schemas.microsoft.com/office/drawing/2014/main" id="{1E6FE9A8-0F71-D65E-A777-CA61B8E2CFBD}"/>
-              </a:ext>
-            </a:extLst>
-          </p:cNvPr>
+          <p:cNvPr id="6" name="Content Placeholder 5"/>
           <p:cNvSpPr>
             <a:spLocks noGrp="1"/>
           </p:cNvSpPr>
@@ -1765,12 +4183,14 @@
         </p:nvSpPr>
         <p:spPr>
           <a:xfrm>
-            <a:off x="6172200" y="2505075"/>
-            <a:ext cx="5183188" cy="3684588"/>
-          </a:xfrm>
-        </p:spPr>
-        <p:txBody>
-          <a:bodyPr/>
+            <a:off x="5823483" y="2870201"/>
+            <a:ext cx="4995334" cy="2920998"/>
+          </a:xfrm>
+        </p:spPr>
+        <p:txBody>
+          <a:bodyPr anchor="t">
+            <a:normAutofit/>
+          </a:bodyPr>
           <a:lstStyle/>
           <a:p>
             <a:pPr lvl="0"/>
@@ -1806,18 +4226,13 @@
               <a:rPr lang="en-US"/>
               <a:t>Fifth level</a:t>
             </a:r>
-          </a:p>
-        </p:txBody>
-      </p:sp>
-      <p:sp>
-        <p:nvSpPr>
-          <p:cNvPr id="7" name="Date Placeholder 6">
-            <a:extLst>
-              <a:ext uri="{FF2B5EF4-FFF2-40B4-BE49-F238E27FC236}">
-                <a16:creationId xmlns:a16="http://schemas.microsoft.com/office/drawing/2014/main" id="{26A57C0B-AF2A-166E-C6ED-E4DFD73A1D85}"/>
-              </a:ext>
-            </a:extLst>
-          </p:cNvPr>
+            <a:endParaRPr lang="en-US" dirty="0"/>
+          </a:p>
+        </p:txBody>
+      </p:sp>
+      <p:sp>
+        <p:nvSpPr>
+          <p:cNvPr id="7" name="Date Placeholder 6"/>
           <p:cNvSpPr>
             <a:spLocks noGrp="1"/>
           </p:cNvSpPr>
@@ -1833,7 +4248,7 @@
             <a:fld id="{B61BEF0D-F0BB-DE4B-95CE-6DB70DBA9567}" type="datetimeFigureOut">
               <a:rPr lang="en-US" smtClean="0"/>
               <a:pPr/>
-              <a:t>3/14/2024</a:t>
+              <a:t>3/16/2024</a:t>
             </a:fld>
             <a:endParaRPr lang="en-US" dirty="0"/>
           </a:p>
@@ -1841,13 +4256,7 @@
       </p:sp>
       <p:sp>
         <p:nvSpPr>
-          <p:cNvPr id="8" name="Footer Placeholder 7">
-            <a:extLst>
-              <a:ext uri="{FF2B5EF4-FFF2-40B4-BE49-F238E27FC236}">
-                <a16:creationId xmlns:a16="http://schemas.microsoft.com/office/drawing/2014/main" id="{E0B95125-8C6C-6D9C-006C-1B9532994F57}"/>
-              </a:ext>
-            </a:extLst>
-          </p:cNvPr>
+          <p:cNvPr id="8" name="Footer Placeholder 7"/>
           <p:cNvSpPr>
             <a:spLocks noGrp="1"/>
           </p:cNvSpPr>
@@ -1866,13 +4275,7 @@
       </p:sp>
       <p:sp>
         <p:nvSpPr>
-          <p:cNvPr id="9" name="Slide Number Placeholder 8">
-            <a:extLst>
-              <a:ext uri="{FF2B5EF4-FFF2-40B4-BE49-F238E27FC236}">
-                <a16:creationId xmlns:a16="http://schemas.microsoft.com/office/drawing/2014/main" id="{630779DE-C321-A9C6-1895-8058F3BB1B49}"/>
-              </a:ext>
-            </a:extLst>
-          </p:cNvPr>
+          <p:cNvPr id="9" name="Slide Number Placeholder 8"/>
           <p:cNvSpPr>
             <a:spLocks noGrp="1"/>
           </p:cNvSpPr>
@@ -1897,7 +4300,7 @@
     </p:spTree>
     <p:extLst>
       <p:ext uri="{BB962C8B-B14F-4D97-AF65-F5344CB8AC3E}">
-        <p14:creationId xmlns:p14="http://schemas.microsoft.com/office/powerpoint/2010/main" val="3852565059"/>
+        <p14:creationId xmlns:p14="http://schemas.microsoft.com/office/powerpoint/2010/main" val="1128821677"/>
       </p:ext>
     </p:extLst>
   </p:cSld>
@@ -1924,15 +4327,39 @@
           <a:chExt cx="0" cy="0"/>
         </a:xfrm>
       </p:grpSpPr>
-      <p:sp>
-        <p:nvSpPr>
-          <p:cNvPr id="2" name="Title 1">
+      <p:pic>
+        <p:nvPicPr>
+          <p:cNvPr id="6" name="Picture 5" descr="Celestia-R1---OverlayContentHD.png"/>
+          <p:cNvPicPr>
+            <a:picLocks noChangeAspect="1"/>
+          </p:cNvPicPr>
+          <p:nvPr/>
+        </p:nvPicPr>
+        <p:blipFill>
+          <a:blip r:embed="rId2">
             <a:extLst>
-              <a:ext uri="{FF2B5EF4-FFF2-40B4-BE49-F238E27FC236}">
-                <a16:creationId xmlns:a16="http://schemas.microsoft.com/office/drawing/2014/main" id="{C019852B-1454-7876-09CE-B8CB432FD80F}"/>
+              <a:ext uri="{28A0092B-C50C-407E-A947-70E740481C1C}">
+                <a14:useLocalDpi xmlns:a14="http://schemas.microsoft.com/office/drawing/2010/main" val="0"/>
               </a:ext>
             </a:extLst>
-          </p:cNvPr>
+          </a:blip>
+          <a:stretch>
+            <a:fillRect/>
+          </a:stretch>
+        </p:blipFill>
+        <p:spPr>
+          <a:xfrm>
+            <a:off x="0" y="0"/>
+            <a:ext cx="12188825" cy="6856214"/>
+          </a:xfrm>
+          <a:prstGeom prst="rect">
+            <a:avLst/>
+          </a:prstGeom>
+        </p:spPr>
+      </p:pic>
+      <p:sp>
+        <p:nvSpPr>
+          <p:cNvPr id="2" name="Title 1"/>
           <p:cNvSpPr>
             <a:spLocks noGrp="1"/>
           </p:cNvSpPr>
@@ -1949,18 +4376,13 @@
               <a:rPr lang="en-US"/>
               <a:t>Click to edit Master title style</a:t>
             </a:r>
-          </a:p>
-        </p:txBody>
-      </p:sp>
-      <p:sp>
-        <p:nvSpPr>
-          <p:cNvPr id="3" name="Date Placeholder 2">
-            <a:extLst>
-              <a:ext uri="{FF2B5EF4-FFF2-40B4-BE49-F238E27FC236}">
-                <a16:creationId xmlns:a16="http://schemas.microsoft.com/office/drawing/2014/main" id="{16876672-3E54-EDAD-A059-999D01B252DE}"/>
-              </a:ext>
-            </a:extLst>
-          </p:cNvPr>
+            <a:endParaRPr lang="en-US" dirty="0"/>
+          </a:p>
+        </p:txBody>
+      </p:sp>
+      <p:sp>
+        <p:nvSpPr>
+          <p:cNvPr id="3" name="Date Placeholder 2"/>
           <p:cNvSpPr>
             <a:spLocks noGrp="1"/>
           </p:cNvSpPr>
@@ -1976,7 +4398,7 @@
             <a:fld id="{B61BEF0D-F0BB-DE4B-95CE-6DB70DBA9567}" type="datetimeFigureOut">
               <a:rPr lang="en-US" smtClean="0"/>
               <a:pPr/>
-              <a:t>3/14/2024</a:t>
+              <a:t>3/16/2024</a:t>
             </a:fld>
             <a:endParaRPr lang="en-US" dirty="0"/>
           </a:p>
@@ -1984,13 +4406,7 @@
       </p:sp>
       <p:sp>
         <p:nvSpPr>
-          <p:cNvPr id="4" name="Footer Placeholder 3">
-            <a:extLst>
-              <a:ext uri="{FF2B5EF4-FFF2-40B4-BE49-F238E27FC236}">
-                <a16:creationId xmlns:a16="http://schemas.microsoft.com/office/drawing/2014/main" id="{48F1D1B4-0401-F7F9-349C-242369A04625}"/>
-              </a:ext>
-            </a:extLst>
-          </p:cNvPr>
+          <p:cNvPr id="4" name="Footer Placeholder 3"/>
           <p:cNvSpPr>
             <a:spLocks noGrp="1"/>
           </p:cNvSpPr>
@@ -2009,13 +4425,7 @@
       </p:sp>
       <p:sp>
         <p:nvSpPr>
-          <p:cNvPr id="5" name="Slide Number Placeholder 4">
-            <a:extLst>
-              <a:ext uri="{FF2B5EF4-FFF2-40B4-BE49-F238E27FC236}">
-                <a16:creationId xmlns:a16="http://schemas.microsoft.com/office/drawing/2014/main" id="{A0235BC2-ABFE-A4AB-BAD3-65CE5FD29BEE}"/>
-              </a:ext>
-            </a:extLst>
-          </p:cNvPr>
+          <p:cNvPr id="5" name="Slide Number Placeholder 4"/>
           <p:cNvSpPr>
             <a:spLocks noGrp="1"/>
           </p:cNvSpPr>
@@ -2040,7 +4450,7 @@
     </p:spTree>
     <p:extLst>
       <p:ext uri="{BB962C8B-B14F-4D97-AF65-F5344CB8AC3E}">
-        <p14:creationId xmlns:p14="http://schemas.microsoft.com/office/powerpoint/2010/main" val="3809647065"/>
+        <p14:creationId xmlns:p14="http://schemas.microsoft.com/office/powerpoint/2010/main" val="766422291"/>
       </p:ext>
     </p:extLst>
   </p:cSld>
@@ -2067,15 +4477,39 @@
           <a:chExt cx="0" cy="0"/>
         </a:xfrm>
       </p:grpSpPr>
-      <p:sp>
-        <p:nvSpPr>
-          <p:cNvPr id="2" name="Date Placeholder 1">
+      <p:pic>
+        <p:nvPicPr>
+          <p:cNvPr id="5" name="Picture 4" descr="Celestia-R1---OverlayContentHD.png"/>
+          <p:cNvPicPr>
+            <a:picLocks noChangeAspect="1"/>
+          </p:cNvPicPr>
+          <p:nvPr/>
+        </p:nvPicPr>
+        <p:blipFill>
+          <a:blip r:embed="rId2">
             <a:extLst>
-              <a:ext uri="{FF2B5EF4-FFF2-40B4-BE49-F238E27FC236}">
-                <a16:creationId xmlns:a16="http://schemas.microsoft.com/office/drawing/2014/main" id="{4C2E1906-D606-961D-6F3B-BD94A194C393}"/>
+              <a:ext uri="{28A0092B-C50C-407E-A947-70E740481C1C}">
+                <a14:useLocalDpi xmlns:a14="http://schemas.microsoft.com/office/drawing/2010/main" val="0"/>
               </a:ext>
             </a:extLst>
-          </p:cNvPr>
+          </a:blip>
+          <a:stretch>
+            <a:fillRect/>
+          </a:stretch>
+        </p:blipFill>
+        <p:spPr>
+          <a:xfrm>
+            <a:off x="0" y="0"/>
+            <a:ext cx="12188825" cy="6856214"/>
+          </a:xfrm>
+          <a:prstGeom prst="rect">
+            <a:avLst/>
+          </a:prstGeom>
+        </p:spPr>
+      </p:pic>
+      <p:sp>
+        <p:nvSpPr>
+          <p:cNvPr id="2" name="Date Placeholder 1"/>
           <p:cNvSpPr>
             <a:spLocks noGrp="1"/>
           </p:cNvSpPr>
@@ -2091,7 +4525,7 @@
             <a:fld id="{B61BEF0D-F0BB-DE4B-95CE-6DB70DBA9567}" type="datetimeFigureOut">
               <a:rPr lang="en-US" smtClean="0"/>
               <a:pPr/>
-              <a:t>3/14/2024</a:t>
+              <a:t>3/16/2024</a:t>
             </a:fld>
             <a:endParaRPr lang="en-US" dirty="0"/>
           </a:p>
@@ -2099,13 +4533,7 @@
       </p:sp>
       <p:sp>
         <p:nvSpPr>
-          <p:cNvPr id="3" name="Footer Placeholder 2">
-            <a:extLst>
-              <a:ext uri="{FF2B5EF4-FFF2-40B4-BE49-F238E27FC236}">
-                <a16:creationId xmlns:a16="http://schemas.microsoft.com/office/drawing/2014/main" id="{00E56CD5-104F-F64A-8F0D-CB2351B50DDF}"/>
-              </a:ext>
-            </a:extLst>
-          </p:cNvPr>
+          <p:cNvPr id="3" name="Footer Placeholder 2"/>
           <p:cNvSpPr>
             <a:spLocks noGrp="1"/>
           </p:cNvSpPr>
@@ -2124,13 +4552,7 @@
       </p:sp>
       <p:sp>
         <p:nvSpPr>
-          <p:cNvPr id="4" name="Slide Number Placeholder 3">
-            <a:extLst>
-              <a:ext uri="{FF2B5EF4-FFF2-40B4-BE49-F238E27FC236}">
-                <a16:creationId xmlns:a16="http://schemas.microsoft.com/office/drawing/2014/main" id="{A7962954-D788-8786-9116-03542CC2FF75}"/>
-              </a:ext>
-            </a:extLst>
-          </p:cNvPr>
+          <p:cNvPr id="4" name="Slide Number Placeholder 3"/>
           <p:cNvSpPr>
             <a:spLocks noGrp="1"/>
           </p:cNvSpPr>
@@ -2155,7 +4577,7 @@
     </p:spTree>
     <p:extLst>
       <p:ext uri="{BB962C8B-B14F-4D97-AF65-F5344CB8AC3E}">
-        <p14:creationId xmlns:p14="http://schemas.microsoft.com/office/powerpoint/2010/main" val="2233611080"/>
+        <p14:creationId xmlns:p14="http://schemas.microsoft.com/office/powerpoint/2010/main" val="2564285567"/>
       </p:ext>
     </p:extLst>
   </p:cSld>
@@ -2182,15 +4604,39 @@
           <a:chExt cx="0" cy="0"/>
         </a:xfrm>
       </p:grpSpPr>
-      <p:sp>
-        <p:nvSpPr>
-          <p:cNvPr id="2" name="Title 1">
+      <p:pic>
+        <p:nvPicPr>
+          <p:cNvPr id="8" name="Picture 7" descr="Celestia-R1---OverlayContentHD.png"/>
+          <p:cNvPicPr>
+            <a:picLocks noChangeAspect="1"/>
+          </p:cNvPicPr>
+          <p:nvPr/>
+        </p:nvPicPr>
+        <p:blipFill>
+          <a:blip r:embed="rId2">
             <a:extLst>
-              <a:ext uri="{FF2B5EF4-FFF2-40B4-BE49-F238E27FC236}">
-                <a16:creationId xmlns:a16="http://schemas.microsoft.com/office/drawing/2014/main" id="{441DE90D-4DEC-7088-8A9C-80A5BDA9A4BA}"/>
+              <a:ext uri="{28A0092B-C50C-407E-A947-70E740481C1C}">
+                <a14:useLocalDpi xmlns:a14="http://schemas.microsoft.com/office/drawing/2010/main" val="0"/>
               </a:ext>
             </a:extLst>
-          </p:cNvPr>
+          </a:blip>
+          <a:stretch>
+            <a:fillRect/>
+          </a:stretch>
+        </p:blipFill>
+        <p:spPr>
+          <a:xfrm>
+            <a:off x="0" y="0"/>
+            <a:ext cx="12188825" cy="6856214"/>
+          </a:xfrm>
+          <a:prstGeom prst="rect">
+            <a:avLst/>
+          </a:prstGeom>
+        </p:spPr>
+      </p:pic>
+      <p:sp>
+        <p:nvSpPr>
+          <p:cNvPr id="2" name="Title 1"/>
           <p:cNvSpPr>
             <a:spLocks noGrp="1"/>
           </p:cNvSpPr>
@@ -2200,15 +4646,17 @@
         </p:nvSpPr>
         <p:spPr>
           <a:xfrm>
-            <a:off x="839788" y="457200"/>
-            <a:ext cx="3932237" cy="1600200"/>
-          </a:xfrm>
-        </p:spPr>
-        <p:txBody>
-          <a:bodyPr anchor="b"/>
+            <a:off x="685800" y="2074333"/>
+            <a:ext cx="3680885" cy="1371600"/>
+          </a:xfrm>
+        </p:spPr>
+        <p:txBody>
+          <a:bodyPr anchor="b">
+            <a:normAutofit/>
+          </a:bodyPr>
           <a:lstStyle>
-            <a:lvl1pPr>
-              <a:defRPr sz="3200"/>
+            <a:lvl1pPr algn="l">
+              <a:defRPr sz="2400" b="0"/>
             </a:lvl1pPr>
           </a:lstStyle>
           <a:p>
@@ -2216,18 +4664,13 @@
               <a:rPr lang="en-US"/>
               <a:t>Click to edit Master title style</a:t>
             </a:r>
-          </a:p>
-        </p:txBody>
-      </p:sp>
-      <p:sp>
-        <p:nvSpPr>
-          <p:cNvPr id="3" name="Content Placeholder 2">
-            <a:extLst>
-              <a:ext uri="{FF2B5EF4-FFF2-40B4-BE49-F238E27FC236}">
-                <a16:creationId xmlns:a16="http://schemas.microsoft.com/office/drawing/2014/main" id="{BD93CAEE-C8C4-EB41-7202-3C6FC17CF410}"/>
-              </a:ext>
-            </a:extLst>
-          </p:cNvPr>
+            <a:endParaRPr lang="en-US" dirty="0"/>
+          </a:p>
+        </p:txBody>
+      </p:sp>
+      <p:sp>
+        <p:nvSpPr>
+          <p:cNvPr id="3" name="Content Placeholder 2"/>
           <p:cNvSpPr>
             <a:spLocks noGrp="1"/>
           </p:cNvSpPr>
@@ -2237,41 +4680,15 @@
         </p:nvSpPr>
         <p:spPr>
           <a:xfrm>
-            <a:off x="5183188" y="987425"/>
-            <a:ext cx="6172200" cy="4873625"/>
-          </a:xfrm>
-        </p:spPr>
-        <p:txBody>
-          <a:bodyPr/>
-          <a:lstStyle>
-            <a:lvl1pPr>
-              <a:defRPr sz="3200"/>
-            </a:lvl1pPr>
-            <a:lvl2pPr>
-              <a:defRPr sz="2800"/>
-            </a:lvl2pPr>
-            <a:lvl3pPr>
-              <a:defRPr sz="2400"/>
-            </a:lvl3pPr>
-            <a:lvl4pPr>
-              <a:defRPr sz="2000"/>
-            </a:lvl4pPr>
-            <a:lvl5pPr>
-              <a:defRPr sz="2000"/>
-            </a:lvl5pPr>
-            <a:lvl6pPr>
-              <a:defRPr sz="2000"/>
-            </a:lvl6pPr>
-            <a:lvl7pPr>
-              <a:defRPr sz="2000"/>
-            </a:lvl7pPr>
-            <a:lvl8pPr>
-              <a:defRPr sz="2000"/>
-            </a:lvl8pPr>
-            <a:lvl9pPr>
-              <a:defRPr sz="2000"/>
-            </a:lvl9pPr>
-          </a:lstStyle>
+            <a:off x="4648201" y="609601"/>
+            <a:ext cx="6169026" cy="5181600"/>
+          </a:xfrm>
+        </p:spPr>
+        <p:txBody>
+          <a:bodyPr anchor="ctr">
+            <a:normAutofit/>
+          </a:bodyPr>
+          <a:lstStyle/>
           <a:p>
             <a:pPr lvl="0"/>
             <a:r>
@@ -2306,18 +4723,13 @@
               <a:rPr lang="en-US"/>
               <a:t>Fifth level</a:t>
             </a:r>
-          </a:p>
-        </p:txBody>
-      </p:sp>
-      <p:sp>
-        <p:nvSpPr>
-          <p:cNvPr id="4" name="Text Placeholder 3">
-            <a:extLst>
-              <a:ext uri="{FF2B5EF4-FFF2-40B4-BE49-F238E27FC236}">
-                <a16:creationId xmlns:a16="http://schemas.microsoft.com/office/drawing/2014/main" id="{35D540CE-D217-D8FE-2C5A-C43252E72A99}"/>
-              </a:ext>
-            </a:extLst>
-          </p:cNvPr>
+            <a:endParaRPr lang="en-US" dirty="0"/>
+          </a:p>
+        </p:txBody>
+      </p:sp>
+      <p:sp>
+        <p:nvSpPr>
+          <p:cNvPr id="4" name="Text Placeholder 3"/>
           <p:cNvSpPr>
             <a:spLocks noGrp="1"/>
           </p:cNvSpPr>
@@ -2327,12 +4739,14 @@
         </p:nvSpPr>
         <p:spPr>
           <a:xfrm>
-            <a:off x="839788" y="2057400"/>
-            <a:ext cx="3932237" cy="3811588"/>
-          </a:xfrm>
-        </p:spPr>
-        <p:txBody>
-          <a:bodyPr/>
+            <a:off x="685800" y="3445933"/>
+            <a:ext cx="3680885" cy="1828800"/>
+          </a:xfrm>
+        </p:spPr>
+        <p:txBody>
+          <a:bodyPr anchor="t">
+            <a:normAutofit/>
+          </a:bodyPr>
           <a:lstStyle>
             <a:lvl1pPr marL="0" indent="0">
               <a:buNone/>
@@ -2340,35 +4754,35 @@
             </a:lvl1pPr>
             <a:lvl2pPr marL="457200" indent="0">
               <a:buNone/>
-              <a:defRPr sz="1400"/>
+              <a:defRPr sz="1200"/>
             </a:lvl2pPr>
             <a:lvl3pPr marL="914400" indent="0">
               <a:buNone/>
-              <a:defRPr sz="1200"/>
+              <a:defRPr sz="1000"/>
             </a:lvl3pPr>
             <a:lvl4pPr marL="1371600" indent="0">
               <a:buNone/>
-              <a:defRPr sz="1000"/>
+              <a:defRPr sz="900"/>
             </a:lvl4pPr>
             <a:lvl5pPr marL="1828800" indent="0">
               <a:buNone/>
-              <a:defRPr sz="1000"/>
+              <a:defRPr sz="900"/>
             </a:lvl5pPr>
             <a:lvl6pPr marL="2286000" indent="0">
               <a:buNone/>
-              <a:defRPr sz="1000"/>
+              <a:defRPr sz="900"/>
             </a:lvl6pPr>
             <a:lvl7pPr marL="2743200" indent="0">
               <a:buNone/>
-              <a:defRPr sz="1000"/>
+              <a:defRPr sz="900"/>
             </a:lvl7pPr>
             <a:lvl8pPr marL="3200400" indent="0">
               <a:buNone/>
-              <a:defRPr sz="1000"/>
+              <a:defRPr sz="900"/>
             </a:lvl8pPr>
             <a:lvl9pPr marL="3657600" indent="0">
               <a:buNone/>
-              <a:defRPr sz="1000"/>
+              <a:defRPr sz="900"/>
             </a:lvl9pPr>
           </a:lstStyle>
           <a:p>
@@ -2382,13 +4796,7 @@
       </p:sp>
       <p:sp>
         <p:nvSpPr>
-          <p:cNvPr id="5" name="Date Placeholder 4">
-            <a:extLst>
-              <a:ext uri="{FF2B5EF4-FFF2-40B4-BE49-F238E27FC236}">
-                <a16:creationId xmlns:a16="http://schemas.microsoft.com/office/drawing/2014/main" id="{635C431C-8DAE-E2A2-A0A9-74256140717A}"/>
-              </a:ext>
-            </a:extLst>
-          </p:cNvPr>
+          <p:cNvPr id="5" name="Date Placeholder 4"/>
           <p:cNvSpPr>
             <a:spLocks noGrp="1"/>
           </p:cNvSpPr>
@@ -2404,7 +4812,7 @@
             <a:fld id="{B61BEF0D-F0BB-DE4B-95CE-6DB70DBA9567}" type="datetimeFigureOut">
               <a:rPr lang="en-US" smtClean="0"/>
               <a:pPr/>
-              <a:t>3/14/2024</a:t>
+              <a:t>3/16/2024</a:t>
             </a:fld>
             <a:endParaRPr lang="en-US" dirty="0"/>
           </a:p>
@@ -2412,13 +4820,7 @@
       </p:sp>
       <p:sp>
         <p:nvSpPr>
-          <p:cNvPr id="6" name="Footer Placeholder 5">
-            <a:extLst>
-              <a:ext uri="{FF2B5EF4-FFF2-40B4-BE49-F238E27FC236}">
-                <a16:creationId xmlns:a16="http://schemas.microsoft.com/office/drawing/2014/main" id="{D5D15CA5-AE50-332D-7559-08B07FE4F52F}"/>
-              </a:ext>
-            </a:extLst>
-          </p:cNvPr>
+          <p:cNvPr id="6" name="Footer Placeholder 5"/>
           <p:cNvSpPr>
             <a:spLocks noGrp="1"/>
           </p:cNvSpPr>
@@ -2437,13 +4839,7 @@
       </p:sp>
       <p:sp>
         <p:nvSpPr>
-          <p:cNvPr id="7" name="Slide Number Placeholder 6">
-            <a:extLst>
-              <a:ext uri="{FF2B5EF4-FFF2-40B4-BE49-F238E27FC236}">
-                <a16:creationId xmlns:a16="http://schemas.microsoft.com/office/drawing/2014/main" id="{44F67123-111B-D659-0DD9-73FF4DE6E6F1}"/>
-              </a:ext>
-            </a:extLst>
-          </p:cNvPr>
+          <p:cNvPr id="7" name="Slide Number Placeholder 6"/>
           <p:cNvSpPr>
             <a:spLocks noGrp="1"/>
           </p:cNvSpPr>
@@ -2468,7 +4864,7 @@
     </p:spTree>
     <p:extLst>
       <p:ext uri="{BB962C8B-B14F-4D97-AF65-F5344CB8AC3E}">
-        <p14:creationId xmlns:p14="http://schemas.microsoft.com/office/powerpoint/2010/main" val="2592006999"/>
+        <p14:creationId xmlns:p14="http://schemas.microsoft.com/office/powerpoint/2010/main" val="1471210795"/>
       </p:ext>
     </p:extLst>
   </p:cSld>
@@ -2495,15 +4891,39 @@
           <a:chExt cx="0" cy="0"/>
         </a:xfrm>
       </p:grpSpPr>
-      <p:sp>
-        <p:nvSpPr>
-          <p:cNvPr id="2" name="Title 1">
+      <p:pic>
+        <p:nvPicPr>
+          <p:cNvPr id="8" name="Picture 7" descr="Celestia-R1---OverlayContentHD.png"/>
+          <p:cNvPicPr>
+            <a:picLocks noChangeAspect="1"/>
+          </p:cNvPicPr>
+          <p:nvPr/>
+        </p:nvPicPr>
+        <p:blipFill>
+          <a:blip r:embed="rId2">
             <a:extLst>
-              <a:ext uri="{FF2B5EF4-FFF2-40B4-BE49-F238E27FC236}">
-                <a16:creationId xmlns:a16="http://schemas.microsoft.com/office/drawing/2014/main" id="{BC07AAB5-E0CC-37F4-545C-DB8D5BF3F727}"/>
+              <a:ext uri="{28A0092B-C50C-407E-A947-70E740481C1C}">
+                <a14:useLocalDpi xmlns:a14="http://schemas.microsoft.com/office/drawing/2010/main" val="0"/>
               </a:ext>
             </a:extLst>
-          </p:cNvPr>
+          </a:blip>
+          <a:stretch>
+            <a:fillRect/>
+          </a:stretch>
+        </p:blipFill>
+        <p:spPr>
+          <a:xfrm>
+            <a:off x="0" y="0"/>
+            <a:ext cx="12188825" cy="6856214"/>
+          </a:xfrm>
+          <a:prstGeom prst="rect">
+            <a:avLst/>
+          </a:prstGeom>
+        </p:spPr>
+      </p:pic>
+      <p:sp>
+        <p:nvSpPr>
+          <p:cNvPr id="2" name="Title 1"/>
           <p:cNvSpPr>
             <a:spLocks noGrp="1"/>
           </p:cNvSpPr>
@@ -2513,15 +4933,17 @@
         </p:nvSpPr>
         <p:spPr>
           <a:xfrm>
-            <a:off x="839788" y="457200"/>
-            <a:ext cx="3932237" cy="1600200"/>
-          </a:xfrm>
-        </p:spPr>
-        <p:txBody>
-          <a:bodyPr anchor="b"/>
+            <a:off x="685800" y="1600200"/>
+            <a:ext cx="6164653" cy="1371600"/>
+          </a:xfrm>
+        </p:spPr>
+        <p:txBody>
+          <a:bodyPr anchor="b">
+            <a:normAutofit/>
+          </a:bodyPr>
           <a:lstStyle>
-            <a:lvl1pPr>
-              <a:defRPr sz="3200"/>
+            <a:lvl1pPr algn="l">
+              <a:defRPr sz="2800" b="0"/>
             </a:lvl1pPr>
           </a:lstStyle>
           <a:p>
@@ -2529,20 +4951,15 @@
               <a:rPr lang="en-US"/>
               <a:t>Click to edit Master title style</a:t>
             </a:r>
-          </a:p>
-        </p:txBody>
-      </p:sp>
-      <p:sp>
-        <p:nvSpPr>
-          <p:cNvPr id="3" name="Picture Placeholder 2">
-            <a:extLst>
-              <a:ext uri="{FF2B5EF4-FFF2-40B4-BE49-F238E27FC236}">
-                <a16:creationId xmlns:a16="http://schemas.microsoft.com/office/drawing/2014/main" id="{864FAA09-2691-875E-58D8-181D2D631760}"/>
-              </a:ext>
-            </a:extLst>
-          </p:cNvPr>
-          <p:cNvSpPr>
-            <a:spLocks noGrp="1"/>
+            <a:endParaRPr lang="en-US" dirty="0"/>
+          </a:p>
+        </p:txBody>
+      </p:sp>
+      <p:sp>
+        <p:nvSpPr>
+          <p:cNvPr id="14" name="Picture Placeholder 2"/>
+          <p:cNvSpPr>
+            <a:spLocks noGrp="1" noChangeAspect="1"/>
           </p:cNvSpPr>
           <p:nvPr>
             <p:ph type="pic" idx="1"/>
@@ -2550,118 +4967,151 @@
         </p:nvSpPr>
         <p:spPr>
           <a:xfrm>
-            <a:off x="5183188" y="987425"/>
-            <a:ext cx="6172200" cy="4873625"/>
-          </a:xfrm>
-        </p:spPr>
-        <p:txBody>
-          <a:bodyPr/>
+            <a:off x="7536253" y="914400"/>
+            <a:ext cx="3280974" cy="4572000"/>
+          </a:xfrm>
+          <a:prstGeom prst="roundRect">
+            <a:avLst>
+              <a:gd name="adj" fmla="val 4280"/>
+            </a:avLst>
+          </a:prstGeom>
+          <a:ln w="50800" cap="sq" cmpd="dbl">
+            <a:gradFill flip="none" rotWithShape="1">
+              <a:gsLst>
+                <a:gs pos="0">
+                  <a:srgbClr val="FFFFFF"/>
+                </a:gs>
+                <a:gs pos="100000">
+                  <a:schemeClr val="tx1">
+                    <a:alpha val="0"/>
+                  </a:schemeClr>
+                </a:gs>
+              </a:gsLst>
+              <a:path path="circle">
+                <a:fillToRect l="50000" t="50000" r="50000" b="50000"/>
+              </a:path>
+              <a:tileRect/>
+            </a:gradFill>
+            <a:miter lim="800000"/>
+          </a:ln>
+          <a:effectLst>
+            <a:outerShdw blurRad="254000" algn="tl" rotWithShape="0">
+              <a:srgbClr val="000000">
+                <a:alpha val="43000"/>
+              </a:srgbClr>
+            </a:outerShdw>
+          </a:effectLst>
+        </p:spPr>
+        <p:txBody>
+          <a:bodyPr anchor="t">
+            <a:normAutofit/>
+          </a:bodyPr>
           <a:lstStyle>
-            <a:lvl1pPr marL="0" indent="0">
-              <a:buNone/>
-              <a:defRPr sz="3200"/>
-            </a:lvl1pPr>
-            <a:lvl2pPr marL="457200" indent="0">
-              <a:buNone/>
-              <a:defRPr sz="2800"/>
-            </a:lvl2pPr>
-            <a:lvl3pPr marL="914400" indent="0">
-              <a:buNone/>
-              <a:defRPr sz="2400"/>
-            </a:lvl3pPr>
-            <a:lvl4pPr marL="1371600" indent="0">
-              <a:buNone/>
-              <a:defRPr sz="2000"/>
-            </a:lvl4pPr>
-            <a:lvl5pPr marL="1828800" indent="0">
-              <a:buNone/>
-              <a:defRPr sz="2000"/>
-            </a:lvl5pPr>
-            <a:lvl6pPr marL="2286000" indent="0">
-              <a:buNone/>
-              <a:defRPr sz="2000"/>
-            </a:lvl6pPr>
-            <a:lvl7pPr marL="2743200" indent="0">
-              <a:buNone/>
-              <a:defRPr sz="2000"/>
-            </a:lvl7pPr>
-            <a:lvl8pPr marL="3200400" indent="0">
-              <a:buNone/>
-              <a:defRPr sz="2000"/>
-            </a:lvl8pPr>
-            <a:lvl9pPr marL="3657600" indent="0">
-              <a:buNone/>
-              <a:defRPr sz="2000"/>
-            </a:lvl9pPr>
-          </a:lstStyle>
-          <a:p>
-            <a:endParaRPr lang="en-US"/>
-          </a:p>
-        </p:txBody>
-      </p:sp>
-      <p:sp>
-        <p:nvSpPr>
-          <p:cNvPr id="4" name="Text Placeholder 3">
-            <a:extLst>
-              <a:ext uri="{FF2B5EF4-FFF2-40B4-BE49-F238E27FC236}">
-                <a16:creationId xmlns:a16="http://schemas.microsoft.com/office/drawing/2014/main" id="{F9432FC7-B13C-6F23-B9C5-36697F050FC3}"/>
-              </a:ext>
-            </a:extLst>
-          </p:cNvPr>
-          <p:cNvSpPr>
-            <a:spLocks noGrp="1"/>
-          </p:cNvSpPr>
-          <p:nvPr>
-            <p:ph type="body" sz="half" idx="2"/>
-          </p:nvPr>
-        </p:nvSpPr>
-        <p:spPr>
-          <a:xfrm>
-            <a:off x="839788" y="2057400"/>
-            <a:ext cx="3932237" cy="3811588"/>
-          </a:xfrm>
-        </p:spPr>
-        <p:txBody>
-          <a:bodyPr/>
-          <a:lstStyle>
-            <a:lvl1pPr marL="0" indent="0">
+            <a:lvl1pPr marL="0" indent="0" algn="ctr">
               <a:buNone/>
               <a:defRPr sz="1600"/>
             </a:lvl1pPr>
             <a:lvl2pPr marL="457200" indent="0">
               <a:buNone/>
-              <a:defRPr sz="1400"/>
+              <a:defRPr sz="1600"/>
             </a:lvl2pPr>
             <a:lvl3pPr marL="914400" indent="0">
               <a:buNone/>
-              <a:defRPr sz="1200"/>
+              <a:defRPr sz="1600"/>
             </a:lvl3pPr>
             <a:lvl4pPr marL="1371600" indent="0">
               <a:buNone/>
-              <a:defRPr sz="1000"/>
+              <a:defRPr sz="1600"/>
             </a:lvl4pPr>
             <a:lvl5pPr marL="1828800" indent="0">
               <a:buNone/>
-              <a:defRPr sz="1000"/>
+              <a:defRPr sz="1600"/>
             </a:lvl5pPr>
             <a:lvl6pPr marL="2286000" indent="0">
               <a:buNone/>
-              <a:defRPr sz="1000"/>
+              <a:defRPr sz="1600"/>
             </a:lvl6pPr>
             <a:lvl7pPr marL="2743200" indent="0">
               <a:buNone/>
-              <a:defRPr sz="1000"/>
+              <a:defRPr sz="1600"/>
             </a:lvl7pPr>
             <a:lvl8pPr marL="3200400" indent="0">
               <a:buNone/>
-              <a:defRPr sz="1000"/>
+              <a:defRPr sz="1600"/>
             </a:lvl8pPr>
             <a:lvl9pPr marL="3657600" indent="0">
               <a:buNone/>
-              <a:defRPr sz="1000"/>
+              <a:defRPr sz="1600"/>
             </a:lvl9pPr>
           </a:lstStyle>
           <a:p>
+            <a:r>
+              <a:rPr lang="en-US"/>
+              <a:t>Click icon to add picture</a:t>
+            </a:r>
+            <a:endParaRPr lang="en-US" dirty="0"/>
+          </a:p>
+        </p:txBody>
+      </p:sp>
+      <p:sp>
+        <p:nvSpPr>
+          <p:cNvPr id="4" name="Text Placeholder 3"/>
+          <p:cNvSpPr>
+            <a:spLocks noGrp="1"/>
+          </p:cNvSpPr>
+          <p:nvPr>
+            <p:ph type="body" sz="half" idx="2"/>
+          </p:nvPr>
+        </p:nvSpPr>
+        <p:spPr>
+          <a:xfrm>
+            <a:off x="685800" y="2971800"/>
+            <a:ext cx="6164653" cy="1828800"/>
+          </a:xfrm>
+        </p:spPr>
+        <p:txBody>
+          <a:bodyPr anchor="t">
+            <a:normAutofit/>
+          </a:bodyPr>
+          <a:lstStyle>
+            <a:lvl1pPr marL="0" indent="0">
+              <a:buNone/>
+              <a:defRPr sz="1800"/>
+            </a:lvl1pPr>
+            <a:lvl2pPr marL="457200" indent="0">
+              <a:buNone/>
+              <a:defRPr sz="1200"/>
+            </a:lvl2pPr>
+            <a:lvl3pPr marL="914400" indent="0">
+              <a:buNone/>
+              <a:defRPr sz="1000"/>
+            </a:lvl3pPr>
+            <a:lvl4pPr marL="1371600" indent="0">
+              <a:buNone/>
+              <a:defRPr sz="900"/>
+            </a:lvl4pPr>
+            <a:lvl5pPr marL="1828800" indent="0">
+              <a:buNone/>
+              <a:defRPr sz="900"/>
+            </a:lvl5pPr>
+            <a:lvl6pPr marL="2286000" indent="0">
+              <a:buNone/>
+              <a:defRPr sz="900"/>
+            </a:lvl6pPr>
+            <a:lvl7pPr marL="2743200" indent="0">
+              <a:buNone/>
+              <a:defRPr sz="900"/>
+            </a:lvl7pPr>
+            <a:lvl8pPr marL="3200400" indent="0">
+              <a:buNone/>
+              <a:defRPr sz="900"/>
+            </a:lvl8pPr>
+            <a:lvl9pPr marL="3657600" indent="0">
+              <a:buNone/>
+              <a:defRPr sz="900"/>
+            </a:lvl9pPr>
+          </a:lstStyle>
+          <a:p>
             <a:pPr lvl="0"/>
             <a:r>
               <a:rPr lang="en-US"/>
@@ -2672,13 +5122,7 @@
       </p:sp>
       <p:sp>
         <p:nvSpPr>
-          <p:cNvPr id="5" name="Date Placeholder 4">
-            <a:extLst>
-              <a:ext uri="{FF2B5EF4-FFF2-40B4-BE49-F238E27FC236}">
-                <a16:creationId xmlns:a16="http://schemas.microsoft.com/office/drawing/2014/main" id="{2CAA94F1-5D50-5F3C-5ED7-F545F0714F83}"/>
-              </a:ext>
-            </a:extLst>
-          </p:cNvPr>
+          <p:cNvPr id="5" name="Date Placeholder 4"/>
           <p:cNvSpPr>
             <a:spLocks noGrp="1"/>
           </p:cNvSpPr>
@@ -2694,7 +5138,7 @@
             <a:fld id="{B61BEF0D-F0BB-DE4B-95CE-6DB70DBA9567}" type="datetimeFigureOut">
               <a:rPr lang="en-US" smtClean="0"/>
               <a:pPr/>
-              <a:t>3/14/2024</a:t>
+              <a:t>3/16/2024</a:t>
             </a:fld>
             <a:endParaRPr lang="en-US" dirty="0"/>
           </a:p>
@@ -2702,13 +5146,7 @@
       </p:sp>
       <p:sp>
         <p:nvSpPr>
-          <p:cNvPr id="6" name="Footer Placeholder 5">
-            <a:extLst>
-              <a:ext uri="{FF2B5EF4-FFF2-40B4-BE49-F238E27FC236}">
-                <a16:creationId xmlns:a16="http://schemas.microsoft.com/office/drawing/2014/main" id="{ED86E72F-5E09-2774-8CD2-CAA467D176C3}"/>
-              </a:ext>
-            </a:extLst>
-          </p:cNvPr>
+          <p:cNvPr id="6" name="Footer Placeholder 5"/>
           <p:cNvSpPr>
             <a:spLocks noGrp="1"/>
           </p:cNvSpPr>
@@ -2727,13 +5165,7 @@
       </p:sp>
       <p:sp>
         <p:nvSpPr>
-          <p:cNvPr id="7" name="Slide Number Placeholder 6">
-            <a:extLst>
-              <a:ext uri="{FF2B5EF4-FFF2-40B4-BE49-F238E27FC236}">
-                <a16:creationId xmlns:a16="http://schemas.microsoft.com/office/drawing/2014/main" id="{54A4D087-03EC-CF4E-16F9-16EECDF0975F}"/>
-              </a:ext>
-            </a:extLst>
-          </p:cNvPr>
+          <p:cNvPr id="7" name="Slide Number Placeholder 6"/>
           <p:cNvSpPr>
             <a:spLocks noGrp="1"/>
           </p:cNvSpPr>
@@ -2758,7 +5190,7 @@
     </p:spTree>
     <p:extLst>
       <p:ext uri="{BB962C8B-B14F-4D97-AF65-F5344CB8AC3E}">
-        <p14:creationId xmlns:p14="http://schemas.microsoft.com/office/powerpoint/2010/main" val="1699127775"/>
+        <p14:creationId xmlns:p14="http://schemas.microsoft.com/office/powerpoint/2010/main" val="111185515"/>
       </p:ext>
     </p:extLst>
   </p:cSld>
@@ -2772,8 +5204,8 @@
 <p:sldMaster xmlns:a="http://schemas.openxmlformats.org/drawingml/2006/main" xmlns:r="http://schemas.openxmlformats.org/officeDocument/2006/relationships" xmlns:p="http://schemas.openxmlformats.org/presentationml/2006/main">
   <p:cSld>
     <p:bg>
-      <p:bgRef idx="1001">
-        <a:schemeClr val="bg1"/>
+      <p:bgRef idx="1003">
+        <a:schemeClr val="bg2"/>
       </p:bgRef>
     </p:bg>
     <p:spTree>
@@ -2792,13 +5224,7 @@
       </p:grpSpPr>
       <p:sp>
         <p:nvSpPr>
-          <p:cNvPr id="2" name="Title Placeholder 1">
-            <a:extLst>
-              <a:ext uri="{FF2B5EF4-FFF2-40B4-BE49-F238E27FC236}">
-                <a16:creationId xmlns:a16="http://schemas.microsoft.com/office/drawing/2014/main" id="{BB201263-A6B5-835D-8A71-0C6370928CD0}"/>
-              </a:ext>
-            </a:extLst>
-          </p:cNvPr>
+          <p:cNvPr id="2" name="Title Placeholder 1"/>
           <p:cNvSpPr>
             <a:spLocks noGrp="1"/>
           </p:cNvSpPr>
@@ -2808,12 +5234,13 @@
         </p:nvSpPr>
         <p:spPr>
           <a:xfrm>
-            <a:off x="838200" y="365125"/>
-            <a:ext cx="10515600" cy="1325563"/>
+            <a:off x="685801" y="609600"/>
+            <a:ext cx="10131425" cy="1456267"/>
           </a:xfrm>
           <a:prstGeom prst="rect">
             <a:avLst/>
           </a:prstGeom>
+          <a:effectLst/>
         </p:spPr>
         <p:txBody>
           <a:bodyPr vert="horz" lIns="91440" tIns="45720" rIns="91440" bIns="45720" rtlCol="0" anchor="ctr">
@@ -2825,18 +5252,13 @@
               <a:rPr lang="en-US"/>
               <a:t>Click to edit Master title style</a:t>
             </a:r>
-          </a:p>
-        </p:txBody>
-      </p:sp>
-      <p:sp>
-        <p:nvSpPr>
-          <p:cNvPr id="3" name="Text Placeholder 2">
-            <a:extLst>
-              <a:ext uri="{FF2B5EF4-FFF2-40B4-BE49-F238E27FC236}">
-                <a16:creationId xmlns:a16="http://schemas.microsoft.com/office/drawing/2014/main" id="{6119A4AD-CA3F-54D0-8EC9-6B451B7B8096}"/>
-              </a:ext>
-            </a:extLst>
-          </p:cNvPr>
+            <a:endParaRPr lang="en-US" dirty="0"/>
+          </a:p>
+        </p:txBody>
+      </p:sp>
+      <p:sp>
+        <p:nvSpPr>
+          <p:cNvPr id="3" name="Text Placeholder 2"/>
           <p:cNvSpPr>
             <a:spLocks noGrp="1"/>
           </p:cNvSpPr>
@@ -2846,15 +5268,15 @@
         </p:nvSpPr>
         <p:spPr>
           <a:xfrm>
-            <a:off x="838200" y="1825625"/>
-            <a:ext cx="10515600" cy="4351338"/>
+            <a:off x="685801" y="2142067"/>
+            <a:ext cx="10131425" cy="3649133"/>
           </a:xfrm>
           <a:prstGeom prst="rect">
             <a:avLst/>
           </a:prstGeom>
         </p:spPr>
         <p:txBody>
-          <a:bodyPr vert="horz" lIns="91440" tIns="45720" rIns="91440" bIns="45720" rtlCol="0">
+          <a:bodyPr vert="horz" lIns="91440" tIns="45720" rIns="91440" bIns="45720" rtlCol="0" anchor="ctr">
             <a:normAutofit/>
           </a:bodyPr>
           <a:lstStyle/>
@@ -2892,18 +5314,13 @@
               <a:rPr lang="en-US"/>
               <a:t>Fifth level</a:t>
             </a:r>
-          </a:p>
-        </p:txBody>
-      </p:sp>
-      <p:sp>
-        <p:nvSpPr>
-          <p:cNvPr id="4" name="Date Placeholder 3">
-            <a:extLst>
-              <a:ext uri="{FF2B5EF4-FFF2-40B4-BE49-F238E27FC236}">
-                <a16:creationId xmlns:a16="http://schemas.microsoft.com/office/drawing/2014/main" id="{DBEC638A-5492-6EA6-96D8-981A5136E14C}"/>
-              </a:ext>
-            </a:extLst>
-          </p:cNvPr>
+            <a:endParaRPr lang="en-US" dirty="0"/>
+          </a:p>
+        </p:txBody>
+      </p:sp>
+      <p:sp>
+        <p:nvSpPr>
+          <p:cNvPr id="4" name="Date Placeholder 3"/>
           <p:cNvSpPr>
             <a:spLocks noGrp="1"/>
           </p:cNvSpPr>
@@ -2913,8 +5330,8 @@
         </p:nvSpPr>
         <p:spPr>
           <a:xfrm>
-            <a:off x="838200" y="6356350"/>
-            <a:ext cx="2743200" cy="365125"/>
+            <a:off x="8589660" y="5870575"/>
+            <a:ext cx="1600200" cy="377825"/>
           </a:xfrm>
           <a:prstGeom prst="rect">
             <a:avLst/>
@@ -2923,13 +5340,13 @@
         <p:txBody>
           <a:bodyPr vert="horz" lIns="91440" tIns="45720" rIns="91440" bIns="45720" rtlCol="0" anchor="ctr"/>
           <a:lstStyle>
-            <a:lvl1pPr algn="l">
-              <a:defRPr sz="1200">
-                <a:solidFill>
-                  <a:schemeClr val="tx1">
-                    <a:tint val="75000"/>
-                  </a:schemeClr>
-                </a:solidFill>
+            <a:lvl1pPr algn="r">
+              <a:defRPr sz="1000" b="0" i="0">
+                <a:solidFill>
+                  <a:schemeClr val="tx1"/>
+                </a:solidFill>
+                <a:effectLst/>
+                <a:latin typeface="+mn-lt"/>
               </a:defRPr>
             </a:lvl1pPr>
           </a:lstStyle>
@@ -2937,7 +5354,7 @@
             <a:fld id="{B61BEF0D-F0BB-DE4B-95CE-6DB70DBA9567}" type="datetimeFigureOut">
               <a:rPr lang="en-US" smtClean="0"/>
               <a:pPr/>
-              <a:t>3/14/2024</a:t>
+              <a:t>3/16/2024</a:t>
             </a:fld>
             <a:endParaRPr lang="en-US" dirty="0"/>
           </a:p>
@@ -2945,13 +5362,7 @@
       </p:sp>
       <p:sp>
         <p:nvSpPr>
-          <p:cNvPr id="5" name="Footer Placeholder 4">
-            <a:extLst>
-              <a:ext uri="{FF2B5EF4-FFF2-40B4-BE49-F238E27FC236}">
-                <a16:creationId xmlns:a16="http://schemas.microsoft.com/office/drawing/2014/main" id="{3EB4C4B3-27BB-145D-99CC-29AE9F80A37F}"/>
-              </a:ext>
-            </a:extLst>
-          </p:cNvPr>
+          <p:cNvPr id="5" name="Footer Placeholder 4"/>
           <p:cNvSpPr>
             <a:spLocks noGrp="1"/>
           </p:cNvSpPr>
@@ -2961,8 +5372,8 @@
         </p:nvSpPr>
         <p:spPr>
           <a:xfrm>
-            <a:off x="4038600" y="6356350"/>
-            <a:ext cx="4114800" cy="365125"/>
+            <a:off x="685800" y="5870575"/>
+            <a:ext cx="7827659" cy="377825"/>
           </a:xfrm>
           <a:prstGeom prst="rect">
             <a:avLst/>
@@ -2971,13 +5382,13 @@
         <p:txBody>
           <a:bodyPr vert="horz" lIns="91440" tIns="45720" rIns="91440" bIns="45720" rtlCol="0" anchor="ctr"/>
           <a:lstStyle>
-            <a:lvl1pPr algn="ctr">
-              <a:defRPr sz="1200">
-                <a:solidFill>
-                  <a:schemeClr val="tx1">
-                    <a:tint val="75000"/>
-                  </a:schemeClr>
-                </a:solidFill>
+            <a:lvl1pPr algn="l">
+              <a:defRPr sz="1000" b="0" i="0">
+                <a:solidFill>
+                  <a:schemeClr val="tx1"/>
+                </a:solidFill>
+                <a:effectLst/>
+                <a:latin typeface="+mn-lt"/>
               </a:defRPr>
             </a:lvl1pPr>
           </a:lstStyle>
@@ -2988,13 +5399,7 @@
       </p:sp>
       <p:sp>
         <p:nvSpPr>
-          <p:cNvPr id="6" name="Slide Number Placeholder 5">
-            <a:extLst>
-              <a:ext uri="{FF2B5EF4-FFF2-40B4-BE49-F238E27FC236}">
-                <a16:creationId xmlns:a16="http://schemas.microsoft.com/office/drawing/2014/main" id="{1036C5C6-6181-5C2F-5EAC-51A864FA5FDF}"/>
-              </a:ext>
-            </a:extLst>
-          </p:cNvPr>
+          <p:cNvPr id="6" name="Slide Number Placeholder 5"/>
           <p:cNvSpPr>
             <a:spLocks noGrp="1"/>
           </p:cNvSpPr>
@@ -3004,8 +5409,8 @@
         </p:nvSpPr>
         <p:spPr>
           <a:xfrm>
-            <a:off x="8610600" y="6356350"/>
-            <a:ext cx="2743200" cy="365125"/>
+            <a:off x="10266060" y="5870575"/>
+            <a:ext cx="551167" cy="377825"/>
           </a:xfrm>
           <a:prstGeom prst="rect">
             <a:avLst/>
@@ -3015,12 +5420,12 @@
           <a:bodyPr vert="horz" lIns="91440" tIns="45720" rIns="91440" bIns="45720" rtlCol="0" anchor="ctr"/>
           <a:lstStyle>
             <a:lvl1pPr algn="r">
-              <a:defRPr sz="1200">
-                <a:solidFill>
-                  <a:schemeClr val="tx1">
-                    <a:tint val="75000"/>
-                  </a:schemeClr>
-                </a:solidFill>
+              <a:defRPr sz="1000" b="0" i="0">
+                <a:solidFill>
+                  <a:schemeClr val="tx1"/>
+                </a:solidFill>
+                <a:effectLst/>
+                <a:latin typeface="+mn-lt"/>
               </a:defRPr>
             </a:lvl1pPr>
           </a:lstStyle>
@@ -3037,202 +5442,310 @@
     </p:spTree>
     <p:extLst>
       <p:ext uri="{BB962C8B-B14F-4D97-AF65-F5344CB8AC3E}">
-        <p14:creationId xmlns:p14="http://schemas.microsoft.com/office/powerpoint/2010/main" val="3742745983"/>
+        <p14:creationId xmlns:p14="http://schemas.microsoft.com/office/powerpoint/2010/main" val="95456666"/>
       </p:ext>
     </p:extLst>
   </p:cSld>
-  <p:clrMap bg1="lt1" tx1="dk1" bg2="lt2" tx2="dk2" accent1="accent1" accent2="accent2" accent3="accent3" accent4="accent4" accent5="accent5" accent6="accent6" hlink="hlink" folHlink="folHlink"/>
+  <p:clrMap bg1="dk1" tx1="lt1" bg2="dk2" tx2="lt2" accent1="accent1" accent2="accent2" accent3="accent3" accent4="accent4" accent5="accent5" accent6="accent6" hlink="hlink" folHlink="folHlink"/>
   <p:sldLayoutIdLst>
-    <p:sldLayoutId id="2147483906" r:id="rId1"/>
-    <p:sldLayoutId id="2147483907" r:id="rId2"/>
-    <p:sldLayoutId id="2147483908" r:id="rId3"/>
-    <p:sldLayoutId id="2147483909" r:id="rId4"/>
-    <p:sldLayoutId id="2147483910" r:id="rId5"/>
-    <p:sldLayoutId id="2147483911" r:id="rId6"/>
-    <p:sldLayoutId id="2147483912" r:id="rId7"/>
-    <p:sldLayoutId id="2147483913" r:id="rId8"/>
-    <p:sldLayoutId id="2147483914" r:id="rId9"/>
-    <p:sldLayoutId id="2147483915" r:id="rId10"/>
-    <p:sldLayoutId id="2147483916" r:id="rId11"/>
+    <p:sldLayoutId id="2147484685" r:id="rId1"/>
+    <p:sldLayoutId id="2147484686" r:id="rId2"/>
+    <p:sldLayoutId id="2147484687" r:id="rId3"/>
+    <p:sldLayoutId id="2147484688" r:id="rId4"/>
+    <p:sldLayoutId id="2147484689" r:id="rId5"/>
+    <p:sldLayoutId id="2147484690" r:id="rId6"/>
+    <p:sldLayoutId id="2147484691" r:id="rId7"/>
+    <p:sldLayoutId id="2147484692" r:id="rId8"/>
+    <p:sldLayoutId id="2147484693" r:id="rId9"/>
+    <p:sldLayoutId id="2147484694" r:id="rId10"/>
+    <p:sldLayoutId id="2147484695" r:id="rId11"/>
+    <p:sldLayoutId id="2147484696" r:id="rId12"/>
+    <p:sldLayoutId id="2147484697" r:id="rId13"/>
+    <p:sldLayoutId id="2147484698" r:id="rId14"/>
+    <p:sldLayoutId id="2147484699" r:id="rId15"/>
+    <p:sldLayoutId id="2147484700" r:id="rId16"/>
+    <p:sldLayoutId id="2147484701" r:id="rId17"/>
   </p:sldLayoutIdLst>
   <p:txStyles>
     <p:titleStyle>
-      <a:lvl1pPr algn="l" defTabSz="914400" rtl="0" eaLnBrk="1" latinLnBrk="0" hangingPunct="1">
-        <a:lnSpc>
-          <a:spcPct val="90000"/>
-        </a:lnSpc>
+      <a:lvl1pPr algn="l" defTabSz="457200" rtl="0" eaLnBrk="1" latinLnBrk="0" hangingPunct="1">
         <a:spcBef>
           <a:spcPct val="0"/>
         </a:spcBef>
         <a:buNone/>
-        <a:defRPr sz="4400" kern="1200">
+        <a:defRPr sz="3600" kern="1200" cap="all">
+          <a:ln w="3175" cmpd="sng">
+            <a:noFill/>
+          </a:ln>
           <a:solidFill>
             <a:schemeClr val="tx1"/>
           </a:solidFill>
+          <a:effectLst/>
           <a:latin typeface="+mj-lt"/>
           <a:ea typeface="+mj-ea"/>
           <a:cs typeface="+mj-cs"/>
         </a:defRPr>
       </a:lvl1pPr>
+      <a:lvl2pPr eaLnBrk="1" hangingPunct="1">
+        <a:defRPr>
+          <a:solidFill>
+            <a:schemeClr val="tx2"/>
+          </a:solidFill>
+        </a:defRPr>
+      </a:lvl2pPr>
+      <a:lvl3pPr eaLnBrk="1" hangingPunct="1">
+        <a:defRPr>
+          <a:solidFill>
+            <a:schemeClr val="tx2"/>
+          </a:solidFill>
+        </a:defRPr>
+      </a:lvl3pPr>
+      <a:lvl4pPr eaLnBrk="1" hangingPunct="1">
+        <a:defRPr>
+          <a:solidFill>
+            <a:schemeClr val="tx2"/>
+          </a:solidFill>
+        </a:defRPr>
+      </a:lvl4pPr>
+      <a:lvl5pPr eaLnBrk="1" hangingPunct="1">
+        <a:defRPr>
+          <a:solidFill>
+            <a:schemeClr val="tx2"/>
+          </a:solidFill>
+        </a:defRPr>
+      </a:lvl5pPr>
+      <a:lvl6pPr eaLnBrk="1" hangingPunct="1">
+        <a:defRPr>
+          <a:solidFill>
+            <a:schemeClr val="tx2"/>
+          </a:solidFill>
+        </a:defRPr>
+      </a:lvl6pPr>
+      <a:lvl7pPr eaLnBrk="1" hangingPunct="1">
+        <a:defRPr>
+          <a:solidFill>
+            <a:schemeClr val="tx2"/>
+          </a:solidFill>
+        </a:defRPr>
+      </a:lvl7pPr>
+      <a:lvl8pPr eaLnBrk="1" hangingPunct="1">
+        <a:defRPr>
+          <a:solidFill>
+            <a:schemeClr val="tx2"/>
+          </a:solidFill>
+        </a:defRPr>
+      </a:lvl8pPr>
+      <a:lvl9pPr eaLnBrk="1" hangingPunct="1">
+        <a:defRPr>
+          <a:solidFill>
+            <a:schemeClr val="tx2"/>
+          </a:solidFill>
+        </a:defRPr>
+      </a:lvl9pPr>
     </p:titleStyle>
     <p:bodyStyle>
-      <a:lvl1pPr marL="228600" indent="-228600" algn="l" defTabSz="914400" rtl="0" eaLnBrk="1" latinLnBrk="0" hangingPunct="1">
-        <a:lnSpc>
-          <a:spcPct val="90000"/>
-        </a:lnSpc>
+      <a:lvl1pPr marL="285750" indent="-285750" algn="l" defTabSz="457200" rtl="0" eaLnBrk="1" latinLnBrk="0" hangingPunct="1">
         <a:spcBef>
+          <a:spcPts val="0"/>
+        </a:spcBef>
+        <a:spcAft>
           <a:spcPts val="1000"/>
-        </a:spcBef>
-        <a:buFont typeface="Arial" panose="020B0604020202020204" pitchFamily="34" charset="0"/>
+        </a:spcAft>
+        <a:buClr>
+          <a:schemeClr val="tx1"/>
+        </a:buClr>
+        <a:buSzPct val="100000"/>
+        <a:buFont typeface="Arial"/>
         <a:buChar char="•"/>
-        <a:defRPr sz="2800" kern="1200">
+        <a:defRPr sz="1800" kern="1200" cap="none">
           <a:solidFill>
             <a:schemeClr val="tx1"/>
           </a:solidFill>
+          <a:effectLst/>
           <a:latin typeface="+mn-lt"/>
           <a:ea typeface="+mn-ea"/>
           <a:cs typeface="+mn-cs"/>
         </a:defRPr>
       </a:lvl1pPr>
-      <a:lvl2pPr marL="685800" indent="-228600" algn="l" defTabSz="914400" rtl="0" eaLnBrk="1" latinLnBrk="0" hangingPunct="1">
-        <a:lnSpc>
-          <a:spcPct val="90000"/>
-        </a:lnSpc>
+      <a:lvl2pPr marL="742950" indent="-285750" algn="l" defTabSz="457200" rtl="0" eaLnBrk="1" latinLnBrk="0" hangingPunct="1">
         <a:spcBef>
-          <a:spcPts val="500"/>
+          <a:spcPts val="0"/>
         </a:spcBef>
-        <a:buFont typeface="Arial" panose="020B0604020202020204" pitchFamily="34" charset="0"/>
+        <a:spcAft>
+          <a:spcPts val="1000"/>
+        </a:spcAft>
+        <a:buClr>
+          <a:schemeClr val="tx1"/>
+        </a:buClr>
+        <a:buSzPct val="100000"/>
+        <a:buFont typeface="Arial"/>
         <a:buChar char="•"/>
-        <a:defRPr sz="2400" kern="1200">
+        <a:defRPr sz="1600" kern="1200" cap="none">
           <a:solidFill>
             <a:schemeClr val="tx1"/>
           </a:solidFill>
+          <a:effectLst/>
           <a:latin typeface="+mn-lt"/>
           <a:ea typeface="+mn-ea"/>
           <a:cs typeface="+mn-cs"/>
         </a:defRPr>
       </a:lvl2pPr>
-      <a:lvl3pPr marL="1143000" indent="-228600" algn="l" defTabSz="914400" rtl="0" eaLnBrk="1" latinLnBrk="0" hangingPunct="1">
-        <a:lnSpc>
-          <a:spcPct val="90000"/>
-        </a:lnSpc>
+      <a:lvl3pPr marL="1200150" indent="-285750" algn="l" defTabSz="457200" rtl="0" eaLnBrk="1" latinLnBrk="0" hangingPunct="1">
         <a:spcBef>
-          <a:spcPts val="500"/>
+          <a:spcPts val="0"/>
         </a:spcBef>
-        <a:buFont typeface="Arial" panose="020B0604020202020204" pitchFamily="34" charset="0"/>
+        <a:spcAft>
+          <a:spcPts val="1000"/>
+        </a:spcAft>
+        <a:buClr>
+          <a:schemeClr val="tx1"/>
+        </a:buClr>
+        <a:buSzPct val="100000"/>
+        <a:buFont typeface="Arial"/>
         <a:buChar char="•"/>
-        <a:defRPr sz="2000" kern="1200">
+        <a:defRPr sz="1400" kern="1200" cap="none">
           <a:solidFill>
             <a:schemeClr val="tx1"/>
           </a:solidFill>
+          <a:effectLst/>
           <a:latin typeface="+mn-lt"/>
           <a:ea typeface="+mn-ea"/>
           <a:cs typeface="+mn-cs"/>
         </a:defRPr>
       </a:lvl3pPr>
-      <a:lvl4pPr marL="1600200" indent="-228600" algn="l" defTabSz="914400" rtl="0" eaLnBrk="1" latinLnBrk="0" hangingPunct="1">
-        <a:lnSpc>
-          <a:spcPct val="90000"/>
-        </a:lnSpc>
+      <a:lvl4pPr marL="1543050" indent="-171450" algn="l" defTabSz="457200" rtl="0" eaLnBrk="1" latinLnBrk="0" hangingPunct="1">
         <a:spcBef>
-          <a:spcPts val="500"/>
+          <a:spcPts val="0"/>
         </a:spcBef>
-        <a:buFont typeface="Arial" panose="020B0604020202020204" pitchFamily="34" charset="0"/>
+        <a:spcAft>
+          <a:spcPts val="1000"/>
+        </a:spcAft>
+        <a:buClr>
+          <a:schemeClr val="tx1"/>
+        </a:buClr>
+        <a:buSzPct val="100000"/>
+        <a:buFont typeface="Arial"/>
         <a:buChar char="•"/>
-        <a:defRPr sz="1800" kern="1200">
+        <a:defRPr sz="1200" kern="1200" cap="none">
           <a:solidFill>
             <a:schemeClr val="tx1"/>
           </a:solidFill>
+          <a:effectLst/>
           <a:latin typeface="+mn-lt"/>
           <a:ea typeface="+mn-ea"/>
           <a:cs typeface="+mn-cs"/>
         </a:defRPr>
       </a:lvl4pPr>
-      <a:lvl5pPr marL="2057400" indent="-228600" algn="l" defTabSz="914400" rtl="0" eaLnBrk="1" latinLnBrk="0" hangingPunct="1">
-        <a:lnSpc>
-          <a:spcPct val="90000"/>
-        </a:lnSpc>
+      <a:lvl5pPr marL="2000250" indent="-171450" algn="l" defTabSz="457200" rtl="0" eaLnBrk="1" latinLnBrk="0" hangingPunct="1">
         <a:spcBef>
-          <a:spcPts val="500"/>
+          <a:spcPts val="0"/>
         </a:spcBef>
-        <a:buFont typeface="Arial" panose="020B0604020202020204" pitchFamily="34" charset="0"/>
+        <a:spcAft>
+          <a:spcPts val="1000"/>
+        </a:spcAft>
+        <a:buClr>
+          <a:schemeClr val="tx1"/>
+        </a:buClr>
+        <a:buSzPct val="100000"/>
+        <a:buFont typeface="Arial"/>
         <a:buChar char="•"/>
-        <a:defRPr sz="1800" kern="1200">
+        <a:defRPr sz="1200" kern="1200" cap="none">
           <a:solidFill>
             <a:schemeClr val="tx1"/>
           </a:solidFill>
+          <a:effectLst/>
           <a:latin typeface="+mn-lt"/>
           <a:ea typeface="+mn-ea"/>
           <a:cs typeface="+mn-cs"/>
         </a:defRPr>
       </a:lvl5pPr>
-      <a:lvl6pPr marL="2514600" indent="-228600" algn="l" defTabSz="914400" rtl="0" eaLnBrk="1" latinLnBrk="0" hangingPunct="1">
-        <a:lnSpc>
-          <a:spcPct val="90000"/>
-        </a:lnSpc>
+      <a:lvl6pPr marL="2514600" indent="-228600" algn="l" defTabSz="457200" rtl="0" eaLnBrk="1" latinLnBrk="0" hangingPunct="1">
         <a:spcBef>
-          <a:spcPts val="500"/>
+          <a:spcPts val="0"/>
         </a:spcBef>
-        <a:buFont typeface="Arial" panose="020B0604020202020204" pitchFamily="34" charset="0"/>
+        <a:spcAft>
+          <a:spcPts val="1000"/>
+        </a:spcAft>
+        <a:buClr>
+          <a:schemeClr val="tx1"/>
+        </a:buClr>
+        <a:buSzPct val="100000"/>
+        <a:buFont typeface="Arial"/>
         <a:buChar char="•"/>
-        <a:defRPr sz="1800" kern="1200">
+        <a:defRPr sz="1200" kern="1200" cap="none">
           <a:solidFill>
             <a:schemeClr val="tx1"/>
           </a:solidFill>
+          <a:effectLst/>
           <a:latin typeface="+mn-lt"/>
           <a:ea typeface="+mn-ea"/>
           <a:cs typeface="+mn-cs"/>
         </a:defRPr>
       </a:lvl6pPr>
-      <a:lvl7pPr marL="2971800" indent="-228600" algn="l" defTabSz="914400" rtl="0" eaLnBrk="1" latinLnBrk="0" hangingPunct="1">
-        <a:lnSpc>
-          <a:spcPct val="90000"/>
-        </a:lnSpc>
+      <a:lvl7pPr marL="2971800" indent="-228600" algn="l" defTabSz="457200" rtl="0" eaLnBrk="1" latinLnBrk="0" hangingPunct="1">
         <a:spcBef>
-          <a:spcPts val="500"/>
+          <a:spcPts val="0"/>
         </a:spcBef>
-        <a:buFont typeface="Arial" panose="020B0604020202020204" pitchFamily="34" charset="0"/>
+        <a:spcAft>
+          <a:spcPts val="1000"/>
+        </a:spcAft>
+        <a:buClr>
+          <a:schemeClr val="tx1"/>
+        </a:buClr>
+        <a:buSzPct val="100000"/>
+        <a:buFont typeface="Arial"/>
         <a:buChar char="•"/>
-        <a:defRPr sz="1800" kern="1200">
+        <a:defRPr sz="1200" kern="1200" cap="none">
           <a:solidFill>
             <a:schemeClr val="tx1"/>
           </a:solidFill>
+          <a:effectLst/>
           <a:latin typeface="+mn-lt"/>
           <a:ea typeface="+mn-ea"/>
           <a:cs typeface="+mn-cs"/>
         </a:defRPr>
       </a:lvl7pPr>
-      <a:lvl8pPr marL="3429000" indent="-228600" algn="l" defTabSz="914400" rtl="0" eaLnBrk="1" latinLnBrk="0" hangingPunct="1">
-        <a:lnSpc>
-          <a:spcPct val="90000"/>
-        </a:lnSpc>
+      <a:lvl8pPr marL="3429000" indent="-228600" algn="l" defTabSz="457200" rtl="0" eaLnBrk="1" latinLnBrk="0" hangingPunct="1">
         <a:spcBef>
-          <a:spcPts val="500"/>
+          <a:spcPts val="0"/>
         </a:spcBef>
-        <a:buFont typeface="Arial" panose="020B0604020202020204" pitchFamily="34" charset="0"/>
+        <a:spcAft>
+          <a:spcPts val="1000"/>
+        </a:spcAft>
+        <a:buClr>
+          <a:schemeClr val="tx1"/>
+        </a:buClr>
+        <a:buSzPct val="100000"/>
+        <a:buFont typeface="Arial"/>
         <a:buChar char="•"/>
-        <a:defRPr sz="1800" kern="1200">
+        <a:defRPr sz="1200" kern="1200" cap="none">
           <a:solidFill>
             <a:schemeClr val="tx1"/>
           </a:solidFill>
+          <a:effectLst/>
           <a:latin typeface="+mn-lt"/>
           <a:ea typeface="+mn-ea"/>
           <a:cs typeface="+mn-cs"/>
         </a:defRPr>
       </a:lvl8pPr>
-      <a:lvl9pPr marL="3886200" indent="-228600" algn="l" defTabSz="914400" rtl="0" eaLnBrk="1" latinLnBrk="0" hangingPunct="1">
-        <a:lnSpc>
-          <a:spcPct val="90000"/>
-        </a:lnSpc>
+      <a:lvl9pPr marL="3886200" indent="-228600" algn="l" defTabSz="457200" rtl="0" eaLnBrk="1" latinLnBrk="0" hangingPunct="1">
         <a:spcBef>
-          <a:spcPts val="500"/>
+          <a:spcPts val="0"/>
         </a:spcBef>
-        <a:buFont typeface="Arial" panose="020B0604020202020204" pitchFamily="34" charset="0"/>
+        <a:spcAft>
+          <a:spcPts val="1000"/>
+        </a:spcAft>
+        <a:buClr>
+          <a:schemeClr val="tx1"/>
+        </a:buClr>
+        <a:buSzPct val="100000"/>
+        <a:buFont typeface="Arial"/>
         <a:buChar char="•"/>
-        <a:defRPr sz="1800" kern="1200">
+        <a:defRPr sz="1200" kern="1200" cap="none">
           <a:solidFill>
             <a:schemeClr val="tx1"/>
           </a:solidFill>
+          <a:effectLst/>
           <a:latin typeface="+mn-lt"/>
           <a:ea typeface="+mn-ea"/>
           <a:cs typeface="+mn-cs"/>
@@ -3243,7 +5756,7 @@
       <a:defPPr>
         <a:defRPr lang="en-US"/>
       </a:defPPr>
-      <a:lvl1pPr marL="0" algn="l" defTabSz="914400" rtl="0" eaLnBrk="1" latinLnBrk="0" hangingPunct="1">
+      <a:lvl1pPr marL="0" algn="l" defTabSz="457200" rtl="0" eaLnBrk="1" latinLnBrk="0" hangingPunct="1">
         <a:defRPr sz="1800" kern="1200">
           <a:solidFill>
             <a:schemeClr val="tx1"/>
@@ -3253,7 +5766,7 @@
           <a:cs typeface="+mn-cs"/>
         </a:defRPr>
       </a:lvl1pPr>
-      <a:lvl2pPr marL="457200" algn="l" defTabSz="914400" rtl="0" eaLnBrk="1" latinLnBrk="0" hangingPunct="1">
+      <a:lvl2pPr marL="457200" algn="l" defTabSz="457200" rtl="0" eaLnBrk="1" latinLnBrk="0" hangingPunct="1">
         <a:defRPr sz="1800" kern="1200">
           <a:solidFill>
             <a:schemeClr val="tx1"/>
@@ -3263,7 +5776,7 @@
           <a:cs typeface="+mn-cs"/>
         </a:defRPr>
       </a:lvl2pPr>
-      <a:lvl3pPr marL="914400" algn="l" defTabSz="914400" rtl="0" eaLnBrk="1" latinLnBrk="0" hangingPunct="1">
+      <a:lvl3pPr marL="914400" algn="l" defTabSz="457200" rtl="0" eaLnBrk="1" latinLnBrk="0" hangingPunct="1">
         <a:defRPr sz="1800" kern="1200">
           <a:solidFill>
             <a:schemeClr val="tx1"/>
@@ -3273,7 +5786,7 @@
           <a:cs typeface="+mn-cs"/>
         </a:defRPr>
       </a:lvl3pPr>
-      <a:lvl4pPr marL="1371600" algn="l" defTabSz="914400" rtl="0" eaLnBrk="1" latinLnBrk="0" hangingPunct="1">
+      <a:lvl4pPr marL="1371600" algn="l" defTabSz="457200" rtl="0" eaLnBrk="1" latinLnBrk="0" hangingPunct="1">
         <a:defRPr sz="1800" kern="1200">
           <a:solidFill>
             <a:schemeClr val="tx1"/>
@@ -3283,7 +5796,7 @@
           <a:cs typeface="+mn-cs"/>
         </a:defRPr>
       </a:lvl4pPr>
-      <a:lvl5pPr marL="1828800" algn="l" defTabSz="914400" rtl="0" eaLnBrk="1" latinLnBrk="0" hangingPunct="1">
+      <a:lvl5pPr marL="1828800" algn="l" defTabSz="457200" rtl="0" eaLnBrk="1" latinLnBrk="0" hangingPunct="1">
         <a:defRPr sz="1800" kern="1200">
           <a:solidFill>
             <a:schemeClr val="tx1"/>
@@ -3293,7 +5806,7 @@
           <a:cs typeface="+mn-cs"/>
         </a:defRPr>
       </a:lvl5pPr>
-      <a:lvl6pPr marL="2286000" algn="l" defTabSz="914400" rtl="0" eaLnBrk="1" latinLnBrk="0" hangingPunct="1">
+      <a:lvl6pPr marL="2286000" algn="l" defTabSz="457200" rtl="0" eaLnBrk="1" latinLnBrk="0" hangingPunct="1">
         <a:defRPr sz="1800" kern="1200">
           <a:solidFill>
             <a:schemeClr val="tx1"/>
@@ -3303,7 +5816,7 @@
           <a:cs typeface="+mn-cs"/>
         </a:defRPr>
       </a:lvl6pPr>
-      <a:lvl7pPr marL="2743200" algn="l" defTabSz="914400" rtl="0" eaLnBrk="1" latinLnBrk="0" hangingPunct="1">
+      <a:lvl7pPr marL="2743200" algn="l" defTabSz="457200" rtl="0" eaLnBrk="1" latinLnBrk="0" hangingPunct="1">
         <a:defRPr sz="1800" kern="1200">
           <a:solidFill>
             <a:schemeClr val="tx1"/>
@@ -3313,7 +5826,7 @@
           <a:cs typeface="+mn-cs"/>
         </a:defRPr>
       </a:lvl7pPr>
-      <a:lvl8pPr marL="3200400" algn="l" defTabSz="914400" rtl="0" eaLnBrk="1" latinLnBrk="0" hangingPunct="1">
+      <a:lvl8pPr marL="3200400" algn="l" defTabSz="457200" rtl="0" eaLnBrk="1" latinLnBrk="0" hangingPunct="1">
         <a:defRPr sz="1800" kern="1200">
           <a:solidFill>
             <a:schemeClr val="tx1"/>
@@ -3323,7 +5836,7 @@
           <a:cs typeface="+mn-cs"/>
         </a:defRPr>
       </a:lvl8pPr>
-      <a:lvl9pPr marL="3657600" algn="l" defTabSz="914400" rtl="0" eaLnBrk="1" latinLnBrk="0" hangingPunct="1">
+      <a:lvl9pPr marL="3657600" algn="l" defTabSz="457200" rtl="0" eaLnBrk="1" latinLnBrk="0" hangingPunct="1">
         <a:defRPr sz="1800" kern="1200">
           <a:solidFill>
             <a:schemeClr val="tx1"/>
@@ -3480,7 +5993,12 @@
             <p:ph type="title"/>
           </p:nvPr>
         </p:nvSpPr>
-        <p:spPr/>
+        <p:spPr>
+          <a:xfrm>
+            <a:off x="657809" y="212869"/>
+            <a:ext cx="3970175" cy="1110343"/>
+          </a:xfrm>
+        </p:spPr>
         <p:txBody>
           <a:bodyPr/>
           <a:lstStyle/>
@@ -3492,35 +6010,6 @@
           </a:p>
         </p:txBody>
       </p:sp>
-      <p:pic>
-        <p:nvPicPr>
-          <p:cNvPr id="5" name="Content Placeholder 4">
-            <a:extLst>
-              <a:ext uri="{FF2B5EF4-FFF2-40B4-BE49-F238E27FC236}">
-                <a16:creationId xmlns:a16="http://schemas.microsoft.com/office/drawing/2014/main" id="{EF0FB3E0-603E-60B7-FC6A-DAEFA50DE655}"/>
-              </a:ext>
-            </a:extLst>
-          </p:cNvPr>
-          <p:cNvPicPr>
-            <a:picLocks noGrp="1" noChangeAspect="1"/>
-          </p:cNvPicPr>
-          <p:nvPr>
-            <p:ph idx="1"/>
-          </p:nvPr>
-        </p:nvPicPr>
-        <p:blipFill>
-          <a:blip r:embed="rId2"/>
-          <a:stretch>
-            <a:fillRect/>
-          </a:stretch>
-        </p:blipFill>
-        <p:spPr>
-          <a:xfrm>
-            <a:off x="341432" y="1463366"/>
-            <a:ext cx="6145935" cy="3183279"/>
-          </a:xfrm>
-        </p:spPr>
-      </p:pic>
       <p:sp>
         <p:nvSpPr>
           <p:cNvPr id="6" name="TextBox 5">
@@ -3596,7 +6085,7 @@
             </a:pPr>
             <a:r>
               <a:rPr lang="en-US" dirty="0"/>
-              <a:t>Consultant as Data Scientist at </a:t>
+              <a:t>Contractor as Data Scientist at </a:t>
             </a:r>
             <a:r>
               <a:rPr lang="en-US" dirty="0" err="1"/>
@@ -3624,7 +6113,7 @@
           <p:nvPr/>
         </p:nvPicPr>
         <p:blipFill>
-          <a:blip r:embed="rId3"/>
+          <a:blip r:embed="rId2"/>
           <a:stretch>
             <a:fillRect/>
           </a:stretch>
@@ -3653,8 +6142,8 @@
         </p:nvSpPr>
         <p:spPr>
           <a:xfrm>
-            <a:off x="6774022" y="3927365"/>
-            <a:ext cx="4851920" cy="1754326"/>
+            <a:off x="6960634" y="3927365"/>
+            <a:ext cx="4665308" cy="2031325"/>
           </a:xfrm>
           <a:prstGeom prst="rect">
             <a:avLst/>
@@ -3689,22 +6178,204 @@
               <a:rPr lang="en-US" dirty="0"/>
               <a:t>Graduated Computer Engineering (2021)</a:t>
             </a:r>
-            <a:br>
+          </a:p>
+          <a:p>
+            <a:pPr marL="285750" indent="-285750">
+              <a:buFont typeface="Arial" panose="020B0604020202020204" pitchFamily="34" charset="0"/>
+              <a:buChar char="•"/>
+            </a:pPr>
+            <a:endParaRPr lang="en-US" dirty="0"/>
+          </a:p>
+          <a:p>
+            <a:pPr marL="285750" indent="-285750">
+              <a:buFont typeface="Arial" panose="020B0604020202020204" pitchFamily="34" charset="0"/>
+              <a:buChar char="•"/>
+            </a:pPr>
+            <a:endParaRPr lang="en-US" dirty="0"/>
+          </a:p>
+          <a:p>
+            <a:pPr marL="285750" indent="-285750">
+              <a:buFont typeface="Arial" panose="020B0604020202020204" pitchFamily="34" charset="0"/>
+              <a:buChar char="•"/>
+            </a:pPr>
+            <a:r>
               <a:rPr lang="en-US" dirty="0"/>
-            </a:br>
-            <a:br>
-              <a:rPr lang="en-US" dirty="0"/>
-            </a:br>
-            <a:br>
-              <a:rPr lang="en-US" dirty="0"/>
-            </a:br>
-            <a:r>
-              <a:rPr lang="en-US" dirty="0"/>
-              <a:t>Currently Pursuing MDS at TU</a:t>
-            </a:r>
-          </a:p>
-        </p:txBody>
-      </p:sp>
+              <a:t>Currently Pursuing Master in Data Science at Tribhuvan University</a:t>
+            </a:r>
+          </a:p>
+        </p:txBody>
+      </p:sp>
+      <p:pic>
+        <p:nvPicPr>
+          <p:cNvPr id="10" name="Picture 9">
+            <a:extLst>
+              <a:ext uri="{FF2B5EF4-FFF2-40B4-BE49-F238E27FC236}">
+                <a16:creationId xmlns:a16="http://schemas.microsoft.com/office/drawing/2014/main" id="{21D2D107-A3CF-2878-ABCC-6C1467E01546}"/>
+              </a:ext>
+            </a:extLst>
+          </p:cNvPr>
+          <p:cNvPicPr>
+            <a:picLocks noChangeAspect="1"/>
+          </p:cNvPicPr>
+          <p:nvPr/>
+        </p:nvPicPr>
+        <p:blipFill rotWithShape="1">
+          <a:blip r:embed="rId3"/>
+          <a:srcRect b="22417"/>
+          <a:stretch/>
+        </p:blipFill>
+        <p:spPr>
+          <a:xfrm>
+            <a:off x="167187" y="1920564"/>
+            <a:ext cx="6606835" cy="3417195"/>
+          </a:xfrm>
+          <a:prstGeom prst="rect">
+            <a:avLst/>
+          </a:prstGeom>
+        </p:spPr>
+      </p:pic>
+      <p:sp>
+        <p:nvSpPr>
+          <p:cNvPr id="11" name="Title 1">
+            <a:extLst>
+              <a:ext uri="{FF2B5EF4-FFF2-40B4-BE49-F238E27FC236}">
+                <a16:creationId xmlns:a16="http://schemas.microsoft.com/office/drawing/2014/main" id="{1BB0D04C-1478-06B4-1FA5-D29D562D114A}"/>
+              </a:ext>
+            </a:extLst>
+          </p:cNvPr>
+          <p:cNvSpPr txBox="1">
+            <a:spLocks/>
+          </p:cNvSpPr>
+          <p:nvPr/>
+        </p:nvSpPr>
+        <p:spPr>
+          <a:xfrm>
+            <a:off x="1127449" y="6026924"/>
+            <a:ext cx="3229947" cy="476513"/>
+          </a:xfrm>
+          <a:prstGeom prst="rect">
+            <a:avLst/>
+          </a:prstGeom>
+          <a:effectLst/>
+        </p:spPr>
+        <p:txBody>
+          <a:bodyPr vert="horz" lIns="91440" tIns="45720" rIns="91440" bIns="45720" rtlCol="0" anchor="ctr">
+            <a:normAutofit/>
+          </a:bodyPr>
+          <a:lstStyle>
+            <a:lvl1pPr algn="l" defTabSz="457200" rtl="0" eaLnBrk="1" latinLnBrk="0" hangingPunct="1">
+              <a:spcBef>
+                <a:spcPct val="0"/>
+              </a:spcBef>
+              <a:buNone/>
+              <a:defRPr sz="3600" kern="1200" cap="all">
+                <a:ln w="3175" cmpd="sng">
+                  <a:noFill/>
+                </a:ln>
+                <a:solidFill>
+                  <a:schemeClr val="tx1"/>
+                </a:solidFill>
+                <a:effectLst/>
+                <a:latin typeface="+mj-lt"/>
+                <a:ea typeface="+mj-ea"/>
+                <a:cs typeface="+mj-cs"/>
+              </a:defRPr>
+            </a:lvl1pPr>
+            <a:lvl2pPr eaLnBrk="1" hangingPunct="1">
+              <a:defRPr>
+                <a:solidFill>
+                  <a:schemeClr val="tx2"/>
+                </a:solidFill>
+              </a:defRPr>
+            </a:lvl2pPr>
+            <a:lvl3pPr eaLnBrk="1" hangingPunct="1">
+              <a:defRPr>
+                <a:solidFill>
+                  <a:schemeClr val="tx2"/>
+                </a:solidFill>
+              </a:defRPr>
+            </a:lvl3pPr>
+            <a:lvl4pPr eaLnBrk="1" hangingPunct="1">
+              <a:defRPr>
+                <a:solidFill>
+                  <a:schemeClr val="tx2"/>
+                </a:solidFill>
+              </a:defRPr>
+            </a:lvl4pPr>
+            <a:lvl5pPr eaLnBrk="1" hangingPunct="1">
+              <a:defRPr>
+                <a:solidFill>
+                  <a:schemeClr val="tx2"/>
+                </a:solidFill>
+              </a:defRPr>
+            </a:lvl5pPr>
+            <a:lvl6pPr eaLnBrk="1" hangingPunct="1">
+              <a:defRPr>
+                <a:solidFill>
+                  <a:schemeClr val="tx2"/>
+                </a:solidFill>
+              </a:defRPr>
+            </a:lvl6pPr>
+            <a:lvl7pPr eaLnBrk="1" hangingPunct="1">
+              <a:defRPr>
+                <a:solidFill>
+                  <a:schemeClr val="tx2"/>
+                </a:solidFill>
+              </a:defRPr>
+            </a:lvl7pPr>
+            <a:lvl8pPr eaLnBrk="1" hangingPunct="1">
+              <a:defRPr>
+                <a:solidFill>
+                  <a:schemeClr val="tx2"/>
+                </a:solidFill>
+              </a:defRPr>
+            </a:lvl8pPr>
+            <a:lvl9pPr eaLnBrk="1" hangingPunct="1">
+              <a:defRPr>
+                <a:solidFill>
+                  <a:schemeClr val="tx2"/>
+                </a:solidFill>
+              </a:defRPr>
+            </a:lvl9pPr>
+          </a:lstStyle>
+          <a:p>
+            <a:r>
+              <a:rPr lang="en-US" sz="1200" cap="none" dirty="0"/>
+              <a:t>https://www.linkedin.com/in/suman-paudel/</a:t>
+            </a:r>
+          </a:p>
+        </p:txBody>
+      </p:sp>
+      <p:pic>
+        <p:nvPicPr>
+          <p:cNvPr id="13" name="Picture 12">
+            <a:extLst>
+              <a:ext uri="{FF2B5EF4-FFF2-40B4-BE49-F238E27FC236}">
+                <a16:creationId xmlns:a16="http://schemas.microsoft.com/office/drawing/2014/main" id="{17B80F43-CCD3-72BC-0542-C8469C028B28}"/>
+              </a:ext>
+            </a:extLst>
+          </p:cNvPr>
+          <p:cNvPicPr>
+            <a:picLocks noChangeAspect="1"/>
+          </p:cNvPicPr>
+          <p:nvPr/>
+        </p:nvPicPr>
+        <p:blipFill>
+          <a:blip r:embed="rId4"/>
+          <a:stretch>
+            <a:fillRect/>
+          </a:stretch>
+        </p:blipFill>
+        <p:spPr>
+          <a:xfrm>
+            <a:off x="11098051" y="3171979"/>
+            <a:ext cx="1055781" cy="914366"/>
+          </a:xfrm>
+          <a:prstGeom prst="rect">
+            <a:avLst/>
+          </a:prstGeom>
+        </p:spPr>
+      </p:pic>
     </p:spTree>
     <p:extLst>
       <p:ext uri="{BB962C8B-B14F-4D97-AF65-F5344CB8AC3E}">
@@ -4067,58 +6738,12 @@
           <a:chExt cx="0" cy="0"/>
         </a:xfrm>
       </p:grpSpPr>
-      <p:sp>
-        <p:nvSpPr>
-          <p:cNvPr id="48" name="Rectangle 47">
+      <p:pic>
+        <p:nvPicPr>
+          <p:cNvPr id="4" name="Picture 3">
             <a:extLst>
               <a:ext uri="{FF2B5EF4-FFF2-40B4-BE49-F238E27FC236}">
-                <a16:creationId xmlns:a16="http://schemas.microsoft.com/office/drawing/2014/main" id="{C4293CB2-B135-0C71-4212-691D7C8ACD43}"/>
-              </a:ext>
-            </a:extLst>
-          </p:cNvPr>
-          <p:cNvSpPr/>
-          <p:nvPr/>
-        </p:nvSpPr>
-        <p:spPr>
-          <a:xfrm>
-            <a:off x="4203149" y="2498830"/>
-            <a:ext cx="2631233" cy="616935"/>
-          </a:xfrm>
-          <a:prstGeom prst="rect">
-            <a:avLst/>
-          </a:prstGeom>
-        </p:spPr>
-        <p:style>
-          <a:lnRef idx="2">
-            <a:schemeClr val="dk1">
-              <a:shade val="15000"/>
-            </a:schemeClr>
-          </a:lnRef>
-          <a:fillRef idx="1">
-            <a:schemeClr val="dk1"/>
-          </a:fillRef>
-          <a:effectRef idx="0">
-            <a:schemeClr val="dk1"/>
-          </a:effectRef>
-          <a:fontRef idx="minor">
-            <a:schemeClr val="lt1"/>
-          </a:fontRef>
-        </p:style>
-        <p:txBody>
-          <a:bodyPr rtlCol="0" anchor="ctr"/>
-          <a:lstStyle/>
-          <a:p>
-            <a:pPr algn="ctr"/>
-            <a:endParaRPr lang="en-US" dirty="0"/>
-          </a:p>
-        </p:txBody>
-      </p:sp>
-      <p:pic>
-        <p:nvPicPr>
-          <p:cNvPr id="12" name="Graphic 11">
-            <a:extLst>
-              <a:ext uri="{FF2B5EF4-FFF2-40B4-BE49-F238E27FC236}">
-                <a16:creationId xmlns:a16="http://schemas.microsoft.com/office/drawing/2014/main" id="{8E7802C3-CF52-05FB-2FF7-F6618C06E67A}"/>
+                <a16:creationId xmlns:a16="http://schemas.microsoft.com/office/drawing/2014/main" id="{CCB4713F-D122-0447-4DF9-0752883057D7}"/>
               </a:ext>
             </a:extLst>
           </p:cNvPr>
@@ -4128,21 +6753,15 @@
           <p:nvPr/>
         </p:nvPicPr>
         <p:blipFill>
-          <a:blip r:embed="rId2">
-            <a:extLst>
-              <a:ext uri="{96DAC541-7B7A-43D3-8B79-37D633B846F1}">
-                <asvg:svgBlip xmlns:asvg="http://schemas.microsoft.com/office/drawing/2016/SVG/main" r:embed="rId3"/>
-              </a:ext>
-            </a:extLst>
-          </a:blip>
+          <a:blip r:embed="rId2"/>
           <a:stretch>
             <a:fillRect/>
           </a:stretch>
         </p:blipFill>
         <p:spPr>
           <a:xfrm>
-            <a:off x="9056912" y="4875180"/>
-            <a:ext cx="1857375" cy="352425"/>
+            <a:off x="5828809" y="1241866"/>
+            <a:ext cx="2110086" cy="597040"/>
           </a:xfrm>
           <a:prstGeom prst="rect">
             <a:avLst/>
@@ -4151,10 +6770,40 @@
       </p:pic>
       <p:pic>
         <p:nvPicPr>
-          <p:cNvPr id="14" name="Picture 13">
+          <p:cNvPr id="7" name="Picture 6">
             <a:extLst>
               <a:ext uri="{FF2B5EF4-FFF2-40B4-BE49-F238E27FC236}">
-                <a16:creationId xmlns:a16="http://schemas.microsoft.com/office/drawing/2014/main" id="{12E7968E-6082-28C1-1A9B-B63308B3EA3B}"/>
+                <a16:creationId xmlns:a16="http://schemas.microsoft.com/office/drawing/2014/main" id="{85BACA09-D698-8685-046A-7833C6E8171B}"/>
+              </a:ext>
+            </a:extLst>
+          </p:cNvPr>
+          <p:cNvPicPr>
+            <a:picLocks noChangeAspect="1"/>
+          </p:cNvPicPr>
+          <p:nvPr/>
+        </p:nvPicPr>
+        <p:blipFill>
+          <a:blip r:embed="rId3"/>
+          <a:stretch>
+            <a:fillRect/>
+          </a:stretch>
+        </p:blipFill>
+        <p:spPr>
+          <a:xfrm>
+            <a:off x="8972360" y="2418498"/>
+            <a:ext cx="2247036" cy="417949"/>
+          </a:xfrm>
+          <a:prstGeom prst="rect">
+            <a:avLst/>
+          </a:prstGeom>
+        </p:spPr>
+      </p:pic>
+      <p:pic>
+        <p:nvPicPr>
+          <p:cNvPr id="9" name="Picture 8">
+            <a:extLst>
+              <a:ext uri="{FF2B5EF4-FFF2-40B4-BE49-F238E27FC236}">
+                <a16:creationId xmlns:a16="http://schemas.microsoft.com/office/drawing/2014/main" id="{037AEB21-A4B8-9421-1B4B-D7DAA4979A3D}"/>
               </a:ext>
             </a:extLst>
           </p:cNvPr>
@@ -4171,8 +6820,8 @@
         </p:blipFill>
         <p:spPr>
           <a:xfrm>
-            <a:off x="8302276" y="5705555"/>
-            <a:ext cx="3366649" cy="541402"/>
+            <a:off x="3236864" y="2351328"/>
+            <a:ext cx="2821344" cy="640305"/>
           </a:xfrm>
           <a:prstGeom prst="rect">
             <a:avLst/>
@@ -4181,10 +6830,10 @@
       </p:pic>
       <p:pic>
         <p:nvPicPr>
-          <p:cNvPr id="16" name="Picture 15">
+          <p:cNvPr id="11" name="Picture 10">
             <a:extLst>
               <a:ext uri="{FF2B5EF4-FFF2-40B4-BE49-F238E27FC236}">
-                <a16:creationId xmlns:a16="http://schemas.microsoft.com/office/drawing/2014/main" id="{E7DF460F-E2DC-1D6F-2F11-B4162E648A4E}"/>
+                <a16:creationId xmlns:a16="http://schemas.microsoft.com/office/drawing/2014/main" id="{23EDE0DE-17D3-2FCA-911F-BBD2222A6ED9}"/>
               </a:ext>
             </a:extLst>
           </p:cNvPr>
@@ -4201,8 +6850,8 @@
         </p:blipFill>
         <p:spPr>
           <a:xfrm>
-            <a:off x="4729162" y="3348338"/>
-            <a:ext cx="2733675" cy="447675"/>
+            <a:off x="2620034" y="3342251"/>
+            <a:ext cx="3392431" cy="621793"/>
           </a:xfrm>
           <a:prstGeom prst="rect">
             <a:avLst/>
@@ -4211,10 +6860,10 @@
       </p:pic>
       <p:pic>
         <p:nvPicPr>
-          <p:cNvPr id="18" name="Graphic 17">
+          <p:cNvPr id="15" name="Graphic 14">
             <a:extLst>
               <a:ext uri="{FF2B5EF4-FFF2-40B4-BE49-F238E27FC236}">
-                <a16:creationId xmlns:a16="http://schemas.microsoft.com/office/drawing/2014/main" id="{99C00E04-83F5-58F9-4858-B10E536B4357}"/>
+                <a16:creationId xmlns:a16="http://schemas.microsoft.com/office/drawing/2014/main" id="{CBC1E7CA-5CD7-50B9-AC3B-90719CE2DD45}"/>
               </a:ext>
             </a:extLst>
           </p:cNvPr>
@@ -4237,8 +6886,8 @@
         </p:blipFill>
         <p:spPr>
           <a:xfrm>
-            <a:off x="523075" y="3348338"/>
-            <a:ext cx="3260855" cy="648665"/>
+            <a:off x="629639" y="3354829"/>
+            <a:ext cx="1463106" cy="446750"/>
           </a:xfrm>
           <a:prstGeom prst="rect">
             <a:avLst/>
@@ -4247,10 +6896,10 @@
       </p:pic>
       <p:pic>
         <p:nvPicPr>
-          <p:cNvPr id="20" name="Graphic 19">
+          <p:cNvPr id="17" name="Picture 16">
             <a:extLst>
               <a:ext uri="{FF2B5EF4-FFF2-40B4-BE49-F238E27FC236}">
-                <a16:creationId xmlns:a16="http://schemas.microsoft.com/office/drawing/2014/main" id="{E65DBD32-F67E-3733-F75A-06D1909BB904}"/>
+                <a16:creationId xmlns:a16="http://schemas.microsoft.com/office/drawing/2014/main" id="{1F810B09-36A5-5991-564F-327E1D63A1A3}"/>
               </a:ext>
             </a:extLst>
           </p:cNvPr>
@@ -4260,21 +6909,15 @@
           <p:nvPr/>
         </p:nvPicPr>
         <p:blipFill>
-          <a:blip r:embed="rId8">
-            <a:extLst>
-              <a:ext uri="{96DAC541-7B7A-43D3-8B79-37D633B846F1}">
-                <asvg:svgBlip xmlns:asvg="http://schemas.microsoft.com/office/drawing/2016/SVG/main" r:embed="rId9"/>
-              </a:ext>
-            </a:extLst>
-          </a:blip>
+          <a:blip r:embed="rId8"/>
           <a:stretch>
             <a:fillRect/>
           </a:stretch>
         </p:blipFill>
         <p:spPr>
           <a:xfrm>
-            <a:off x="4627103" y="235171"/>
-            <a:ext cx="1690017" cy="1846343"/>
+            <a:off x="10694618" y="3398386"/>
+            <a:ext cx="1181100" cy="314325"/>
           </a:xfrm>
           <a:prstGeom prst="rect">
             <a:avLst/>
@@ -4283,10 +6926,10 @@
       </p:pic>
       <p:pic>
         <p:nvPicPr>
-          <p:cNvPr id="22" name="Picture 21">
+          <p:cNvPr id="19" name="Graphic 18">
             <a:extLst>
               <a:ext uri="{FF2B5EF4-FFF2-40B4-BE49-F238E27FC236}">
-                <a16:creationId xmlns:a16="http://schemas.microsoft.com/office/drawing/2014/main" id="{46E82F6B-B7A4-AC1A-0A93-A39F9C149ECA}"/>
+                <a16:creationId xmlns:a16="http://schemas.microsoft.com/office/drawing/2014/main" id="{6D699B95-ABBF-CC2E-75B4-3BB7574CA657}"/>
               </a:ext>
             </a:extLst>
           </p:cNvPr>
@@ -4296,15 +6939,21 @@
           <p:nvPr/>
         </p:nvPicPr>
         <p:blipFill>
-          <a:blip r:embed="rId10"/>
+          <a:blip r:embed="rId9">
+            <a:extLst>
+              <a:ext uri="{96DAC541-7B7A-43D3-8B79-37D633B846F1}">
+                <asvg:svgBlip xmlns:asvg="http://schemas.microsoft.com/office/drawing/2016/SVG/main" r:embed="rId10"/>
+              </a:ext>
+            </a:extLst>
+          </a:blip>
           <a:stretch>
             <a:fillRect/>
           </a:stretch>
         </p:blipFill>
         <p:spPr>
           <a:xfrm>
-            <a:off x="523075" y="4545240"/>
-            <a:ext cx="2952009" cy="621793"/>
+            <a:off x="6012465" y="5746305"/>
+            <a:ext cx="938704" cy="938704"/>
           </a:xfrm>
           <a:prstGeom prst="rect">
             <a:avLst/>
@@ -4313,10 +6962,10 @@
       </p:pic>
       <p:pic>
         <p:nvPicPr>
-          <p:cNvPr id="33" name="Picture 32">
+          <p:cNvPr id="23" name="Graphic 22">
             <a:extLst>
               <a:ext uri="{FF2B5EF4-FFF2-40B4-BE49-F238E27FC236}">
-                <a16:creationId xmlns:a16="http://schemas.microsoft.com/office/drawing/2014/main" id="{AA7A09A7-5135-B613-E9A5-AC55B38C01EA}"/>
+                <a16:creationId xmlns:a16="http://schemas.microsoft.com/office/drawing/2014/main" id="{7AEF85C3-639A-1D82-6A76-941B7F403EE0}"/>
               </a:ext>
             </a:extLst>
           </p:cNvPr>
@@ -4326,15 +6975,21 @@
           <p:nvPr/>
         </p:nvPicPr>
         <p:blipFill>
-          <a:blip r:embed="rId11"/>
+          <a:blip r:embed="rId11">
+            <a:extLst>
+              <a:ext uri="{96DAC541-7B7A-43D3-8B79-37D633B846F1}">
+                <asvg:svgBlip xmlns:asvg="http://schemas.microsoft.com/office/drawing/2016/SVG/main" r:embed="rId12"/>
+              </a:ext>
+            </a:extLst>
+          </a:blip>
           <a:stretch>
             <a:fillRect/>
           </a:stretch>
         </p:blipFill>
         <p:spPr>
           <a:xfrm>
-            <a:off x="5327779" y="4415656"/>
-            <a:ext cx="2623329" cy="2271952"/>
+            <a:off x="8150842" y="1433396"/>
+            <a:ext cx="1857375" cy="352425"/>
           </a:xfrm>
           <a:prstGeom prst="rect">
             <a:avLst/>
@@ -4343,10 +6998,10 @@
       </p:pic>
       <p:pic>
         <p:nvPicPr>
-          <p:cNvPr id="35" name="Graphic 34">
+          <p:cNvPr id="25" name="Picture 24">
             <a:extLst>
               <a:ext uri="{FF2B5EF4-FFF2-40B4-BE49-F238E27FC236}">
-                <a16:creationId xmlns:a16="http://schemas.microsoft.com/office/drawing/2014/main" id="{A435A0AD-438D-10B8-AADA-900FD9F914AF}"/>
+                <a16:creationId xmlns:a16="http://schemas.microsoft.com/office/drawing/2014/main" id="{2A87CC21-993B-AFFE-C0D0-06532C06A9F7}"/>
               </a:ext>
             </a:extLst>
           </p:cNvPr>
@@ -4356,21 +7011,15 @@
           <p:nvPr/>
         </p:nvPicPr>
         <p:blipFill>
-          <a:blip r:embed="rId12">
-            <a:extLst>
-              <a:ext uri="{96DAC541-7B7A-43D3-8B79-37D633B846F1}">
-                <asvg:svgBlip xmlns:asvg="http://schemas.microsoft.com/office/drawing/2016/SVG/main" r:embed="rId13"/>
-              </a:ext>
-            </a:extLst>
-          </a:blip>
+          <a:blip r:embed="rId13"/>
           <a:stretch>
             <a:fillRect/>
           </a:stretch>
         </p:blipFill>
         <p:spPr>
           <a:xfrm>
-            <a:off x="4281486" y="2562267"/>
-            <a:ext cx="2381250" cy="476250"/>
+            <a:off x="6450728" y="3411117"/>
+            <a:ext cx="3750864" cy="603189"/>
           </a:xfrm>
           <a:prstGeom prst="rect">
             <a:avLst/>
@@ -4379,10 +7028,10 @@
       </p:pic>
       <p:pic>
         <p:nvPicPr>
-          <p:cNvPr id="37" name="Picture 36">
+          <p:cNvPr id="27" name="Picture 26">
             <a:extLst>
               <a:ext uri="{FF2B5EF4-FFF2-40B4-BE49-F238E27FC236}">
-                <a16:creationId xmlns:a16="http://schemas.microsoft.com/office/drawing/2014/main" id="{22D6BEDF-7DE8-2147-2D45-CC511E269027}"/>
+                <a16:creationId xmlns:a16="http://schemas.microsoft.com/office/drawing/2014/main" id="{55164993-0757-628F-94B1-7843F02E6F41}"/>
               </a:ext>
             </a:extLst>
           </p:cNvPr>
@@ -4391,16 +7040,15 @@
           </p:cNvPicPr>
           <p:nvPr/>
         </p:nvPicPr>
-        <p:blipFill>
+        <p:blipFill rotWithShape="1">
           <a:blip r:embed="rId14"/>
-          <a:stretch>
-            <a:fillRect/>
-          </a:stretch>
+          <a:srcRect b="22854"/>
+          <a:stretch/>
         </p:blipFill>
         <p:spPr>
           <a:xfrm>
-            <a:off x="523075" y="5551632"/>
-            <a:ext cx="2457450" cy="695325"/>
+            <a:off x="8750659" y="5907277"/>
+            <a:ext cx="3321560" cy="537443"/>
           </a:xfrm>
           <a:prstGeom prst="rect">
             <a:avLst/>
@@ -4409,10 +7057,10 @@
       </p:pic>
       <p:pic>
         <p:nvPicPr>
-          <p:cNvPr id="39" name="Picture 38">
+          <p:cNvPr id="29" name="Picture 28">
             <a:extLst>
               <a:ext uri="{FF2B5EF4-FFF2-40B4-BE49-F238E27FC236}">
-                <a16:creationId xmlns:a16="http://schemas.microsoft.com/office/drawing/2014/main" id="{2576DDBD-24A9-5CD2-C4EE-7431C0A1F83E}"/>
+                <a16:creationId xmlns:a16="http://schemas.microsoft.com/office/drawing/2014/main" id="{91B21CA7-90B9-6865-634C-50ADD3AFDA16}"/>
               </a:ext>
             </a:extLst>
           </p:cNvPr>
@@ -4429,8 +7077,8 @@
         </p:blipFill>
         <p:spPr>
           <a:xfrm>
-            <a:off x="6959183" y="704414"/>
-            <a:ext cx="1342976" cy="304789"/>
+            <a:off x="254860" y="1238544"/>
+            <a:ext cx="2733675" cy="447675"/>
           </a:xfrm>
           <a:prstGeom prst="rect">
             <a:avLst/>
@@ -4439,10 +7087,10 @@
       </p:pic>
       <p:pic>
         <p:nvPicPr>
-          <p:cNvPr id="41" name="Picture 40">
+          <p:cNvPr id="31" name="Picture 30">
             <a:extLst>
               <a:ext uri="{FF2B5EF4-FFF2-40B4-BE49-F238E27FC236}">
-                <a16:creationId xmlns:a16="http://schemas.microsoft.com/office/drawing/2014/main" id="{7A888E77-02AA-26A3-A7C0-C6229FAE5614}"/>
+                <a16:creationId xmlns:a16="http://schemas.microsoft.com/office/drawing/2014/main" id="{1230B225-52E7-815B-643E-103ABCAE8510}"/>
               </a:ext>
             </a:extLst>
           </p:cNvPr>
@@ -4459,8 +7107,8 @@
         </p:blipFill>
         <p:spPr>
           <a:xfrm>
-            <a:off x="8589229" y="463020"/>
-            <a:ext cx="3392431" cy="621793"/>
+            <a:off x="10805030" y="4274650"/>
+            <a:ext cx="1070688" cy="1070688"/>
           </a:xfrm>
           <a:prstGeom prst="rect">
             <a:avLst/>
@@ -4469,10 +7117,10 @@
       </p:pic>
       <p:pic>
         <p:nvPicPr>
-          <p:cNvPr id="45" name="Graphic 44">
+          <p:cNvPr id="33" name="Graphic 32">
             <a:extLst>
               <a:ext uri="{FF2B5EF4-FFF2-40B4-BE49-F238E27FC236}">
-                <a16:creationId xmlns:a16="http://schemas.microsoft.com/office/drawing/2014/main" id="{1AEE90E8-9AC0-1BFC-1AC3-85C6CA9412C7}"/>
+                <a16:creationId xmlns:a16="http://schemas.microsoft.com/office/drawing/2014/main" id="{487F58B8-A278-DD34-B1CE-B4F142DE6758}"/>
               </a:ext>
             </a:extLst>
           </p:cNvPr>
@@ -4495,94 +7143,311 @@
         </p:blipFill>
         <p:spPr>
           <a:xfrm>
-            <a:off x="8737826" y="1803982"/>
-            <a:ext cx="1247775" cy="381000"/>
+            <a:off x="105032" y="2351328"/>
+            <a:ext cx="2883503" cy="573600"/>
           </a:xfrm>
           <a:prstGeom prst="rect">
             <a:avLst/>
           </a:prstGeom>
         </p:spPr>
       </p:pic>
-    </p:spTree>
-    <p:extLst>
-      <p:ext uri="{BB962C8B-B14F-4D97-AF65-F5344CB8AC3E}">
-        <p14:creationId xmlns:p14="http://schemas.microsoft.com/office/powerpoint/2010/main" val="3769227349"/>
-      </p:ext>
-    </p:extLst>
-  </p:cSld>
-  <p:clrMapOvr>
-    <a:masterClrMapping/>
-  </p:clrMapOvr>
-</p:sld>
-</file>
-
-<file path=ppt/slides/slide6.xml><?xml version="1.0" encoding="utf-8"?>
-<p:sld xmlns:a="http://schemas.openxmlformats.org/drawingml/2006/main" xmlns:r="http://schemas.openxmlformats.org/officeDocument/2006/relationships" xmlns:p="http://schemas.openxmlformats.org/presentationml/2006/main">
-  <p:cSld>
-    <p:spTree>
-      <p:nvGrpSpPr>
-        <p:cNvPr id="1" name=""/>
-        <p:cNvGrpSpPr/>
-        <p:nvPr/>
-      </p:nvGrpSpPr>
-      <p:grpSpPr>
-        <a:xfrm>
-          <a:off x="0" y="0"/>
-          <a:ext cx="0" cy="0"/>
-          <a:chOff x="0" y="0"/>
-          <a:chExt cx="0" cy="0"/>
-        </a:xfrm>
-      </p:grpSpPr>
-      <p:sp>
-        <p:nvSpPr>
-          <p:cNvPr id="2" name="Title 1">
+      <p:pic>
+        <p:nvPicPr>
+          <p:cNvPr id="35" name="Picture 34">
             <a:extLst>
               <a:ext uri="{FF2B5EF4-FFF2-40B4-BE49-F238E27FC236}">
-                <a16:creationId xmlns:a16="http://schemas.microsoft.com/office/drawing/2014/main" id="{509AFCBF-8443-17A2-6490-CBAE6EBDA764}"/>
+                <a16:creationId xmlns:a16="http://schemas.microsoft.com/office/drawing/2014/main" id="{4314653C-DCBD-4028-95F4-E25AA20BE0A0}"/>
               </a:ext>
             </a:extLst>
           </p:cNvPr>
-          <p:cNvSpPr>
-            <a:spLocks noGrp="1"/>
-          </p:cNvSpPr>
-          <p:nvPr>
-            <p:ph type="title"/>
-          </p:nvPr>
-        </p:nvSpPr>
-        <p:spPr/>
-        <p:txBody>
-          <a:bodyPr/>
-          <a:lstStyle/>
-          <a:p>
-            <a:endParaRPr lang="en-US"/>
-          </a:p>
-        </p:txBody>
-      </p:sp>
-      <p:sp>
-        <p:nvSpPr>
-          <p:cNvPr id="5" name="Content Placeholder 4">
+          <p:cNvPicPr>
+            <a:picLocks noChangeAspect="1"/>
+          </p:cNvPicPr>
+          <p:nvPr/>
+        </p:nvPicPr>
+        <p:blipFill>
+          <a:blip r:embed="rId19"/>
+          <a:stretch>
+            <a:fillRect/>
+          </a:stretch>
+        </p:blipFill>
+        <p:spPr>
+          <a:xfrm>
+            <a:off x="7108795" y="4482589"/>
+            <a:ext cx="2810064" cy="785247"/>
+          </a:xfrm>
+          <a:prstGeom prst="rect">
+            <a:avLst/>
+          </a:prstGeom>
+        </p:spPr>
+      </p:pic>
+      <p:pic>
+        <p:nvPicPr>
+          <p:cNvPr id="37" name="Graphic 36">
             <a:extLst>
               <a:ext uri="{FF2B5EF4-FFF2-40B4-BE49-F238E27FC236}">
-                <a16:creationId xmlns:a16="http://schemas.microsoft.com/office/drawing/2014/main" id="{35900DD0-7BC0-C034-8739-46F0DA653B5D}"/>
+                <a16:creationId xmlns:a16="http://schemas.microsoft.com/office/drawing/2014/main" id="{77C7FBC4-64D8-FCED-A968-0CC1C813DAE0}"/>
               </a:ext>
             </a:extLst>
           </p:cNvPr>
-          <p:cNvSpPr>
-            <a:spLocks noGrp="1"/>
-          </p:cNvSpPr>
-          <p:nvPr>
-            <p:ph idx="1"/>
-          </p:nvPr>
-        </p:nvSpPr>
-        <p:spPr/>
-        <p:txBody>
-          <a:bodyPr/>
+          <p:cNvPicPr>
+            <a:picLocks noChangeAspect="1"/>
+          </p:cNvPicPr>
+          <p:nvPr/>
+        </p:nvPicPr>
+        <p:blipFill>
+          <a:blip r:embed="rId20">
+            <a:extLst>
+              <a:ext uri="{96DAC541-7B7A-43D3-8B79-37D633B846F1}">
+                <asvg:svgBlip xmlns:asvg="http://schemas.microsoft.com/office/drawing/2016/SVG/main" r:embed="rId21"/>
+              </a:ext>
+            </a:extLst>
+          </a:blip>
+          <a:stretch>
+            <a:fillRect/>
+          </a:stretch>
+        </p:blipFill>
+        <p:spPr>
+          <a:xfrm>
+            <a:off x="4967469" y="3919110"/>
+            <a:ext cx="1547607" cy="1690761"/>
+          </a:xfrm>
+          <a:prstGeom prst="rect">
+            <a:avLst/>
+          </a:prstGeom>
+        </p:spPr>
+      </p:pic>
+      <p:pic>
+        <p:nvPicPr>
+          <p:cNvPr id="39" name="Picture 38">
+            <a:extLst>
+              <a:ext uri="{FF2B5EF4-FFF2-40B4-BE49-F238E27FC236}">
+                <a16:creationId xmlns:a16="http://schemas.microsoft.com/office/drawing/2014/main" id="{7C696549-D69A-1A50-3FFE-884070FAE8E6}"/>
+              </a:ext>
+            </a:extLst>
+          </p:cNvPr>
+          <p:cNvPicPr>
+            <a:picLocks noChangeAspect="1"/>
+          </p:cNvPicPr>
+          <p:nvPr/>
+        </p:nvPicPr>
+        <p:blipFill>
+          <a:blip r:embed="rId22"/>
+          <a:stretch>
+            <a:fillRect/>
+          </a:stretch>
+        </p:blipFill>
+        <p:spPr>
+          <a:xfrm>
+            <a:off x="609199" y="4216031"/>
+            <a:ext cx="3750864" cy="790059"/>
+          </a:xfrm>
+          <a:prstGeom prst="rect">
+            <a:avLst/>
+          </a:prstGeom>
+        </p:spPr>
+      </p:pic>
+      <p:pic>
+        <p:nvPicPr>
+          <p:cNvPr id="43" name="Picture 42">
+            <a:extLst>
+              <a:ext uri="{FF2B5EF4-FFF2-40B4-BE49-F238E27FC236}">
+                <a16:creationId xmlns:a16="http://schemas.microsoft.com/office/drawing/2014/main" id="{213C9FFE-D76A-55C5-C83B-60FF0905DE8B}"/>
+              </a:ext>
+            </a:extLst>
+          </p:cNvPr>
+          <p:cNvPicPr>
+            <a:picLocks noChangeAspect="1"/>
+          </p:cNvPicPr>
+          <p:nvPr/>
+        </p:nvPicPr>
+        <p:blipFill>
+          <a:blip r:embed="rId23"/>
+          <a:stretch>
+            <a:fillRect/>
+          </a:stretch>
+        </p:blipFill>
+        <p:spPr>
+          <a:xfrm>
+            <a:off x="881182" y="5124992"/>
+            <a:ext cx="2358896" cy="1338408"/>
+          </a:xfrm>
+          <a:prstGeom prst="rect">
+            <a:avLst/>
+          </a:prstGeom>
+        </p:spPr>
+      </p:pic>
+      <p:pic>
+        <p:nvPicPr>
+          <p:cNvPr id="60" name="Picture 59">
+            <a:extLst>
+              <a:ext uri="{FF2B5EF4-FFF2-40B4-BE49-F238E27FC236}">
+                <a16:creationId xmlns:a16="http://schemas.microsoft.com/office/drawing/2014/main" id="{69A3D26D-0C9F-3D7F-C54A-ADAD6E1B37B7}"/>
+              </a:ext>
+            </a:extLst>
+          </p:cNvPr>
+          <p:cNvPicPr>
+            <a:picLocks noChangeAspect="1"/>
+          </p:cNvPicPr>
+          <p:nvPr/>
+        </p:nvPicPr>
+        <p:blipFill>
+          <a:blip r:embed="rId24"/>
+          <a:stretch>
+            <a:fillRect/>
+          </a:stretch>
+        </p:blipFill>
+        <p:spPr>
+          <a:xfrm>
+            <a:off x="6460241" y="2312113"/>
+            <a:ext cx="2110086" cy="630721"/>
+          </a:xfrm>
+          <a:prstGeom prst="rect">
+            <a:avLst/>
+          </a:prstGeom>
+        </p:spPr>
+      </p:pic>
+      <p:pic>
+        <p:nvPicPr>
+          <p:cNvPr id="62" name="Picture 61">
+            <a:extLst>
+              <a:ext uri="{FF2B5EF4-FFF2-40B4-BE49-F238E27FC236}">
+                <a16:creationId xmlns:a16="http://schemas.microsoft.com/office/drawing/2014/main" id="{18AA37C9-4FEB-B1E8-0140-56E8BE022620}"/>
+              </a:ext>
+            </a:extLst>
+          </p:cNvPr>
+          <p:cNvPicPr>
+            <a:picLocks noChangeAspect="1"/>
+          </p:cNvPicPr>
+          <p:nvPr/>
+        </p:nvPicPr>
+        <p:blipFill>
+          <a:blip r:embed="rId25"/>
+          <a:stretch>
+            <a:fillRect/>
+          </a:stretch>
+        </p:blipFill>
+        <p:spPr>
+          <a:xfrm>
+            <a:off x="7140476" y="5576026"/>
+            <a:ext cx="1282743" cy="1110928"/>
+          </a:xfrm>
+          <a:prstGeom prst="rect">
+            <a:avLst/>
+          </a:prstGeom>
+        </p:spPr>
+      </p:pic>
+      <p:pic>
+        <p:nvPicPr>
+          <p:cNvPr id="64" name="Graphic 63">
+            <a:extLst>
+              <a:ext uri="{FF2B5EF4-FFF2-40B4-BE49-F238E27FC236}">
+                <a16:creationId xmlns:a16="http://schemas.microsoft.com/office/drawing/2014/main" id="{B82DF976-4D61-2C90-29C0-F735C5DB5CB5}"/>
+              </a:ext>
+            </a:extLst>
+          </p:cNvPr>
+          <p:cNvPicPr>
+            <a:picLocks noChangeAspect="1"/>
+          </p:cNvPicPr>
+          <p:nvPr/>
+        </p:nvPicPr>
+        <p:blipFill>
+          <a:blip r:embed="rId26">
+            <a:extLst>
+              <a:ext uri="{96DAC541-7B7A-43D3-8B79-37D633B846F1}">
+                <asvg:svgBlip xmlns:asvg="http://schemas.microsoft.com/office/drawing/2016/SVG/main" r:embed="rId27"/>
+              </a:ext>
+            </a:extLst>
+          </a:blip>
+          <a:stretch>
+            <a:fillRect/>
+          </a:stretch>
+        </p:blipFill>
+        <p:spPr>
+          <a:xfrm>
+            <a:off x="3404881" y="5774432"/>
+            <a:ext cx="2381250" cy="476250"/>
+          </a:xfrm>
+          <a:prstGeom prst="rect">
+            <a:avLst/>
+          </a:prstGeom>
+        </p:spPr>
+      </p:pic>
+      <p:sp>
+        <p:nvSpPr>
+          <p:cNvPr id="65" name="TextBox 64">
+            <a:extLst>
+              <a:ext uri="{FF2B5EF4-FFF2-40B4-BE49-F238E27FC236}">
+                <a16:creationId xmlns:a16="http://schemas.microsoft.com/office/drawing/2014/main" id="{AE265438-09B6-7248-C2B4-49E1C75545B6}"/>
+              </a:ext>
+            </a:extLst>
+          </p:cNvPr>
+          <p:cNvSpPr txBox="1"/>
+          <p:nvPr/>
+        </p:nvSpPr>
+        <p:spPr>
+          <a:xfrm>
+            <a:off x="3309646" y="342778"/>
+            <a:ext cx="5406801" cy="461665"/>
+          </a:xfrm>
+          <a:prstGeom prst="rect">
+            <a:avLst/>
+          </a:prstGeom>
+          <a:noFill/>
+        </p:spPr>
+        <p:txBody>
+          <a:bodyPr wrap="none" rtlCol="0">
+            <a:spAutoFit/>
+          </a:bodyPr>
           <a:lstStyle/>
           <a:p>
-            <a:endParaRPr lang="en-US"/>
-          </a:p>
-        </p:txBody>
-      </p:sp>
+            <a:r>
+              <a:rPr lang="en-US" sz="2400" b="1" dirty="0">
+                <a:solidFill>
+                  <a:srgbClr val="00B0F0"/>
+                </a:solidFill>
+              </a:rPr>
+              <a:t>Top IT Companies on Data Science and AI</a:t>
+            </a:r>
+          </a:p>
+        </p:txBody>
+      </p:sp>
+      <p:pic>
+        <p:nvPicPr>
+          <p:cNvPr id="69" name="Graphic 68">
+            <a:extLst>
+              <a:ext uri="{FF2B5EF4-FFF2-40B4-BE49-F238E27FC236}">
+                <a16:creationId xmlns:a16="http://schemas.microsoft.com/office/drawing/2014/main" id="{9E86CCEA-2709-49E2-1646-FC136D58A67A}"/>
+              </a:ext>
+            </a:extLst>
+          </p:cNvPr>
+          <p:cNvPicPr>
+            <a:picLocks noChangeAspect="1"/>
+          </p:cNvPicPr>
+          <p:nvPr/>
+        </p:nvPicPr>
+        <p:blipFill>
+          <a:blip r:embed="rId28">
+            <a:extLst>
+              <a:ext uri="{96DAC541-7B7A-43D3-8B79-37D633B846F1}">
+                <asvg:svgBlip xmlns:asvg="http://schemas.microsoft.com/office/drawing/2016/SVG/main" r:embed="rId29"/>
+              </a:ext>
+            </a:extLst>
+          </a:blip>
+          <a:stretch>
+            <a:fillRect/>
+          </a:stretch>
+        </p:blipFill>
+        <p:spPr>
+          <a:xfrm>
+            <a:off x="2743842" y="1301469"/>
+            <a:ext cx="2800258" cy="417949"/>
+          </a:xfrm>
+          <a:prstGeom prst="rect">
+            <a:avLst/>
+          </a:prstGeom>
+        </p:spPr>
+      </p:pic>
     </p:spTree>
     <p:extLst>
       <p:ext uri="{BB962C8B-B14F-4D97-AF65-F5344CB8AC3E}">
@@ -4597,9 +7462,9 @@
 </file>
 
 <file path=ppt/theme/theme1.xml><?xml version="1.0" encoding="utf-8"?>
-<a:theme xmlns:a="http://schemas.openxmlformats.org/drawingml/2006/main" name="Office Theme">
+<a:theme xmlns:a="http://schemas.openxmlformats.org/drawingml/2006/main" name="Celestial">
   <a:themeElements>
-    <a:clrScheme name="Office">
+    <a:clrScheme name="Celestial">
       <a:dk1>
         <a:sysClr val="windowText" lastClr="000000"/>
       </a:dk1>
@@ -4607,44 +7472,44 @@
         <a:sysClr val="window" lastClr="FFFFFF"/>
       </a:lt1>
       <a:dk2>
-        <a:srgbClr val="44546A"/>
+        <a:srgbClr val="3F296A"/>
       </a:dk2>
       <a:lt2>
-        <a:srgbClr val="E7E6E6"/>
+        <a:srgbClr val="EBEBEB"/>
       </a:lt2>
       <a:accent1>
-        <a:srgbClr val="4472C4"/>
+        <a:srgbClr val="E84574"/>
       </a:accent1>
       <a:accent2>
-        <a:srgbClr val="ED7D31"/>
+        <a:srgbClr val="798FF2"/>
       </a:accent2>
       <a:accent3>
-        <a:srgbClr val="A5A5A5"/>
+        <a:srgbClr val="95C369"/>
       </a:accent3>
       <a:accent4>
-        <a:srgbClr val="FFC000"/>
+        <a:srgbClr val="EE875A"/>
       </a:accent4>
       <a:accent5>
-        <a:srgbClr val="5B9BD5"/>
+        <a:srgbClr val="C363E8"/>
       </a:accent5>
       <a:accent6>
-        <a:srgbClr val="70AD47"/>
+        <a:srgbClr val="6AADC8"/>
       </a:accent6>
       <a:hlink>
-        <a:srgbClr val="0563C1"/>
+        <a:srgbClr val="FE80C7"/>
       </a:hlink>
       <a:folHlink>
-        <a:srgbClr val="954F72"/>
+        <a:srgbClr val="FBA3EC"/>
       </a:folHlink>
     </a:clrScheme>
-    <a:fontScheme name="Office">
+    <a:fontScheme name="Celestial">
       <a:majorFont>
         <a:latin typeface="Calibri Light" panose="020F0302020204030204"/>
         <a:ea typeface=""/>
         <a:cs typeface=""/>
-        <a:font script="Jpan" typeface="游ゴシック Light"/>
+        <a:font script="Jpan" typeface="ＭＳ Ｐゴシック"/>
         <a:font script="Hang" typeface="맑은 고딕"/>
-        <a:font script="Hans" typeface="等线 Light"/>
+        <a:font script="Hans" typeface="宋体"/>
         <a:font script="Hant" typeface="新細明體"/>
         <a:font script="Arab" typeface="Times New Roman"/>
         <a:font script="Hebr" typeface="Times New Roman"/>
@@ -4672,31 +7537,14 @@
         <a:font script="Viet" typeface="Times New Roman"/>
         <a:font script="Uigh" typeface="Microsoft Uighur"/>
         <a:font script="Geor" typeface="Sylfaen"/>
-        <a:font script="Armn" typeface="Arial"/>
-        <a:font script="Bugi" typeface="Leelawadee UI"/>
-        <a:font script="Bopo" typeface="Microsoft JhengHei"/>
-        <a:font script="Java" typeface="Javanese Text"/>
-        <a:font script="Lisu" typeface="Segoe UI"/>
-        <a:font script="Mymr" typeface="Myanmar Text"/>
-        <a:font script="Nkoo" typeface="Ebrima"/>
-        <a:font script="Olck" typeface="Nirmala UI"/>
-        <a:font script="Osma" typeface="Ebrima"/>
-        <a:font script="Phag" typeface="Phagspa"/>
-        <a:font script="Syrn" typeface="Estrangelo Edessa"/>
-        <a:font script="Syrj" typeface="Estrangelo Edessa"/>
-        <a:font script="Syre" typeface="Estrangelo Edessa"/>
-        <a:font script="Sora" typeface="Nirmala UI"/>
-        <a:font script="Tale" typeface="Microsoft Tai Le"/>
-        <a:font script="Talu" typeface="Microsoft New Tai Lue"/>
-        <a:font script="Tfng" typeface="Ebrima"/>
       </a:majorFont>
       <a:minorFont>
         <a:latin typeface="Calibri" panose="020F0502020204030204"/>
         <a:ea typeface=""/>
         <a:cs typeface=""/>
-        <a:font script="Jpan" typeface="游ゴシック"/>
+        <a:font script="Jpan" typeface="ＭＳ Ｐゴシック"/>
         <a:font script="Hang" typeface="맑은 고딕"/>
-        <a:font script="Hans" typeface="等线"/>
+        <a:font script="Hans" typeface="宋体"/>
         <a:font script="Hant" typeface="新細明體"/>
         <a:font script="Arab" typeface="Arial"/>
         <a:font script="Hebr" typeface="Arial"/>
@@ -4724,26 +7572,9 @@
         <a:font script="Viet" typeface="Arial"/>
         <a:font script="Uigh" typeface="Microsoft Uighur"/>
         <a:font script="Geor" typeface="Sylfaen"/>
-        <a:font script="Armn" typeface="Arial"/>
-        <a:font script="Bugi" typeface="Leelawadee UI"/>
-        <a:font script="Bopo" typeface="Microsoft JhengHei"/>
-        <a:font script="Java" typeface="Javanese Text"/>
-        <a:font script="Lisu" typeface="Segoe UI"/>
-        <a:font script="Mymr" typeface="Myanmar Text"/>
-        <a:font script="Nkoo" typeface="Ebrima"/>
-        <a:font script="Olck" typeface="Nirmala UI"/>
-        <a:font script="Osma" typeface="Ebrima"/>
-        <a:font script="Phag" typeface="Phagspa"/>
-        <a:font script="Syrn" typeface="Estrangelo Edessa"/>
-        <a:font script="Syrj" typeface="Estrangelo Edessa"/>
-        <a:font script="Syre" typeface="Estrangelo Edessa"/>
-        <a:font script="Sora" typeface="Nirmala UI"/>
-        <a:font script="Tale" typeface="Microsoft Tai Le"/>
-        <a:font script="Talu" typeface="Microsoft New Tai Lue"/>
-        <a:font script="Tfng" typeface="Ebrima"/>
       </a:minorFont>
     </a:fontScheme>
-    <a:fmtScheme name="Office">
+    <a:fmtScheme name="Celestial">
       <a:fillStyleLst>
         <a:solidFill>
           <a:schemeClr val="phClr"/>
@@ -4752,23 +7583,14 @@
           <a:gsLst>
             <a:gs pos="0">
               <a:schemeClr val="phClr">
+                <a:tint val="70000"/>
                 <a:lumMod val="110000"/>
-                <a:satMod val="105000"/>
-                <a:tint val="67000"/>
-              </a:schemeClr>
-            </a:gs>
-            <a:gs pos="50000">
-              <a:schemeClr val="phClr">
-                <a:lumMod val="105000"/>
-                <a:satMod val="103000"/>
-                <a:tint val="73000"/>
               </a:schemeClr>
             </a:gs>
             <a:gs pos="100000">
               <a:schemeClr val="phClr">
-                <a:lumMod val="105000"/>
-                <a:satMod val="109000"/>
-                <a:tint val="81000"/>
+                <a:tint val="82000"/>
+                <a:alpha val="74000"/>
               </a:schemeClr>
             </a:gs>
           </a:gsLst>
@@ -4778,50 +7600,38 @@
           <a:gsLst>
             <a:gs pos="0">
               <a:schemeClr val="phClr">
-                <a:satMod val="103000"/>
-                <a:lumMod val="102000"/>
-                <a:tint val="94000"/>
-              </a:schemeClr>
-            </a:gs>
-            <a:gs pos="50000">
-              <a:schemeClr val="phClr">
-                <a:satMod val="110000"/>
+                <a:tint val="98000"/>
                 <a:lumMod val="100000"/>
-                <a:shade val="100000"/>
               </a:schemeClr>
             </a:gs>
             <a:gs pos="100000">
               <a:schemeClr val="phClr">
-                <a:lumMod val="99000"/>
-                <a:satMod val="120000"/>
-                <a:shade val="78000"/>
+                <a:shade val="88000"/>
+                <a:lumMod val="88000"/>
               </a:schemeClr>
             </a:gs>
           </a:gsLst>
-          <a:lin ang="5400000" scaled="0"/>
+          <a:lin ang="5400000" scaled="1"/>
         </a:gradFill>
       </a:fillStyleLst>
       <a:lnStyleLst>
-        <a:ln w="6350" cap="flat" cmpd="sng" algn="ctr">
+        <a:ln w="9525" cap="rnd" cmpd="sng" algn="ctr">
           <a:solidFill>
             <a:schemeClr val="phClr"/>
           </a:solidFill>
           <a:prstDash val="solid"/>
-          <a:miter lim="800000"/>
         </a:ln>
-        <a:ln w="12700" cap="flat" cmpd="sng" algn="ctr">
+        <a:ln w="19050" cap="rnd" cmpd="sng" algn="ctr">
           <a:solidFill>
             <a:schemeClr val="phClr"/>
           </a:solidFill>
           <a:prstDash val="solid"/>
-          <a:miter lim="800000"/>
         </a:ln>
-        <a:ln w="19050" cap="flat" cmpd="sng" algn="ctr">
+        <a:ln w="25400" cap="rnd" cmpd="sng" algn="ctr">
           <a:solidFill>
             <a:schemeClr val="phClr"/>
           </a:solidFill>
           <a:prstDash val="solid"/>
-          <a:miter lim="800000"/>
         </a:ln>
       </a:lnStyleLst>
       <a:effectStyleLst>
@@ -4829,55 +7639,64 @@
           <a:effectLst/>
         </a:effectStyle>
         <a:effectStyle>
-          <a:effectLst/>
+          <a:effectLst>
+            <a:outerShdw blurRad="50800" dist="38100" dir="5400000" rotWithShape="0">
+              <a:srgbClr val="000000">
+                <a:alpha val="35000"/>
+              </a:srgbClr>
+            </a:outerShdw>
+          </a:effectLst>
         </a:effectStyle>
         <a:effectStyle>
           <a:effectLst>
-            <a:outerShdw blurRad="57150" dist="19050" dir="5400000" algn="ctr" rotWithShape="0">
+            <a:outerShdw blurRad="63500" dist="38100" dir="5400000" rotWithShape="0">
               <a:srgbClr val="000000">
-                <a:alpha val="63000"/>
+                <a:alpha val="65000"/>
               </a:srgbClr>
             </a:outerShdw>
           </a:effectLst>
+          <a:scene3d>
+            <a:camera prst="orthographicFront">
+              <a:rot lat="0" lon="0" rev="0"/>
+            </a:camera>
+            <a:lightRig rig="threePt" dir="tl">
+              <a:rot lat="0" lon="0" rev="1200000"/>
+            </a:lightRig>
+          </a:scene3d>
+          <a:sp3d>
+            <a:bevelT w="38100" h="12700"/>
+          </a:sp3d>
         </a:effectStyle>
       </a:effectStyleLst>
       <a:bgFillStyleLst>
         <a:solidFill>
           <a:schemeClr val="phClr"/>
         </a:solidFill>
-        <a:solidFill>
-          <a:schemeClr val="phClr">
-            <a:tint val="95000"/>
-            <a:satMod val="170000"/>
-          </a:schemeClr>
-        </a:solidFill>
         <a:gradFill rotWithShape="1">
           <a:gsLst>
             <a:gs pos="0">
               <a:schemeClr val="phClr">
-                <a:tint val="93000"/>
-                <a:satMod val="150000"/>
-                <a:shade val="98000"/>
-                <a:lumMod val="102000"/>
-              </a:schemeClr>
-            </a:gs>
-            <a:gs pos="50000">
-              <a:schemeClr val="phClr">
-                <a:tint val="98000"/>
-                <a:satMod val="130000"/>
-                <a:shade val="90000"/>
-                <a:lumMod val="103000"/>
+                <a:tint val="90000"/>
+                <a:shade val="96000"/>
+                <a:hueMod val="100000"/>
+                <a:satMod val="180000"/>
+                <a:lumMod val="110000"/>
               </a:schemeClr>
             </a:gs>
             <a:gs pos="100000">
               <a:schemeClr val="phClr">
-                <a:shade val="63000"/>
-                <a:satMod val="120000"/>
+                <a:shade val="96000"/>
+                <a:satMod val="160000"/>
+                <a:lumMod val="100000"/>
               </a:schemeClr>
             </a:gs>
           </a:gsLst>
-          <a:lin ang="5400000" scaled="0"/>
+          <a:lin ang="4740000" scaled="1"/>
         </a:gradFill>
+        <a:blipFill>
+          <a:blip xmlns:r="http://schemas.openxmlformats.org/officeDocument/2006/relationships" r:embed="rId1"/>
+          <a:stretch/>
+        </a:blipFill>
       </a:bgFillStyleLst>
     </a:fmtScheme>
   </a:themeElements>
@@ -4885,7 +7704,7 @@
   <a:extraClrSchemeLst/>
   <a:extLst>
     <a:ext uri="{05A4C25C-085E-4340-85A3-A5531E510DB2}">
-      <thm15:themeFamily xmlns:thm15="http://schemas.microsoft.com/office/thememl/2012/main" name="Office Theme" id="{62F939B6-93AF-4DB8-9C6B-D6C7DFDC589F}" vid="{4A3C46E8-61CC-4603-A589-7422A47A8E4A}"/>
+      <thm15:themeFamily xmlns:thm15="http://schemas.microsoft.com/office/thememl/2012/main" name="Celestial" id="{C4BB2A3D-0E93-4C5F-B0D2-9D3FCE089CC5}" vid="{61DDDE80-2DFA-4F2A-B66F-72059846BDAA}"/>
     </a:ext>
   </a:extLst>
 </a:theme>

--- a/ch_00_setup/1. Introduction to Python Programming.pptx
+++ b/ch_00_setup/1. Introduction to Python Programming.pptx
@@ -5898,14 +5898,35 @@
           <a:p>
             <a:pPr algn="ctr"/>
             <a:r>
-              <a:rPr lang="en-US" dirty="0"/>
+              <a:rPr lang="en-US" b="1" dirty="0">
+                <a:solidFill>
+                  <a:schemeClr val="accent6">
+                    <a:lumMod val="40000"/>
+                    <a:lumOff val="60000"/>
+                  </a:schemeClr>
+                </a:solidFill>
+              </a:rPr>
               <a:t>Introduction to</a:t>
             </a:r>
             <a:br>
-              <a:rPr lang="en-US" dirty="0"/>
+              <a:rPr lang="en-US" b="1" dirty="0">
+                <a:solidFill>
+                  <a:schemeClr val="accent6">
+                    <a:lumMod val="40000"/>
+                    <a:lumOff val="60000"/>
+                  </a:schemeClr>
+                </a:solidFill>
+              </a:rPr>
             </a:br>
             <a:r>
-              <a:rPr lang="en-US" dirty="0"/>
+              <a:rPr lang="en-US" b="1" dirty="0">
+                <a:solidFill>
+                  <a:schemeClr val="accent6">
+                    <a:lumMod val="40000"/>
+                    <a:lumOff val="60000"/>
+                  </a:schemeClr>
+                </a:solidFill>
+              </a:rPr>
               <a:t> Python</a:t>
             </a:r>
           </a:p>
@@ -6368,7 +6389,7 @@
         </p:blipFill>
         <p:spPr>
           <a:xfrm>
-            <a:off x="11098051" y="3171979"/>
+            <a:off x="9997038" y="675193"/>
             <a:ext cx="1055781" cy="914366"/>
           </a:xfrm>
           <a:prstGeom prst="rect">
@@ -6820,7 +6841,7 @@
         </p:blipFill>
         <p:spPr>
           <a:xfrm>
-            <a:off x="3236864" y="2351328"/>
+            <a:off x="3220292" y="2304459"/>
             <a:ext cx="2821344" cy="640305"/>
           </a:xfrm>
           <a:prstGeom prst="rect">
@@ -6916,8 +6937,8 @@
         </p:blipFill>
         <p:spPr>
           <a:xfrm>
-            <a:off x="10694618" y="3398386"/>
-            <a:ext cx="1181100" cy="314325"/>
+            <a:off x="9959252" y="3693078"/>
+            <a:ext cx="998220" cy="265655"/>
           </a:xfrm>
           <a:prstGeom prst="rect">
             <a:avLst/>
@@ -6952,7 +6973,7 @@
         </p:blipFill>
         <p:spPr>
           <a:xfrm>
-            <a:off x="6012465" y="5746305"/>
+            <a:off x="6012465" y="5701202"/>
             <a:ext cx="938704" cy="938704"/>
           </a:xfrm>
           <a:prstGeom prst="rect">
@@ -7018,7 +7039,7 @@
         </p:blipFill>
         <p:spPr>
           <a:xfrm>
-            <a:off x="6450728" y="3411117"/>
+            <a:off x="6707498" y="4573605"/>
             <a:ext cx="3750864" cy="603189"/>
           </a:xfrm>
           <a:prstGeom prst="rect">
@@ -7143,7 +7164,7 @@
         </p:blipFill>
         <p:spPr>
           <a:xfrm>
-            <a:off x="105032" y="2351328"/>
+            <a:off x="105032" y="2312113"/>
             <a:ext cx="2883503" cy="573600"/>
           </a:xfrm>
           <a:prstGeom prst="rect">
@@ -7173,7 +7194,7 @@
         </p:blipFill>
         <p:spPr>
           <a:xfrm>
-            <a:off x="7108795" y="4482589"/>
+            <a:off x="6638903" y="3365596"/>
             <a:ext cx="2810064" cy="785247"/>
           </a:xfrm>
           <a:prstGeom prst="rect">
@@ -7209,7 +7230,7 @@
         </p:blipFill>
         <p:spPr>
           <a:xfrm>
-            <a:off x="4967469" y="3919110"/>
+            <a:off x="4912634" y="3958733"/>
             <a:ext cx="1547607" cy="1690761"/>
           </a:xfrm>
           <a:prstGeom prst="rect">
@@ -7269,7 +7290,7 @@
         </p:blipFill>
         <p:spPr>
           <a:xfrm>
-            <a:off x="881182" y="5124992"/>
+            <a:off x="723821" y="5176542"/>
             <a:ext cx="2358896" cy="1338408"/>
           </a:xfrm>
           <a:prstGeom prst="rect">
@@ -7329,7 +7350,7 @@
         </p:blipFill>
         <p:spPr>
           <a:xfrm>
-            <a:off x="7140476" y="5576026"/>
+            <a:off x="7177503" y="5574081"/>
             <a:ext cx="1282743" cy="1110928"/>
           </a:xfrm>
           <a:prstGeom prst="rect">
@@ -7365,7 +7386,7 @@
         </p:blipFill>
         <p:spPr>
           <a:xfrm>
-            <a:off x="3404881" y="5774432"/>
+            <a:off x="3404881" y="5845746"/>
             <a:ext cx="2381250" cy="476250"/>
           </a:xfrm>
           <a:prstGeom prst="rect">
